--- a/Bases de Datos II/Clases/Clase 4 - Funciones disparadores seguridad respaldo/Presentacion.pptx
+++ b/Bases de Datos II/Clases/Clase 4 - Funciones disparadores seguridad respaldo/Presentacion.pptx
@@ -20,8 +20,6 @@
     <p:sldId id="268" r:id="rId19"/>
     <p:sldId id="269" r:id="rId20"/>
     <p:sldId id="270" r:id="rId21"/>
-    <p:sldId id="271" r:id="rId22"/>
-    <p:sldId id="272" r:id="rId23"/>
   </p:sldIdLst>
   <p:sldSz cx="12191695" cy="6858000" type="screen4x3"/>
   <p:notesSz cx="6858000" cy="9144000"/>
@@ -6112,1017 +6110,6 @@
         <p:spPr>
           <a:xfrm>
             <a:off x="0" y="0"/>
-            <a:ext cx="12191695" cy="1170432"/>
-          </a:xfrm>
-          <a:prstGeom prst="rect">
-            <a:avLst/>
-          </a:prstGeom>
-          <a:solidFill>
-            <a:srgbClr val="095292"/>
-          </a:solidFill>
-          <a:ln>
-            <a:noFill/>
-          </a:ln>
-        </p:spPr>
-        <p:style>
-          <a:lnRef idx="1">
-            <a:schemeClr val="accent1"/>
-          </a:lnRef>
-          <a:fillRef idx="3">
-            <a:schemeClr val="accent1"/>
-          </a:fillRef>
-          <a:effectRef idx="2">
-            <a:schemeClr val="accent1"/>
-          </a:effectRef>
-          <a:fontRef idx="minor">
-            <a:schemeClr val="lt1"/>
-          </a:fontRef>
-        </p:style>
-        <p:txBody>
-          <a:bodyPr rtlCol="0" anchor="ctr"/>
-          <a:lstStyle/>
-          <a:p>
-            <a:pPr algn="ctr"/>
-          </a:p>
-        </p:txBody>
-      </p:sp>
-      <p:sp>
-        <p:nvSpPr>
-          <p:cNvPr id="3" name="Rectangle 2"/>
-          <p:cNvSpPr/>
-          <p:nvPr/>
-        </p:nvSpPr>
-        <p:spPr>
-          <a:xfrm>
-            <a:off x="0" y="1170432"/>
-            <a:ext cx="12191695" cy="41148"/>
-          </a:xfrm>
-          <a:prstGeom prst="rect">
-            <a:avLst/>
-          </a:prstGeom>
-          <a:solidFill>
-            <a:srgbClr val="FFD000"/>
-          </a:solidFill>
-          <a:ln>
-            <a:noFill/>
-          </a:ln>
-        </p:spPr>
-        <p:style>
-          <a:lnRef idx="1">
-            <a:schemeClr val="accent1"/>
-          </a:lnRef>
-          <a:fillRef idx="3">
-            <a:schemeClr val="accent1"/>
-          </a:fillRef>
-          <a:effectRef idx="2">
-            <a:schemeClr val="accent1"/>
-          </a:effectRef>
-          <a:fontRef idx="minor">
-            <a:schemeClr val="lt1"/>
-          </a:fontRef>
-        </p:style>
-        <p:txBody>
-          <a:bodyPr rtlCol="0" anchor="ctr"/>
-          <a:lstStyle/>
-          <a:p>
-            <a:pPr algn="ctr"/>
-          </a:p>
-        </p:txBody>
-      </p:sp>
-      <p:sp>
-        <p:nvSpPr>
-          <p:cNvPr id="4" name="TextBox 3"/>
-          <p:cNvSpPr txBox="1"/>
-          <p:nvPr/>
-        </p:nvSpPr>
-        <p:spPr>
-          <a:xfrm>
-            <a:off x="457200" y="164592"/>
-            <a:ext cx="11277295" cy="384048"/>
-          </a:xfrm>
-          <a:prstGeom prst="rect">
-            <a:avLst/>
-          </a:prstGeom>
-          <a:noFill/>
-        </p:spPr>
-        <p:txBody>
-          <a:bodyPr wrap="square">
-            <a:spAutoFit/>
-          </a:bodyPr>
-          <a:lstStyle/>
-          <a:p>
-            <a:r>
-              <a:rPr sz="2600" b="1" i="0">
-                <a:solidFill>
-                  <a:srgbClr val="FFFFFF"/>
-                </a:solidFill>
-                <a:latin typeface="Calibri"/>
-              </a:rPr>
-              <a:t>Quiz rapido (cierre)</a:t>
-            </a:r>
-          </a:p>
-        </p:txBody>
-      </p:sp>
-      <p:sp>
-        <p:nvSpPr>
-          <p:cNvPr id="5" name="TextBox 4"/>
-          <p:cNvSpPr txBox="1"/>
-          <p:nvPr/>
-        </p:nvSpPr>
-        <p:spPr>
-          <a:xfrm>
-            <a:off x="457200" y="566928"/>
-            <a:ext cx="11277295" cy="411480"/>
-          </a:xfrm>
-          <a:prstGeom prst="rect">
-            <a:avLst/>
-          </a:prstGeom>
-          <a:noFill/>
-        </p:spPr>
-        <p:txBody>
-          <a:bodyPr wrap="square">
-            <a:spAutoFit/>
-          </a:bodyPr>
-          <a:lstStyle/>
-          <a:p>
-            <a:r>
-              <a:rPr sz="1400" b="0" i="0">
-                <a:solidFill>
-                  <a:srgbClr val="B8D8EE"/>
-                </a:solidFill>
-                <a:latin typeface="Calibri"/>
-              </a:rPr>
-              <a:t>Individual · 8–10 min</a:t>
-            </a:r>
-          </a:p>
-        </p:txBody>
-      </p:sp>
-      <p:sp>
-        <p:nvSpPr>
-          <p:cNvPr id="6" name="TextBox 5"/>
-          <p:cNvSpPr txBox="1"/>
-          <p:nvPr/>
-        </p:nvSpPr>
-        <p:spPr>
-          <a:xfrm>
-            <a:off x="457200" y="1380744"/>
-            <a:ext cx="11277295" cy="5020056"/>
-          </a:xfrm>
-          <a:prstGeom prst="rect">
-            <a:avLst/>
-          </a:prstGeom>
-          <a:noFill/>
-        </p:spPr>
-        <p:txBody>
-          <a:bodyPr wrap="square">
-            <a:spAutoFit/>
-          </a:bodyPr>
-          <a:lstStyle/>
-          <a:p>
-            <a:pPr>
-              <a:spcAft>
-                <a:spcPts val="800"/>
-              </a:spcAft>
-            </a:pPr>
-            <a:r>
-              <a:rPr sz="1200" b="1" i="0">
-                <a:solidFill>
-                  <a:srgbClr val="333333"/>
-                </a:solidFill>
-                <a:latin typeface="Calibri"/>
-              </a:rPr>
-              <a:t>1.</a:t>
-            </a:r>
-            <a:r>
-              <a:rPr sz="1200" b="0" i="0">
-                <a:solidFill>
-                  <a:srgbClr val="333333"/>
-                </a:solidFill>
-                <a:latin typeface="Calibri"/>
-              </a:rPr>
-              <a:t> Función vs procedimiento en el PI:</a:t>
-            </a:r>
-          </a:p>
-          <a:p>
-            <a:pPr>
-              <a:spcAft>
-                <a:spcPts val="800"/>
-              </a:spcAft>
-            </a:pPr>
-            <a:r>
-              <a:rPr sz="1200" b="0" i="0">
-                <a:solidFill>
-                  <a:srgbClr val="333333"/>
-                </a:solidFill>
-                <a:latin typeface="Calibri"/>
-              </a:rPr>
-              <a:t>–   ('A) Son idénticos', 1)</a:t>
-            </a:r>
-          </a:p>
-          <a:p>
-            <a:pPr>
-              <a:spcAft>
-                <a:spcPts val="800"/>
-              </a:spcAft>
-            </a:pPr>
-            <a:r>
-              <a:rPr sz="1200" b="0" i="0">
-                <a:solidFill>
-                  <a:srgbClr val="333333"/>
-                </a:solidFill>
-                <a:latin typeface="Calibri"/>
-              </a:rPr>
-              <a:t>–   ('B) Función retorna valor usable en SQL; proc orquesta acciones', 1)</a:t>
-            </a:r>
-          </a:p>
-          <a:p>
-            <a:pPr>
-              <a:spcAft>
-                <a:spcPts val="800"/>
-              </a:spcAft>
-            </a:pPr>
-            <a:r>
-              <a:rPr sz="1200" b="0" i="0">
-                <a:solidFill>
-                  <a:srgbClr val="333333"/>
-                </a:solidFill>
-                <a:latin typeface="Calibri"/>
-              </a:rPr>
-              <a:t>–   ('C) Proc no puede validar', 1)</a:t>
-            </a:r>
-          </a:p>
-          <a:p>
-            <a:pPr>
-              <a:spcAft>
-                <a:spcPts val="800"/>
-              </a:spcAft>
-            </a:pPr>
-            <a:r>
-              <a:rPr sz="1200" b="0" i="0">
-                <a:solidFill>
-                  <a:srgbClr val="333333"/>
-                </a:solidFill>
-                <a:latin typeface="Calibri"/>
-              </a:rPr>
-              <a:t>–   ('D) Función borra tablas siempre', 1)</a:t>
-            </a:r>
-          </a:p>
-          <a:p>
-            <a:pPr>
-              <a:spcAft>
-                <a:spcPts val="800"/>
-              </a:spcAft>
-            </a:pPr>
-            <a:r>
-              <a:rPr sz="1200" b="0" i="0">
-                <a:solidFill>
-                  <a:srgbClr val="333333"/>
-                </a:solidFill>
-                <a:latin typeface="Calibri"/>
-              </a:rPr>
-              <a:t>–   </a:t>
-            </a:r>
-            <a:r>
-              <a:rPr sz="1200" b="1" i="0">
-                <a:solidFill>
-                  <a:srgbClr val="333333"/>
-                </a:solidFill>
-                <a:latin typeface="Calibri"/>
-              </a:rPr>
-              <a:t>2.</a:t>
-            </a:r>
-            <a:r>
-              <a:rPr sz="1200" b="0" i="0">
-                <a:solidFill>
-                  <a:srgbClr val="333333"/>
-                </a:solidFill>
-                <a:latin typeface="Calibri"/>
-              </a:rPr>
-              <a:t> Un trigger de cancelación/auditoría sirve para:</a:t>
-            </a:r>
-          </a:p>
-          <a:p>
-            <a:pPr>
-              <a:spcAft>
-                <a:spcPts val="800"/>
-              </a:spcAft>
-            </a:pPr>
-            <a:r>
-              <a:rPr sz="1200" b="0" i="0">
-                <a:solidFill>
-                  <a:srgbClr val="333333"/>
-                </a:solidFill>
-                <a:latin typeface="Calibri"/>
-              </a:rPr>
-              <a:t>–   ('A) Decoración', 1)</a:t>
-            </a:r>
-          </a:p>
-          <a:p>
-            <a:pPr>
-              <a:spcAft>
-                <a:spcPts val="800"/>
-              </a:spcAft>
-            </a:pPr>
-            <a:r>
-              <a:rPr sz="1200" b="0" i="0">
-                <a:solidFill>
-                  <a:srgbClr val="333333"/>
-                </a:solidFill>
-                <a:latin typeface="Calibri"/>
-              </a:rPr>
-              <a:t>–   ('B) Auditar cambios sensibles sin depender solo de la app', 1)</a:t>
-            </a:r>
-          </a:p>
-          <a:p>
-            <a:pPr>
-              <a:spcAft>
-                <a:spcPts val="800"/>
-              </a:spcAft>
-            </a:pPr>
-            <a:r>
-              <a:rPr sz="1200" b="0" i="0">
-                <a:solidFill>
-                  <a:srgbClr val="333333"/>
-                </a:solidFill>
-                <a:latin typeface="Calibri"/>
-              </a:rPr>
-              <a:t>–   ('C) Eliminar backups', 1)</a:t>
-            </a:r>
-          </a:p>
-          <a:p>
-            <a:pPr>
-              <a:spcAft>
-                <a:spcPts val="800"/>
-              </a:spcAft>
-            </a:pPr>
-            <a:r>
-              <a:rPr sz="1200" b="0" i="0">
-                <a:solidFill>
-                  <a:srgbClr val="333333"/>
-                </a:solidFill>
-                <a:latin typeface="Calibri"/>
-              </a:rPr>
-              <a:t>–   ('D) Quitar FK', 1)</a:t>
-            </a:r>
-          </a:p>
-          <a:p>
-            <a:pPr>
-              <a:spcAft>
-                <a:spcPts val="800"/>
-              </a:spcAft>
-            </a:pPr>
-            <a:r>
-              <a:rPr sz="1200" b="0" i="0">
-                <a:solidFill>
-                  <a:srgbClr val="333333"/>
-                </a:solidFill>
-                <a:latin typeface="Calibri"/>
-              </a:rPr>
-              <a:t>–   </a:t>
-            </a:r>
-            <a:r>
-              <a:rPr sz="1200" b="1" i="0">
-                <a:solidFill>
-                  <a:srgbClr val="333333"/>
-                </a:solidFill>
-                <a:latin typeface="Calibri"/>
-              </a:rPr>
-              <a:t>3.</a:t>
-            </a:r>
-            <a:r>
-              <a:rPr sz="1200" b="0" i="0">
-                <a:solidFill>
-                  <a:srgbClr val="333333"/>
-                </a:solidFill>
-                <a:latin typeface="Calibri"/>
-              </a:rPr>
-              <a:t> RPO = cantidad máxima de dato que se acepta perder (punto de recuperación).</a:t>
-            </a:r>
-          </a:p>
-          <a:p>
-            <a:pPr>
-              <a:spcAft>
-                <a:spcPts val="800"/>
-              </a:spcAft>
-            </a:pPr>
-            <a:r>
-              <a:rPr sz="1200" b="0" i="0">
-                <a:solidFill>
-                  <a:srgbClr val="333333"/>
-                </a:solidFill>
-                <a:latin typeface="Calibri"/>
-              </a:rPr>
-              <a:t>–   ('( ) Verdadero    ( ) Falso', 1)</a:t>
-            </a:r>
-          </a:p>
-          <a:p>
-            <a:pPr>
-              <a:spcAft>
-                <a:spcPts val="800"/>
-              </a:spcAft>
-            </a:pPr>
-            <a:r>
-              <a:rPr sz="1200" b="0" i="0">
-                <a:solidFill>
-                  <a:srgbClr val="333333"/>
-                </a:solidFill>
-                <a:latin typeface="Calibri"/>
-              </a:rPr>
-              <a:t>–   </a:t>
-            </a:r>
-            <a:r>
-              <a:rPr sz="1200" b="1" i="0">
-                <a:solidFill>
-                  <a:srgbClr val="333333"/>
-                </a:solidFill>
-                <a:latin typeface="Calibri"/>
-              </a:rPr>
-              <a:t>4.</a:t>
-            </a:r>
-            <a:r>
-              <a:rPr sz="1200" b="0" i="0">
-                <a:solidFill>
-                  <a:srgbClr val="333333"/>
-                </a:solidFill>
-                <a:latin typeface="Calibri"/>
-              </a:rPr>
-              <a:t> RTO mide el tiempo objetivo para volver a operación tras un incidente.</a:t>
-            </a:r>
-          </a:p>
-          <a:p>
-            <a:pPr>
-              <a:spcAft>
-                <a:spcPts val="800"/>
-              </a:spcAft>
-            </a:pPr>
-            <a:r>
-              <a:rPr sz="1200" b="0" i="0">
-                <a:solidFill>
-                  <a:srgbClr val="333333"/>
-                </a:solidFill>
-                <a:latin typeface="Calibri"/>
-              </a:rPr>
-              <a:t>–   ('( ) Verdadero    ( ) Falso', 1)</a:t>
-            </a:r>
-          </a:p>
-        </p:txBody>
-      </p:sp>
-      <p:sp>
-        <p:nvSpPr>
-          <p:cNvPr id="7" name="TextBox 6"/>
-          <p:cNvSpPr txBox="1"/>
-          <p:nvPr/>
-        </p:nvSpPr>
-        <p:spPr>
-          <a:xfrm>
-            <a:off x="11185855" y="6473952"/>
-            <a:ext cx="640080" cy="274320"/>
-          </a:xfrm>
-          <a:prstGeom prst="rect">
-            <a:avLst/>
-          </a:prstGeom>
-          <a:noFill/>
-        </p:spPr>
-        <p:txBody>
-          <a:bodyPr wrap="square">
-            <a:spAutoFit/>
-          </a:bodyPr>
-          <a:lstStyle/>
-          <a:p>
-            <a:pPr algn="r"/>
-            <a:r>
-              <a:rPr sz="1100" b="0" i="0">
-                <a:solidFill>
-                  <a:srgbClr val="666666"/>
-                </a:solidFill>
-                <a:latin typeface="Calibri"/>
-              </a:rPr>
-              <a:t>15</a:t>
-            </a:r>
-          </a:p>
-        </p:txBody>
-      </p:sp>
-    </p:spTree>
-  </p:cSld>
-  <p:clrMapOvr>
-    <a:masterClrMapping/>
-  </p:clrMapOvr>
-</p:sld>
-</file>
-
-<file path=ppt/slides/slide16.xml><?xml version="1.0" encoding="utf-8"?>
-<p:sld xmlns:a="http://schemas.openxmlformats.org/drawingml/2006/main" xmlns:p="http://schemas.openxmlformats.org/presentationml/2006/main" xmlns:r="http://schemas.openxmlformats.org/officeDocument/2006/relationships">
-  <p:cSld>
-    <p:bg>
-      <p:bgPr>
-        <a:solidFill>
-          <a:srgbClr val="FFFFFF"/>
-        </a:solidFill>
-        <a:effectLst/>
-      </p:bgPr>
-    </p:bg>
-    <p:spTree>
-      <p:nvGrpSpPr>
-        <p:cNvPr id="1" name=""/>
-        <p:cNvGrpSpPr/>
-        <p:nvPr/>
-      </p:nvGrpSpPr>
-      <p:grpSpPr/>
-      <p:sp>
-        <p:nvSpPr>
-          <p:cNvPr id="2" name="Rectangle 1"/>
-          <p:cNvSpPr/>
-          <p:nvPr/>
-        </p:nvSpPr>
-        <p:spPr>
-          <a:xfrm>
-            <a:off x="0" y="0"/>
-            <a:ext cx="12191695" cy="1170432"/>
-          </a:xfrm>
-          <a:prstGeom prst="rect">
-            <a:avLst/>
-          </a:prstGeom>
-          <a:solidFill>
-            <a:srgbClr val="095292"/>
-          </a:solidFill>
-          <a:ln>
-            <a:noFill/>
-          </a:ln>
-        </p:spPr>
-        <p:style>
-          <a:lnRef idx="1">
-            <a:schemeClr val="accent1"/>
-          </a:lnRef>
-          <a:fillRef idx="3">
-            <a:schemeClr val="accent1"/>
-          </a:fillRef>
-          <a:effectRef idx="2">
-            <a:schemeClr val="accent1"/>
-          </a:effectRef>
-          <a:fontRef idx="minor">
-            <a:schemeClr val="lt1"/>
-          </a:fontRef>
-        </p:style>
-        <p:txBody>
-          <a:bodyPr rtlCol="0" anchor="ctr"/>
-          <a:lstStyle/>
-          <a:p>
-            <a:pPr algn="ctr"/>
-          </a:p>
-        </p:txBody>
-      </p:sp>
-      <p:sp>
-        <p:nvSpPr>
-          <p:cNvPr id="3" name="Rectangle 2"/>
-          <p:cNvSpPr/>
-          <p:nvPr/>
-        </p:nvSpPr>
-        <p:spPr>
-          <a:xfrm>
-            <a:off x="0" y="1170432"/>
-            <a:ext cx="12191695" cy="41148"/>
-          </a:xfrm>
-          <a:prstGeom prst="rect">
-            <a:avLst/>
-          </a:prstGeom>
-          <a:solidFill>
-            <a:srgbClr val="FFD000"/>
-          </a:solidFill>
-          <a:ln>
-            <a:noFill/>
-          </a:ln>
-        </p:spPr>
-        <p:style>
-          <a:lnRef idx="1">
-            <a:schemeClr val="accent1"/>
-          </a:lnRef>
-          <a:fillRef idx="3">
-            <a:schemeClr val="accent1"/>
-          </a:fillRef>
-          <a:effectRef idx="2">
-            <a:schemeClr val="accent1"/>
-          </a:effectRef>
-          <a:fontRef idx="minor">
-            <a:schemeClr val="lt1"/>
-          </a:fontRef>
-        </p:style>
-        <p:txBody>
-          <a:bodyPr rtlCol="0" anchor="ctr"/>
-          <a:lstStyle/>
-          <a:p>
-            <a:pPr algn="ctr"/>
-          </a:p>
-        </p:txBody>
-      </p:sp>
-      <p:sp>
-        <p:nvSpPr>
-          <p:cNvPr id="4" name="TextBox 3"/>
-          <p:cNvSpPr txBox="1"/>
-          <p:nvPr/>
-        </p:nvSpPr>
-        <p:spPr>
-          <a:xfrm>
-            <a:off x="457200" y="164592"/>
-            <a:ext cx="11277295" cy="384048"/>
-          </a:xfrm>
-          <a:prstGeom prst="rect">
-            <a:avLst/>
-          </a:prstGeom>
-          <a:noFill/>
-        </p:spPr>
-        <p:txBody>
-          <a:bodyPr wrap="square">
-            <a:spAutoFit/>
-          </a:bodyPr>
-          <a:lstStyle/>
-          <a:p>
-            <a:r>
-              <a:rPr sz="2600" b="1" i="0">
-                <a:solidFill>
-                  <a:srgbClr val="FFFFFF"/>
-                </a:solidFill>
-                <a:latin typeface="Calibri"/>
-              </a:rPr>
-              <a:t>Quiz rapido (cierre) · cont. 2</a:t>
-            </a:r>
-          </a:p>
-        </p:txBody>
-      </p:sp>
-      <p:sp>
-        <p:nvSpPr>
-          <p:cNvPr id="5" name="TextBox 4"/>
-          <p:cNvSpPr txBox="1"/>
-          <p:nvPr/>
-        </p:nvSpPr>
-        <p:spPr>
-          <a:xfrm>
-            <a:off x="457200" y="566928"/>
-            <a:ext cx="11277295" cy="411480"/>
-          </a:xfrm>
-          <a:prstGeom prst="rect">
-            <a:avLst/>
-          </a:prstGeom>
-          <a:noFill/>
-        </p:spPr>
-        <p:txBody>
-          <a:bodyPr wrap="square">
-            <a:spAutoFit/>
-          </a:bodyPr>
-          <a:lstStyle/>
-          <a:p>
-            <a:r>
-              <a:rPr sz="1400" b="0" i="0">
-                <a:solidFill>
-                  <a:srgbClr val="B8D8EE"/>
-                </a:solidFill>
-                <a:latin typeface="Calibri"/>
-              </a:rPr>
-              <a:t>Individual · 8–10 min</a:t>
-            </a:r>
-          </a:p>
-        </p:txBody>
-      </p:sp>
-      <p:sp>
-        <p:nvSpPr>
-          <p:cNvPr id="6" name="TextBox 5"/>
-          <p:cNvSpPr txBox="1"/>
-          <p:nvPr/>
-        </p:nvSpPr>
-        <p:spPr>
-          <a:xfrm>
-            <a:off x="457200" y="1380744"/>
-            <a:ext cx="11277295" cy="5020056"/>
-          </a:xfrm>
-          <a:prstGeom prst="rect">
-            <a:avLst/>
-          </a:prstGeom>
-          <a:noFill/>
-        </p:spPr>
-        <p:txBody>
-          <a:bodyPr wrap="square">
-            <a:spAutoFit/>
-          </a:bodyPr>
-          <a:lstStyle/>
-          <a:p>
-            <a:pPr>
-              <a:spcAft>
-                <a:spcPts val="800"/>
-              </a:spcAft>
-            </a:pPr>
-            <a:r>
-              <a:rPr sz="1200" b="0" i="0">
-                <a:solidFill>
-                  <a:srgbClr val="333333"/>
-                </a:solidFill>
-                <a:latin typeface="Calibri"/>
-              </a:rPr>
-              <a:t>–   </a:t>
-            </a:r>
-            <a:r>
-              <a:rPr sz="1200" b="1" i="0">
-                <a:solidFill>
-                  <a:srgbClr val="333333"/>
-                </a:solidFill>
-                <a:latin typeface="Calibri"/>
-              </a:rPr>
-              <a:t>5.</a:t>
-            </a:r>
-            <a:r>
-              <a:rPr sz="1200" b="0" i="0">
-                <a:solidFill>
-                  <a:srgbClr val="333333"/>
-                </a:solidFill>
-                <a:latin typeface="Calibri"/>
-              </a:rPr>
-              <a:t> Evidencia de respaldo mínima razonable en el PI:</a:t>
-            </a:r>
-          </a:p>
-          <a:p>
-            <a:pPr>
-              <a:spcAft>
-                <a:spcPts val="800"/>
-              </a:spcAft>
-            </a:pPr>
-            <a:r>
-              <a:rPr sz="1200" b="0" i="0">
-                <a:solidFill>
-                  <a:srgbClr val="333333"/>
-                </a:solidFill>
-                <a:latin typeface="Calibri"/>
-              </a:rPr>
-              <a:t>–   ('A) «Ya lo hacemos» sin archivo', 1)</a:t>
-            </a:r>
-          </a:p>
-          <a:p>
-            <a:pPr>
-              <a:spcAft>
-                <a:spcPts val="800"/>
-              </a:spcAft>
-            </a:pPr>
-            <a:r>
-              <a:rPr sz="1200" b="0" i="0">
-                <a:solidFill>
-                  <a:srgbClr val="333333"/>
-                </a:solidFill>
-                <a:latin typeface="Calibri"/>
-              </a:rPr>
-              <a:t>–   ('B) Plan RPO/RTO + script/export de prueba', 1)</a:t>
-            </a:r>
-          </a:p>
-          <a:p>
-            <a:pPr>
-              <a:spcAft>
-                <a:spcPts val="800"/>
-              </a:spcAft>
-            </a:pPr>
-            <a:r>
-              <a:rPr sz="1200" b="0" i="0">
-                <a:solidFill>
-                  <a:srgbClr val="333333"/>
-                </a:solidFill>
-                <a:latin typeface="Calibri"/>
-              </a:rPr>
-              <a:t>–   ('C) Solo meme', 1)</a:t>
-            </a:r>
-          </a:p>
-          <a:p>
-            <a:pPr>
-              <a:spcAft>
-                <a:spcPts val="800"/>
-              </a:spcAft>
-            </a:pPr>
-            <a:r>
-              <a:rPr sz="1200" b="0" i="0">
-                <a:solidFill>
-                  <a:srgbClr val="333333"/>
-                </a:solidFill>
-                <a:latin typeface="Calibri"/>
-              </a:rPr>
-              <a:t>–   ('D) Apagar el playground', 1)</a:t>
-            </a:r>
-          </a:p>
-          <a:p>
-            <a:pPr>
-              <a:spcAft>
-                <a:spcPts val="800"/>
-              </a:spcAft>
-            </a:pPr>
-            <a:r>
-              <a:rPr sz="1200" b="0" i="0">
-                <a:solidFill>
-                  <a:srgbClr val="333333"/>
-                </a:solidFill>
-                <a:latin typeface="Calibri"/>
-              </a:rPr>
-              <a:t>–   </a:t>
-            </a:r>
-            <a:r>
-              <a:rPr sz="1200" b="1" i="0">
-                <a:solidFill>
-                  <a:srgbClr val="333333"/>
-                </a:solidFill>
-                <a:latin typeface="Calibri"/>
-              </a:rPr>
-              <a:t>6.</a:t>
-            </a:r>
-            <a:r>
-              <a:rPr sz="1200" b="0" i="0">
-                <a:solidFill>
-                  <a:srgbClr val="333333"/>
-                </a:solidFill>
-                <a:latin typeface="Calibri"/>
-              </a:rPr>
-              <a:t> La seguridad del PI termina al crear un usuario; no hace falta auditar cambios sensibles.</a:t>
-            </a:r>
-          </a:p>
-          <a:p>
-            <a:pPr>
-              <a:spcAft>
-                <a:spcPts val="800"/>
-              </a:spcAft>
-            </a:pPr>
-            <a:r>
-              <a:rPr sz="1200" b="0" i="0">
-                <a:solidFill>
-                  <a:srgbClr val="333333"/>
-                </a:solidFill>
-                <a:latin typeface="Calibri"/>
-              </a:rPr>
-              <a:t>–   ('( ) Verdadero    ( ) Falso', 1)</a:t>
-            </a:r>
-          </a:p>
-          <a:p>
-            <a:pPr>
-              <a:spcAft>
-                <a:spcPts val="800"/>
-              </a:spcAft>
-            </a:pPr>
-            <a:r>
-              <a:rPr sz="1200" b="0" i="0">
-                <a:solidFill>
-                  <a:srgbClr val="333333"/>
-                </a:solidFill>
-                <a:latin typeface="Calibri"/>
-              </a:rPr>
-              <a:t>–   </a:t>
-            </a:r>
-            <a:r>
-              <a:rPr sz="1200" b="1" i="0">
-                <a:solidFill>
-                  <a:srgbClr val="333333"/>
-                </a:solidFill>
-                <a:latin typeface="Calibri"/>
-              </a:rPr>
-              <a:t>7.</a:t>
-            </a:r>
-            <a:r>
-              <a:rPr sz="1200" b="0" i="0">
-                <a:solidFill>
-                  <a:srgbClr val="333333"/>
-                </a:solidFill>
-                <a:latin typeface="Calibri"/>
-              </a:rPr>
-              <a:t> Proponga un trigger VetCare (evento + tabla + qué registra).</a:t>
-            </a:r>
-          </a:p>
-          <a:p>
-            <a:pPr>
-              <a:spcAft>
-                <a:spcPts val="800"/>
-              </a:spcAft>
-            </a:pPr>
-            <a:r>
-              <a:rPr sz="1200" b="0" i="0">
-                <a:solidFill>
-                  <a:srgbClr val="333333"/>
-                </a:solidFill>
-                <a:latin typeface="Calibri"/>
-              </a:rPr>
-              <a:t>–   ('Respuesta corta: ____________________________', 1)</a:t>
-            </a:r>
-          </a:p>
-          <a:p>
-            <a:pPr>
-              <a:spcAft>
-                <a:spcPts val="800"/>
-              </a:spcAft>
-            </a:pPr>
-            <a:r>
-              <a:rPr sz="1200" b="0" i="0">
-                <a:solidFill>
-                  <a:srgbClr val="333333"/>
-                </a:solidFill>
-                <a:latin typeface="Calibri"/>
-              </a:rPr>
-              <a:t>–   </a:t>
-            </a:r>
-            <a:r>
-              <a:rPr sz="1200" b="1" i="0">
-                <a:solidFill>
-                  <a:srgbClr val="333333"/>
-                </a:solidFill>
-                <a:latin typeface="Calibri"/>
-              </a:rPr>
-              <a:t>8.</a:t>
-            </a:r>
-            <a:r>
-              <a:rPr sz="1200" b="0" i="0">
-                <a:solidFill>
-                  <a:srgbClr val="333333"/>
-                </a:solidFill>
-                <a:latin typeface="Calibri"/>
-              </a:rPr>
-              <a:t> Indique RPO y RTO objetivo cualitativos para VetCare del equipo.</a:t>
-            </a:r>
-          </a:p>
-          <a:p>
-            <a:pPr>
-              <a:spcAft>
-                <a:spcPts val="800"/>
-              </a:spcAft>
-            </a:pPr>
-            <a:r>
-              <a:rPr sz="1200" b="0" i="0">
-                <a:solidFill>
-                  <a:srgbClr val="333333"/>
-                </a:solidFill>
-                <a:latin typeface="Calibri"/>
-              </a:rPr>
-              <a:t>–   ('Respuesta corta: ____________________________', 1)</a:t>
-            </a:r>
-          </a:p>
-        </p:txBody>
-      </p:sp>
-      <p:sp>
-        <p:nvSpPr>
-          <p:cNvPr id="7" name="TextBox 6"/>
-          <p:cNvSpPr txBox="1"/>
-          <p:nvPr/>
-        </p:nvSpPr>
-        <p:spPr>
-          <a:xfrm>
-            <a:off x="11185855" y="6473952"/>
-            <a:ext cx="640080" cy="274320"/>
-          </a:xfrm>
-          <a:prstGeom prst="rect">
-            <a:avLst/>
-          </a:prstGeom>
-          <a:noFill/>
-        </p:spPr>
-        <p:txBody>
-          <a:bodyPr wrap="square">
-            <a:spAutoFit/>
-          </a:bodyPr>
-          <a:lstStyle/>
-          <a:p>
-            <a:pPr algn="r"/>
-            <a:r>
-              <a:rPr sz="1100" b="0" i="0">
-                <a:solidFill>
-                  <a:srgbClr val="666666"/>
-                </a:solidFill>
-                <a:latin typeface="Calibri"/>
-              </a:rPr>
-              <a:t>16</a:t>
-            </a:r>
-          </a:p>
-        </p:txBody>
-      </p:sp>
-    </p:spTree>
-  </p:cSld>
-  <p:clrMapOvr>
-    <a:masterClrMapping/>
-  </p:clrMapOvr>
-</p:sld>
-</file>
-
-<file path=ppt/slides/slide17.xml><?xml version="1.0" encoding="utf-8"?>
-<p:sld xmlns:a="http://schemas.openxmlformats.org/drawingml/2006/main" xmlns:p="http://schemas.openxmlformats.org/presentationml/2006/main" xmlns:r="http://schemas.openxmlformats.org/officeDocument/2006/relationships">
-  <p:cSld>
-    <p:bg>
-      <p:bgPr>
-        <a:solidFill>
-          <a:srgbClr val="FFFFFF"/>
-        </a:solidFill>
-        <a:effectLst/>
-      </p:bgPr>
-    </p:bg>
-    <p:spTree>
-      <p:nvGrpSpPr>
-        <p:cNvPr id="1" name=""/>
-        <p:cNvGrpSpPr/>
-        <p:nvPr/>
-      </p:nvGrpSpPr>
-      <p:grpSpPr/>
-      <p:sp>
-        <p:nvSpPr>
-          <p:cNvPr id="2" name="Rectangle 1"/>
-          <p:cNvSpPr/>
-          <p:nvPr/>
-        </p:nvSpPr>
-        <p:spPr>
-          <a:xfrm>
-            <a:off x="0" y="0"/>
             <a:ext cx="12191695" cy="164592"/>
           </a:xfrm>
           <a:prstGeom prst="rect">
@@ -8451,7 +7438,7 @@
                 </a:solidFill>
                 <a:latin typeface="Calibri"/>
               </a:rPr>
-              <a:t>Criterios · quiz/cierre · duda PI</a:t>
+              <a:t>Criterios de exito · cierre · dudas del PI</a:t>
             </a:r>
           </a:p>
         </p:txBody>

--- a/Bases de Datos II/Clases/Clase 4 - Funciones disparadores seguridad respaldo/Presentacion.pptx
+++ b/Bases de Datos II/Clases/Clase 4 - Funciones disparadores seguridad respaldo/Presentacion.pptx
@@ -5440,7 +5440,7 @@
                 </a:solidFill>
                 <a:latin typeface="Calibri"/>
               </a:rPr>
-              <a:t> (Talleres) — domingo 23:59 cuando aplique taller.</a:t>
+              <a:t> (https://examlab.lovable.app/) — domingo 23:59 cuando aplique taller.</a:t>
             </a:r>
           </a:p>
         </p:txBody>
@@ -6035,7 +6035,7 @@
                 </a:solidFill>
                 <a:latin typeface="Calibri"/>
               </a:rPr>
-              <a:t>Taller de la semana en ExamLab: domingo 23:59 (regla del Acuerdo) cuando aplique.</a:t>
+              <a:t>Taller de la semana en ExamLab (https://examlab.lovable.app/): domingo 23:59 (regla del Acuerdo) cuando aplique.</a:t>
             </a:r>
           </a:p>
         </p:txBody>

--- a/Bases de Datos II/Clases/Clase 4 - Funciones disparadores seguridad respaldo/Presentacion.pptx
+++ b/Bases de Datos II/Clases/Clase 4 - Funciones disparadores seguridad respaldo/Presentacion.pptx
@@ -7776,22 +7776,6 @@
                 <a:latin typeface="Calibri"/>
               </a:rPr>
               <a:t>–   RPO (Recovery Point Objective) = cuantos datos se puede permitir perder, medido en tiempo ('maximo 1 hora de…</a:t>
-            </a:r>
-          </a:p>
-          <a:p>
-            <a:pPr>
-              <a:spcAft>
-                <a:spcPts val="800"/>
-              </a:spcAft>
-            </a:pPr>
-            <a:r>
-              <a:rPr sz="1500" b="0" i="0">
-                <a:solidFill>
-                  <a:srgbClr val="333333"/>
-                </a:solidFill>
-                <a:latin typeface="Calibri"/>
-              </a:rPr>
-              <a:t>–   Error de docente que no domina el tema: presentar el backup como 'copiar el archivo de vez en cuando' sin…</a:t>
             </a:r>
           </a:p>
         </p:txBody>

--- a/Bases de Datos II/Clases/Clase 4 - Funciones disparadores seguridad respaldo/Presentacion.pptx
+++ b/Bases de Datos II/Clases/Clase 4 - Funciones disparadores seguridad respaldo/Presentacion.pptx
@@ -5390,7 +5390,7 @@
                 </a:solidFill>
                 <a:latin typeface="Calibri"/>
               </a:rPr>
-              <a:t>–   Evidencia en playground (enlace) o archivo SQL/PNG del equipo.</a:t>
+              <a:t>–   Evidencia en playground (enlace) o archivo SQL/PNG propio.</a:t>
             </a:r>
           </a:p>
           <a:p>
@@ -6639,7 +6639,7 @@
                 </a:solidFill>
                 <a:latin typeface="Calibri"/>
               </a:rPr>
-              <a:t>–   Al salir: avance concreto en el paquete VetCare del equipo.</a:t>
+              <a:t>–   Al salir: avance concreto en su paquete VetCare.</a:t>
             </a:r>
           </a:p>
         </p:txBody>
@@ -8550,7 +8550,7 @@
                 </a:solidFill>
                 <a:latin typeface="Calibri"/>
               </a:rPr>
-              <a:t>–   Al final de la demo: dejar enlace/script compartible al equipo.</a:t>
+              <a:t>–   Al final de la demo: dejar enlace/script compartible al grupo.</a:t>
             </a:r>
           </a:p>
         </p:txBody>

--- a/Bases de Datos II/Clases/Clase 4 - Funciones disparadores seguridad respaldo/Presentacion.pptx
+++ b/Bases de Datos II/Clases/Clase 4 - Funciones disparadores seguridad respaldo/Presentacion.pptx
@@ -5440,7 +5440,7 @@
                 </a:solidFill>
                 <a:latin typeface="Calibri"/>
               </a:rPr>
-              <a:t> (https://examlab.lovable.app/) — domingo 23:59 cuando aplique taller.</a:t>
+              <a:t> (https://uniaj.examlab.workers.dev/) — domingo 23:59 cuando aplique taller.</a:t>
             </a:r>
           </a:p>
         </p:txBody>
@@ -6035,7 +6035,7 @@
                 </a:solidFill>
                 <a:latin typeface="Calibri"/>
               </a:rPr>
-              <a:t>Taller de la semana en ExamLab (https://examlab.lovable.app/): domingo 23:59 (regla del Acuerdo) cuando aplique.</a:t>
+              <a:t>Taller de la semana en ExamLab (https://uniaj.examlab.workers.dev/): domingo 23:59 (regla del Acuerdo) cuando aplique.</a:t>
             </a:r>
           </a:p>
         </p:txBody>

--- a/Bases de Datos II/Clases/Clase 4 - Funciones disparadores seguridad respaldo/Presentacion.pptx
+++ b/Bases de Datos II/Clases/Clase 4 - Funciones disparadores seguridad respaldo/Presentacion.pptx
@@ -3853,8 +3853,8 @@
         </p:nvSpPr>
         <p:spPr>
           <a:xfrm>
-            <a:off x="457200" y="1234440"/>
-            <a:ext cx="11277295" cy="777240"/>
+            <a:off x="457200" y="1554480"/>
+            <a:ext cx="11277295" cy="1051560"/>
           </a:xfrm>
           <a:prstGeom prst="roundRect">
             <a:avLst>
@@ -3898,7 +3898,7 @@
         </p:nvSpPr>
         <p:spPr>
           <a:xfrm>
-            <a:off x="594360" y="1403604"/>
+            <a:off x="594360" y="1860804"/>
             <a:ext cx="438912" cy="438912"/>
           </a:xfrm>
           <a:prstGeom prst="roundRect">
@@ -3943,7 +3943,7 @@
         </p:nvSpPr>
         <p:spPr>
           <a:xfrm>
-            <a:off x="594360" y="1403604"/>
+            <a:off x="594360" y="1860804"/>
             <a:ext cx="438912" cy="438912"/>
           </a:xfrm>
           <a:prstGeom prst="rect">
@@ -3976,8 +3976,8 @@
         </p:nvSpPr>
         <p:spPr>
           <a:xfrm>
-            <a:off x="1188720" y="1325880"/>
-            <a:ext cx="10271455" cy="612647"/>
+            <a:off x="1188720" y="1645920"/>
+            <a:ext cx="10271455" cy="886968"/>
           </a:xfrm>
           <a:prstGeom prst="rect">
             <a:avLst/>
@@ -4008,8 +4008,8 @@
         </p:nvSpPr>
         <p:spPr>
           <a:xfrm>
-            <a:off x="457200" y="2103120"/>
-            <a:ext cx="11277295" cy="777240"/>
+            <a:off x="457200" y="2697480"/>
+            <a:ext cx="11277295" cy="1051560"/>
           </a:xfrm>
           <a:prstGeom prst="roundRect">
             <a:avLst>
@@ -4053,7 +4053,7 @@
         </p:nvSpPr>
         <p:spPr>
           <a:xfrm>
-            <a:off x="594360" y="2272284"/>
+            <a:off x="594360" y="3003804"/>
             <a:ext cx="438912" cy="438912"/>
           </a:xfrm>
           <a:prstGeom prst="roundRect">
@@ -4098,7 +4098,7 @@
         </p:nvSpPr>
         <p:spPr>
           <a:xfrm>
-            <a:off x="594360" y="2272284"/>
+            <a:off x="594360" y="3003804"/>
             <a:ext cx="438912" cy="438912"/>
           </a:xfrm>
           <a:prstGeom prst="rect">
@@ -4131,8 +4131,8 @@
         </p:nvSpPr>
         <p:spPr>
           <a:xfrm>
-            <a:off x="1188720" y="2194560"/>
-            <a:ext cx="10271455" cy="612647"/>
+            <a:off x="1188720" y="2788920"/>
+            <a:ext cx="10271455" cy="886968"/>
           </a:xfrm>
           <a:prstGeom prst="rect">
             <a:avLst/>
@@ -4163,8 +4163,8 @@
         </p:nvSpPr>
         <p:spPr>
           <a:xfrm>
-            <a:off x="457200" y="2971800"/>
-            <a:ext cx="11277295" cy="777240"/>
+            <a:off x="457200" y="3840480"/>
+            <a:ext cx="11277295" cy="1051560"/>
           </a:xfrm>
           <a:prstGeom prst="roundRect">
             <a:avLst>
@@ -4208,7 +4208,7 @@
         </p:nvSpPr>
         <p:spPr>
           <a:xfrm>
-            <a:off x="594360" y="3140964"/>
+            <a:off x="594360" y="4146804"/>
             <a:ext cx="438912" cy="438912"/>
           </a:xfrm>
           <a:prstGeom prst="roundRect">
@@ -4253,7 +4253,7 @@
         </p:nvSpPr>
         <p:spPr>
           <a:xfrm>
-            <a:off x="594360" y="3140964"/>
+            <a:off x="594360" y="4146804"/>
             <a:ext cx="438912" cy="438912"/>
           </a:xfrm>
           <a:prstGeom prst="rect">
@@ -4286,8 +4286,8 @@
         </p:nvSpPr>
         <p:spPr>
           <a:xfrm>
-            <a:off x="1188720" y="3063240"/>
-            <a:ext cx="10271455" cy="612647"/>
+            <a:off x="1188720" y="3931920"/>
+            <a:ext cx="10271455" cy="886968"/>
           </a:xfrm>
           <a:prstGeom prst="rect">
             <a:avLst/>
@@ -4318,8 +4318,8 @@
         </p:nvSpPr>
         <p:spPr>
           <a:xfrm>
-            <a:off x="457200" y="3840479"/>
-            <a:ext cx="11277295" cy="777240"/>
+            <a:off x="457200" y="4983480"/>
+            <a:ext cx="11277295" cy="1051560"/>
           </a:xfrm>
           <a:prstGeom prst="roundRect">
             <a:avLst>
@@ -4363,7 +4363,7 @@
         </p:nvSpPr>
         <p:spPr>
           <a:xfrm>
-            <a:off x="594360" y="4009643"/>
+            <a:off x="594360" y="5289804"/>
             <a:ext cx="438912" cy="438912"/>
           </a:xfrm>
           <a:prstGeom prst="roundRect">
@@ -4408,7 +4408,7 @@
         </p:nvSpPr>
         <p:spPr>
           <a:xfrm>
-            <a:off x="594360" y="4009643"/>
+            <a:off x="594360" y="5289804"/>
             <a:ext cx="438912" cy="438912"/>
           </a:xfrm>
           <a:prstGeom prst="rect">
@@ -4441,8 +4441,8 @@
         </p:nvSpPr>
         <p:spPr>
           <a:xfrm>
-            <a:off x="1188720" y="3931919"/>
-            <a:ext cx="10271455" cy="612647"/>
+            <a:off x="1188720" y="5074920"/>
+            <a:ext cx="10271455" cy="886968"/>
           </a:xfrm>
           <a:prstGeom prst="rect">
             <a:avLst/>
@@ -8917,8 +8917,8 @@
         </p:blipFill>
         <p:spPr>
           <a:xfrm>
-            <a:off x="1743913" y="1792224"/>
-            <a:ext cx="1051560" cy="1051560"/>
+            <a:off x="1643329" y="1847087"/>
+            <a:ext cx="1252728" cy="1252728"/>
           </a:xfrm>
           <a:prstGeom prst="rect">
             <a:avLst/>
@@ -8933,8 +8933,8 @@
         </p:nvSpPr>
         <p:spPr>
           <a:xfrm>
-            <a:off x="530352" y="2916936"/>
-            <a:ext cx="3478682" cy="502920"/>
+            <a:off x="530352" y="3191256"/>
+            <a:ext cx="3478682" cy="621792"/>
           </a:xfrm>
           <a:prstGeom prst="rect">
             <a:avLst/>
@@ -9121,8 +9121,8 @@
         </p:blipFill>
         <p:spPr>
           <a:xfrm>
-            <a:off x="5570067" y="1792224"/>
-            <a:ext cx="1051560" cy="1051560"/>
+            <a:off x="5469483" y="1847087"/>
+            <a:ext cx="1252728" cy="1252728"/>
           </a:xfrm>
           <a:prstGeom prst="rect">
             <a:avLst/>
@@ -9137,8 +9137,8 @@
         </p:nvSpPr>
         <p:spPr>
           <a:xfrm>
-            <a:off x="4356506" y="2916936"/>
-            <a:ext cx="3478682" cy="502920"/>
+            <a:off x="4356506" y="3191256"/>
+            <a:ext cx="3478682" cy="621792"/>
           </a:xfrm>
           <a:prstGeom prst="rect">
             <a:avLst/>
@@ -9325,8 +9325,8 @@
         </p:blipFill>
         <p:spPr>
           <a:xfrm>
-            <a:off x="9396222" y="1792224"/>
-            <a:ext cx="1051560" cy="1051560"/>
+            <a:off x="9295638" y="1847087"/>
+            <a:ext cx="1252728" cy="1252728"/>
           </a:xfrm>
           <a:prstGeom prst="rect">
             <a:avLst/>
@@ -9341,8 +9341,8 @@
         </p:nvSpPr>
         <p:spPr>
           <a:xfrm>
-            <a:off x="8182660" y="2916936"/>
-            <a:ext cx="3478682" cy="502920"/>
+            <a:off x="8182660" y="3191256"/>
+            <a:ext cx="3478682" cy="621792"/>
           </a:xfrm>
           <a:prstGeom prst="rect">
             <a:avLst/>

--- a/Bases de Datos II/Clases/Clase 4 - Funciones disparadores seguridad respaldo/Presentacion.pptx
+++ b/Bases de Datos II/Clases/Clase 4 - Funciones disparadores seguridad respaldo/Presentacion.pptx
@@ -20,6 +20,9 @@
     <p:sldId id="268" r:id="rId19"/>
     <p:sldId id="269" r:id="rId20"/>
     <p:sldId id="270" r:id="rId21"/>
+    <p:sldId id="271" r:id="rId22"/>
+    <p:sldId id="272" r:id="rId23"/>
+    <p:sldId id="273" r:id="rId24"/>
   </p:sldIdLst>
   <p:sldSz cx="12191695" cy="6858000" type="screen4x3"/>
   <p:notesSz cx="6858000" cy="9144000"/>
@@ -3514,7 +3517,7 @@
         <p:spPr>
           <a:xfrm>
             <a:off x="0" y="0"/>
-            <a:ext cx="12191695" cy="960120"/>
+            <a:ext cx="12191695" cy="1170432"/>
           </a:xfrm>
           <a:prstGeom prst="rect">
             <a:avLst/>
@@ -3556,7 +3559,7 @@
         </p:nvSpPr>
         <p:spPr>
           <a:xfrm>
-            <a:off x="0" y="960120"/>
+            <a:off x="0" y="1170432"/>
             <a:ext cx="12191695" cy="41148"/>
           </a:xfrm>
           <a:prstGeom prst="rect">
@@ -3600,7 +3603,7 @@
         <p:spPr>
           <a:xfrm>
             <a:off x="457200" y="164592"/>
-            <a:ext cx="11277295" cy="502920"/>
+            <a:ext cx="11277295" cy="384048"/>
           </a:xfrm>
           <a:prstGeom prst="rect">
             <a:avLst/>
@@ -3620,7 +3623,7 @@
                 </a:solidFill>
                 <a:latin typeface="Calibri"/>
               </a:rPr>
-              <a:t>Taller PI VetCare — escenario / datos de partida</a:t>
+              <a:t>Herramientas de hoy</a:t>
             </a:r>
           </a:p>
         </p:txBody>
@@ -3633,8 +3636,8 @@
         </p:nvSpPr>
         <p:spPr>
           <a:xfrm>
-            <a:off x="457200" y="1170432"/>
-            <a:ext cx="11277295" cy="5230368"/>
+            <a:off x="457200" y="566928"/>
+            <a:ext cx="11277295" cy="411480"/>
           </a:xfrm>
           <a:prstGeom prst="rect">
             <a:avLst/>
@@ -3647,26 +3650,837 @@
           </a:bodyPr>
           <a:lstStyle/>
           <a:p>
-            <a:pPr>
-              <a:spcAft>
-                <a:spcPts val="800"/>
-              </a:spcAft>
+            <a:r>
+              <a:rPr sz="1400" b="0" i="0">
+                <a:solidFill>
+                  <a:srgbClr val="B8D8EE"/>
+                </a:solidFill>
+                <a:latin typeface="Calibri"/>
+              </a:rPr>
+              <a:t>Gratis · navegador o free tier</a:t>
+            </a:r>
+          </a:p>
+        </p:txBody>
+      </p:sp>
+      <p:sp>
+        <p:nvSpPr>
+          <p:cNvPr id="6" name="Rounded Rectangle 5"/>
+          <p:cNvSpPr/>
+          <p:nvPr/>
+        </p:nvSpPr>
+        <p:spPr>
+          <a:xfrm>
+            <a:off x="457200" y="1591056"/>
+            <a:ext cx="3624986" cy="2299716"/>
+          </a:xfrm>
+          <a:prstGeom prst="roundRect">
+            <a:avLst>
+              <a:gd name="adj" fmla="val 12000"/>
+            </a:avLst>
+          </a:prstGeom>
+          <a:solidFill>
+            <a:srgbClr val="F2F2F2"/>
+          </a:solidFill>
+          <a:ln>
+            <a:noFill/>
+          </a:ln>
+        </p:spPr>
+        <p:style>
+          <a:lnRef idx="1">
+            <a:schemeClr val="accent1"/>
+          </a:lnRef>
+          <a:fillRef idx="3">
+            <a:schemeClr val="accent1"/>
+          </a:fillRef>
+          <a:effectRef idx="2">
+            <a:schemeClr val="accent1"/>
+          </a:effectRef>
+          <a:fontRef idx="minor">
+            <a:schemeClr val="lt1"/>
+          </a:fontRef>
+        </p:style>
+        <p:txBody>
+          <a:bodyPr rtlCol="0" anchor="ctr"/>
+          <a:lstStyle/>
+          <a:p>
+            <a:pPr algn="ctr"/>
+          </a:p>
+        </p:txBody>
+      </p:sp>
+      <p:sp>
+        <p:nvSpPr>
+          <p:cNvPr id="7" name="Rectangle 6"/>
+          <p:cNvSpPr/>
+          <p:nvPr/>
+        </p:nvSpPr>
+        <p:spPr>
+          <a:xfrm>
+            <a:off x="457200" y="1591056"/>
+            <a:ext cx="3624986" cy="64008"/>
+          </a:xfrm>
+          <a:prstGeom prst="rect">
+            <a:avLst/>
+          </a:prstGeom>
+          <a:solidFill>
+            <a:srgbClr val="095292"/>
+          </a:solidFill>
+          <a:ln>
+            <a:noFill/>
+          </a:ln>
+        </p:spPr>
+        <p:style>
+          <a:lnRef idx="1">
+            <a:schemeClr val="accent1"/>
+          </a:lnRef>
+          <a:fillRef idx="3">
+            <a:schemeClr val="accent1"/>
+          </a:fillRef>
+          <a:effectRef idx="2">
+            <a:schemeClr val="accent1"/>
+          </a:effectRef>
+          <a:fontRef idx="minor">
+            <a:schemeClr val="lt1"/>
+          </a:fontRef>
+        </p:style>
+        <p:txBody>
+          <a:bodyPr rtlCol="0" anchor="ctr"/>
+          <a:lstStyle/>
+          <a:p>
+            <a:pPr algn="ctr"/>
+          </a:p>
+        </p:txBody>
+      </p:sp>
+      <p:sp>
+        <p:nvSpPr>
+          <p:cNvPr id="8" name="Rectangle 7"/>
+          <p:cNvSpPr/>
+          <p:nvPr/>
+        </p:nvSpPr>
+        <p:spPr>
+          <a:xfrm>
+            <a:off x="457200" y="1655064"/>
+            <a:ext cx="3624986" cy="27432"/>
+          </a:xfrm>
+          <a:prstGeom prst="rect">
+            <a:avLst/>
+          </a:prstGeom>
+          <a:solidFill>
+            <a:srgbClr val="FFD000"/>
+          </a:solidFill>
+          <a:ln>
+            <a:noFill/>
+          </a:ln>
+        </p:spPr>
+        <p:style>
+          <a:lnRef idx="1">
+            <a:schemeClr val="accent1"/>
+          </a:lnRef>
+          <a:fillRef idx="3">
+            <a:schemeClr val="accent1"/>
+          </a:fillRef>
+          <a:effectRef idx="2">
+            <a:schemeClr val="accent1"/>
+          </a:effectRef>
+          <a:fontRef idx="minor">
+            <a:schemeClr val="lt1"/>
+          </a:fontRef>
+        </p:style>
+        <p:txBody>
+          <a:bodyPr rtlCol="0" anchor="ctr"/>
+          <a:lstStyle/>
+          <a:p>
+            <a:pPr algn="ctr"/>
+          </a:p>
+        </p:txBody>
+      </p:sp>
+      <p:pic>
+        <p:nvPicPr>
+          <p:cNvPr id="9" name="Picture 8" descr="examlab.png"/>
+          <p:cNvPicPr>
+            <a:picLocks noChangeAspect="1"/>
+          </p:cNvPicPr>
+          <p:nvPr/>
+        </p:nvPicPr>
+        <p:blipFill>
+          <a:blip r:embed="rId2"/>
+          <a:stretch>
+            <a:fillRect/>
+          </a:stretch>
+        </p:blipFill>
+        <p:spPr>
+          <a:xfrm>
+            <a:off x="1659331" y="1847087"/>
+            <a:ext cx="1220724" cy="1220724"/>
+          </a:xfrm>
+          <a:prstGeom prst="rect">
+            <a:avLst/>
+          </a:prstGeom>
+        </p:spPr>
+      </p:pic>
+      <p:sp>
+        <p:nvSpPr>
+          <p:cNvPr id="10" name="TextBox 9"/>
+          <p:cNvSpPr txBox="1"/>
+          <p:nvPr/>
+        </p:nvSpPr>
+        <p:spPr>
+          <a:xfrm>
+            <a:off x="530352" y="3159251"/>
+            <a:ext cx="3478682" cy="621792"/>
+          </a:xfrm>
+          <a:prstGeom prst="rect">
+            <a:avLst/>
+          </a:prstGeom>
+          <a:noFill/>
+        </p:spPr>
+        <p:txBody>
+          <a:bodyPr wrap="square" anchor="t"/>
+          <a:lstStyle/>
+          <a:p>
+            <a:pPr algn="ctr"/>
+            <a:r>
+              <a:rPr sz="1300" b="1" i="0">
+                <a:solidFill>
+                  <a:srgbClr val="095292"/>
+                </a:solidFill>
+                <a:latin typeface="Calibri"/>
+              </a:rPr>
+              <a:t>ExamLab</a:t>
+            </a:r>
+          </a:p>
+          <a:p>
+            <a:pPr algn="ctr">
+              <a:spcBef>
+                <a:spcPts val="200"/>
+              </a:spcBef>
             </a:pPr>
             <a:r>
-              <a:rPr sz="1600" b="0" i="0">
-                <a:solidFill>
-                  <a:srgbClr val="333333"/>
-                </a:solidFill>
-                <a:latin typeface="Calibri"/>
-              </a:rPr>
-              <a:t>–   Ej: fn_precio_consulta; trg_audit_cancelacion.</a:t>
-            </a:r>
-          </a:p>
-        </p:txBody>
-      </p:sp>
-      <p:sp>
-        <p:nvSpPr>
-          <p:cNvPr id="6" name="TextBox 5"/>
+              <a:rPr sz="1000" b="0" i="0">
+                <a:solidFill>
+                  <a:srgbClr val="666666"/>
+                </a:solidFill>
+                <a:latin typeface="Calibri"/>
+              </a:rPr>
+              <a:t>Funcion y triggers</a:t>
+            </a:r>
+          </a:p>
+        </p:txBody>
+      </p:sp>
+      <p:sp>
+        <p:nvSpPr>
+          <p:cNvPr id="11" name="Rounded Rectangle 10"/>
+          <p:cNvSpPr/>
+          <p:nvPr/>
+        </p:nvSpPr>
+        <p:spPr>
+          <a:xfrm>
+            <a:off x="4283354" y="1591056"/>
+            <a:ext cx="3624986" cy="2299716"/>
+          </a:xfrm>
+          <a:prstGeom prst="roundRect">
+            <a:avLst>
+              <a:gd name="adj" fmla="val 12000"/>
+            </a:avLst>
+          </a:prstGeom>
+          <a:solidFill>
+            <a:srgbClr val="F2F2F2"/>
+          </a:solidFill>
+          <a:ln>
+            <a:noFill/>
+          </a:ln>
+        </p:spPr>
+        <p:style>
+          <a:lnRef idx="1">
+            <a:schemeClr val="accent1"/>
+          </a:lnRef>
+          <a:fillRef idx="3">
+            <a:schemeClr val="accent1"/>
+          </a:fillRef>
+          <a:effectRef idx="2">
+            <a:schemeClr val="accent1"/>
+          </a:effectRef>
+          <a:fontRef idx="minor">
+            <a:schemeClr val="lt1"/>
+          </a:fontRef>
+        </p:style>
+        <p:txBody>
+          <a:bodyPr rtlCol="0" anchor="ctr"/>
+          <a:lstStyle/>
+          <a:p>
+            <a:pPr algn="ctr"/>
+          </a:p>
+        </p:txBody>
+      </p:sp>
+      <p:sp>
+        <p:nvSpPr>
+          <p:cNvPr id="12" name="Rectangle 11"/>
+          <p:cNvSpPr/>
+          <p:nvPr/>
+        </p:nvSpPr>
+        <p:spPr>
+          <a:xfrm>
+            <a:off x="4283354" y="1591056"/>
+            <a:ext cx="3624986" cy="64008"/>
+          </a:xfrm>
+          <a:prstGeom prst="rect">
+            <a:avLst/>
+          </a:prstGeom>
+          <a:solidFill>
+            <a:srgbClr val="095292"/>
+          </a:solidFill>
+          <a:ln>
+            <a:noFill/>
+          </a:ln>
+        </p:spPr>
+        <p:style>
+          <a:lnRef idx="1">
+            <a:schemeClr val="accent1"/>
+          </a:lnRef>
+          <a:fillRef idx="3">
+            <a:schemeClr val="accent1"/>
+          </a:fillRef>
+          <a:effectRef idx="2">
+            <a:schemeClr val="accent1"/>
+          </a:effectRef>
+          <a:fontRef idx="minor">
+            <a:schemeClr val="lt1"/>
+          </a:fontRef>
+        </p:style>
+        <p:txBody>
+          <a:bodyPr rtlCol="0" anchor="ctr"/>
+          <a:lstStyle/>
+          <a:p>
+            <a:pPr algn="ctr"/>
+          </a:p>
+        </p:txBody>
+      </p:sp>
+      <p:sp>
+        <p:nvSpPr>
+          <p:cNvPr id="13" name="Rectangle 12"/>
+          <p:cNvSpPr/>
+          <p:nvPr/>
+        </p:nvSpPr>
+        <p:spPr>
+          <a:xfrm>
+            <a:off x="4283354" y="1655064"/>
+            <a:ext cx="3624986" cy="27432"/>
+          </a:xfrm>
+          <a:prstGeom prst="rect">
+            <a:avLst/>
+          </a:prstGeom>
+          <a:solidFill>
+            <a:srgbClr val="FFD000"/>
+          </a:solidFill>
+          <a:ln>
+            <a:noFill/>
+          </a:ln>
+        </p:spPr>
+        <p:style>
+          <a:lnRef idx="1">
+            <a:schemeClr val="accent1"/>
+          </a:lnRef>
+          <a:fillRef idx="3">
+            <a:schemeClr val="accent1"/>
+          </a:fillRef>
+          <a:effectRef idx="2">
+            <a:schemeClr val="accent1"/>
+          </a:effectRef>
+          <a:fontRef idx="minor">
+            <a:schemeClr val="lt1"/>
+          </a:fontRef>
+        </p:style>
+        <p:txBody>
+          <a:bodyPr rtlCol="0" anchor="ctr"/>
+          <a:lstStyle/>
+          <a:p>
+            <a:pPr algn="ctr"/>
+          </a:p>
+        </p:txBody>
+      </p:sp>
+      <p:pic>
+        <p:nvPicPr>
+          <p:cNvPr id="14" name="Picture 13" descr="google_docs.png"/>
+          <p:cNvPicPr>
+            <a:picLocks noChangeAspect="1"/>
+          </p:cNvPicPr>
+          <p:nvPr/>
+        </p:nvPicPr>
+        <p:blipFill>
+          <a:blip r:embed="rId3"/>
+          <a:stretch>
+            <a:fillRect/>
+          </a:stretch>
+        </p:blipFill>
+        <p:spPr>
+          <a:xfrm>
+            <a:off x="5485485" y="1847087"/>
+            <a:ext cx="1220724" cy="1220724"/>
+          </a:xfrm>
+          <a:prstGeom prst="rect">
+            <a:avLst/>
+          </a:prstGeom>
+        </p:spPr>
+      </p:pic>
+      <p:sp>
+        <p:nvSpPr>
+          <p:cNvPr id="15" name="TextBox 14"/>
+          <p:cNvSpPr txBox="1"/>
+          <p:nvPr/>
+        </p:nvSpPr>
+        <p:spPr>
+          <a:xfrm>
+            <a:off x="4356506" y="3159251"/>
+            <a:ext cx="3478682" cy="621792"/>
+          </a:xfrm>
+          <a:prstGeom prst="rect">
+            <a:avLst/>
+          </a:prstGeom>
+          <a:noFill/>
+        </p:spPr>
+        <p:txBody>
+          <a:bodyPr wrap="square" anchor="t"/>
+          <a:lstStyle/>
+          <a:p>
+            <a:pPr algn="ctr"/>
+            <a:r>
+              <a:rPr sz="1300" b="1" i="0">
+                <a:solidFill>
+                  <a:srgbClr val="095292"/>
+                </a:solidFill>
+                <a:latin typeface="Calibri"/>
+              </a:rPr>
+              <a:t>Google Docs</a:t>
+            </a:r>
+          </a:p>
+          <a:p>
+            <a:pPr algn="ctr">
+              <a:spcBef>
+                <a:spcPts val="200"/>
+              </a:spcBef>
+            </a:pPr>
+            <a:r>
+              <a:rPr sz="1000" b="0" i="0">
+                <a:solidFill>
+                  <a:srgbClr val="666666"/>
+                </a:solidFill>
+                <a:latin typeface="Calibri"/>
+              </a:rPr>
+              <a:t>Plan de respaldo</a:t>
+            </a:r>
+          </a:p>
+        </p:txBody>
+      </p:sp>
+      <p:sp>
+        <p:nvSpPr>
+          <p:cNvPr id="16" name="Rounded Rectangle 15"/>
+          <p:cNvSpPr/>
+          <p:nvPr/>
+        </p:nvSpPr>
+        <p:spPr>
+          <a:xfrm>
+            <a:off x="8109508" y="1591056"/>
+            <a:ext cx="3624986" cy="2299716"/>
+          </a:xfrm>
+          <a:prstGeom prst="roundRect">
+            <a:avLst>
+              <a:gd name="adj" fmla="val 12000"/>
+            </a:avLst>
+          </a:prstGeom>
+          <a:solidFill>
+            <a:srgbClr val="F2F2F2"/>
+          </a:solidFill>
+          <a:ln>
+            <a:noFill/>
+          </a:ln>
+        </p:spPr>
+        <p:style>
+          <a:lnRef idx="1">
+            <a:schemeClr val="accent1"/>
+          </a:lnRef>
+          <a:fillRef idx="3">
+            <a:schemeClr val="accent1"/>
+          </a:fillRef>
+          <a:effectRef idx="2">
+            <a:schemeClr val="accent1"/>
+          </a:effectRef>
+          <a:fontRef idx="minor">
+            <a:schemeClr val="lt1"/>
+          </a:fontRef>
+        </p:style>
+        <p:txBody>
+          <a:bodyPr rtlCol="0" anchor="ctr"/>
+          <a:lstStyle/>
+          <a:p>
+            <a:pPr algn="ctr"/>
+          </a:p>
+        </p:txBody>
+      </p:sp>
+      <p:sp>
+        <p:nvSpPr>
+          <p:cNvPr id="17" name="Rectangle 16"/>
+          <p:cNvSpPr/>
+          <p:nvPr/>
+        </p:nvSpPr>
+        <p:spPr>
+          <a:xfrm>
+            <a:off x="8109508" y="1591056"/>
+            <a:ext cx="3624986" cy="64008"/>
+          </a:xfrm>
+          <a:prstGeom prst="rect">
+            <a:avLst/>
+          </a:prstGeom>
+          <a:solidFill>
+            <a:srgbClr val="095292"/>
+          </a:solidFill>
+          <a:ln>
+            <a:noFill/>
+          </a:ln>
+        </p:spPr>
+        <p:style>
+          <a:lnRef idx="1">
+            <a:schemeClr val="accent1"/>
+          </a:lnRef>
+          <a:fillRef idx="3">
+            <a:schemeClr val="accent1"/>
+          </a:fillRef>
+          <a:effectRef idx="2">
+            <a:schemeClr val="accent1"/>
+          </a:effectRef>
+          <a:fontRef idx="minor">
+            <a:schemeClr val="lt1"/>
+          </a:fontRef>
+        </p:style>
+        <p:txBody>
+          <a:bodyPr rtlCol="0" anchor="ctr"/>
+          <a:lstStyle/>
+          <a:p>
+            <a:pPr algn="ctr"/>
+          </a:p>
+        </p:txBody>
+      </p:sp>
+      <p:sp>
+        <p:nvSpPr>
+          <p:cNvPr id="18" name="Rectangle 17"/>
+          <p:cNvSpPr/>
+          <p:nvPr/>
+        </p:nvSpPr>
+        <p:spPr>
+          <a:xfrm>
+            <a:off x="8109508" y="1655064"/>
+            <a:ext cx="3624986" cy="27432"/>
+          </a:xfrm>
+          <a:prstGeom prst="rect">
+            <a:avLst/>
+          </a:prstGeom>
+          <a:solidFill>
+            <a:srgbClr val="FFD000"/>
+          </a:solidFill>
+          <a:ln>
+            <a:noFill/>
+          </a:ln>
+        </p:spPr>
+        <p:style>
+          <a:lnRef idx="1">
+            <a:schemeClr val="accent1"/>
+          </a:lnRef>
+          <a:fillRef idx="3">
+            <a:schemeClr val="accent1"/>
+          </a:fillRef>
+          <a:effectRef idx="2">
+            <a:schemeClr val="accent1"/>
+          </a:effectRef>
+          <a:fontRef idx="minor">
+            <a:schemeClr val="lt1"/>
+          </a:fontRef>
+        </p:style>
+        <p:txBody>
+          <a:bodyPr rtlCol="0" anchor="ctr"/>
+          <a:lstStyle/>
+          <a:p>
+            <a:pPr algn="ctr"/>
+          </a:p>
+        </p:txBody>
+      </p:sp>
+      <p:pic>
+        <p:nvPicPr>
+          <p:cNvPr id="19" name="Picture 18" descr="dbfiddle.png"/>
+          <p:cNvPicPr>
+            <a:picLocks noChangeAspect="1"/>
+          </p:cNvPicPr>
+          <p:nvPr/>
+        </p:nvPicPr>
+        <p:blipFill>
+          <a:blip r:embed="rId4"/>
+          <a:stretch>
+            <a:fillRect/>
+          </a:stretch>
+        </p:blipFill>
+        <p:spPr>
+          <a:xfrm>
+            <a:off x="9311640" y="1847087"/>
+            <a:ext cx="1220724" cy="1220724"/>
+          </a:xfrm>
+          <a:prstGeom prst="rect">
+            <a:avLst/>
+          </a:prstGeom>
+        </p:spPr>
+      </p:pic>
+      <p:sp>
+        <p:nvSpPr>
+          <p:cNvPr id="20" name="TextBox 19"/>
+          <p:cNvSpPr txBox="1"/>
+          <p:nvPr/>
+        </p:nvSpPr>
+        <p:spPr>
+          <a:xfrm>
+            <a:off x="8182660" y="3159251"/>
+            <a:ext cx="3478682" cy="621792"/>
+          </a:xfrm>
+          <a:prstGeom prst="rect">
+            <a:avLst/>
+          </a:prstGeom>
+          <a:noFill/>
+        </p:spPr>
+        <p:txBody>
+          <a:bodyPr wrap="square" anchor="t"/>
+          <a:lstStyle/>
+          <a:p>
+            <a:pPr algn="ctr"/>
+            <a:r>
+              <a:rPr sz="1300" b="1" i="0">
+                <a:solidFill>
+                  <a:srgbClr val="095292"/>
+                </a:solidFill>
+                <a:latin typeface="Calibri"/>
+              </a:rPr>
+              <a:t>DB Fiddle</a:t>
+            </a:r>
+          </a:p>
+          <a:p>
+            <a:pPr algn="ctr">
+              <a:spcBef>
+                <a:spcPts val="200"/>
+              </a:spcBef>
+            </a:pPr>
+            <a:r>
+              <a:rPr sz="1000" b="0" i="0">
+                <a:solidFill>
+                  <a:srgbClr val="666666"/>
+                </a:solidFill>
+                <a:latin typeface="Calibri"/>
+              </a:rPr>
+              <a:t>Alterno: PostgreSQL</a:t>
+            </a:r>
+          </a:p>
+        </p:txBody>
+      </p:sp>
+      <p:sp>
+        <p:nvSpPr>
+          <p:cNvPr id="21" name="Rounded Rectangle 20"/>
+          <p:cNvSpPr/>
+          <p:nvPr/>
+        </p:nvSpPr>
+        <p:spPr>
+          <a:xfrm>
+            <a:off x="4283354" y="4055364"/>
+            <a:ext cx="3624986" cy="2299716"/>
+          </a:xfrm>
+          <a:prstGeom prst="roundRect">
+            <a:avLst>
+              <a:gd name="adj" fmla="val 12000"/>
+            </a:avLst>
+          </a:prstGeom>
+          <a:solidFill>
+            <a:srgbClr val="F2F2F2"/>
+          </a:solidFill>
+          <a:ln>
+            <a:noFill/>
+          </a:ln>
+        </p:spPr>
+        <p:style>
+          <a:lnRef idx="1">
+            <a:schemeClr val="accent1"/>
+          </a:lnRef>
+          <a:fillRef idx="3">
+            <a:schemeClr val="accent1"/>
+          </a:fillRef>
+          <a:effectRef idx="2">
+            <a:schemeClr val="accent1"/>
+          </a:effectRef>
+          <a:fontRef idx="minor">
+            <a:schemeClr val="lt1"/>
+          </a:fontRef>
+        </p:style>
+        <p:txBody>
+          <a:bodyPr rtlCol="0" anchor="ctr"/>
+          <a:lstStyle/>
+          <a:p>
+            <a:pPr algn="ctr"/>
+          </a:p>
+        </p:txBody>
+      </p:sp>
+      <p:sp>
+        <p:nvSpPr>
+          <p:cNvPr id="22" name="Rectangle 21"/>
+          <p:cNvSpPr/>
+          <p:nvPr/>
+        </p:nvSpPr>
+        <p:spPr>
+          <a:xfrm>
+            <a:off x="4283354" y="4055364"/>
+            <a:ext cx="3624986" cy="64008"/>
+          </a:xfrm>
+          <a:prstGeom prst="rect">
+            <a:avLst/>
+          </a:prstGeom>
+          <a:solidFill>
+            <a:srgbClr val="095292"/>
+          </a:solidFill>
+          <a:ln>
+            <a:noFill/>
+          </a:ln>
+        </p:spPr>
+        <p:style>
+          <a:lnRef idx="1">
+            <a:schemeClr val="accent1"/>
+          </a:lnRef>
+          <a:fillRef idx="3">
+            <a:schemeClr val="accent1"/>
+          </a:fillRef>
+          <a:effectRef idx="2">
+            <a:schemeClr val="accent1"/>
+          </a:effectRef>
+          <a:fontRef idx="minor">
+            <a:schemeClr val="lt1"/>
+          </a:fontRef>
+        </p:style>
+        <p:txBody>
+          <a:bodyPr rtlCol="0" anchor="ctr"/>
+          <a:lstStyle/>
+          <a:p>
+            <a:pPr algn="ctr"/>
+          </a:p>
+        </p:txBody>
+      </p:sp>
+      <p:sp>
+        <p:nvSpPr>
+          <p:cNvPr id="23" name="Rectangle 22"/>
+          <p:cNvSpPr/>
+          <p:nvPr/>
+        </p:nvSpPr>
+        <p:spPr>
+          <a:xfrm>
+            <a:off x="4283354" y="4119372"/>
+            <a:ext cx="3624986" cy="27432"/>
+          </a:xfrm>
+          <a:prstGeom prst="rect">
+            <a:avLst/>
+          </a:prstGeom>
+          <a:solidFill>
+            <a:srgbClr val="FFD000"/>
+          </a:solidFill>
+          <a:ln>
+            <a:noFill/>
+          </a:ln>
+        </p:spPr>
+        <p:style>
+          <a:lnRef idx="1">
+            <a:schemeClr val="accent1"/>
+          </a:lnRef>
+          <a:fillRef idx="3">
+            <a:schemeClr val="accent1"/>
+          </a:fillRef>
+          <a:effectRef idx="2">
+            <a:schemeClr val="accent1"/>
+          </a:effectRef>
+          <a:fontRef idx="minor">
+            <a:schemeClr val="lt1"/>
+          </a:fontRef>
+        </p:style>
+        <p:txBody>
+          <a:bodyPr rtlCol="0" anchor="ctr"/>
+          <a:lstStyle/>
+          <a:p>
+            <a:pPr algn="ctr"/>
+          </a:p>
+        </p:txBody>
+      </p:sp>
+      <p:pic>
+        <p:nvPicPr>
+          <p:cNvPr id="24" name="Picture 23" descr="oracle_livesql.png"/>
+          <p:cNvPicPr>
+            <a:picLocks noChangeAspect="1"/>
+          </p:cNvPicPr>
+          <p:nvPr/>
+        </p:nvPicPr>
+        <p:blipFill>
+          <a:blip r:embed="rId5"/>
+          <a:stretch>
+            <a:fillRect/>
+          </a:stretch>
+        </p:blipFill>
+        <p:spPr>
+          <a:xfrm>
+            <a:off x="5485485" y="4311396"/>
+            <a:ext cx="1220724" cy="1220724"/>
+          </a:xfrm>
+          <a:prstGeom prst="rect">
+            <a:avLst/>
+          </a:prstGeom>
+        </p:spPr>
+      </p:pic>
+      <p:sp>
+        <p:nvSpPr>
+          <p:cNvPr id="25" name="TextBox 24"/>
+          <p:cNvSpPr txBox="1"/>
+          <p:nvPr/>
+        </p:nvSpPr>
+        <p:spPr>
+          <a:xfrm>
+            <a:off x="4356506" y="5623560"/>
+            <a:ext cx="3478682" cy="621792"/>
+          </a:xfrm>
+          <a:prstGeom prst="rect">
+            <a:avLst/>
+          </a:prstGeom>
+          <a:noFill/>
+        </p:spPr>
+        <p:txBody>
+          <a:bodyPr wrap="square" anchor="t"/>
+          <a:lstStyle/>
+          <a:p>
+            <a:pPr algn="ctr"/>
+            <a:r>
+              <a:rPr sz="1300" b="1" i="0">
+                <a:solidFill>
+                  <a:srgbClr val="095292"/>
+                </a:solidFill>
+                <a:latin typeface="Calibri"/>
+              </a:rPr>
+              <a:t>Oracle Live SQL</a:t>
+            </a:r>
+          </a:p>
+          <a:p>
+            <a:pPr algn="ctr">
+              <a:spcBef>
+                <a:spcPts val="200"/>
+              </a:spcBef>
+            </a:pPr>
+            <a:r>
+              <a:rPr sz="1000" b="0" i="0">
+                <a:solidFill>
+                  <a:srgbClr val="666666"/>
+                </a:solidFill>
+                <a:latin typeface="Calibri"/>
+              </a:rPr>
+              <a:t>Solo contraste</a:t>
+            </a:r>
+          </a:p>
+        </p:txBody>
+      </p:sp>
+      <p:sp>
+        <p:nvSpPr>
+          <p:cNvPr id="26" name="TextBox 25"/>
           <p:cNvSpPr txBox="1"/>
           <p:nvPr/>
         </p:nvSpPr>
@@ -3840,111 +4654,21 @@
                 </a:solidFill>
                 <a:latin typeface="Calibri"/>
               </a:rPr>
-              <a:t>Taller PI VetCare — pasos guiados</a:t>
-            </a:r>
-          </a:p>
-        </p:txBody>
-      </p:sp>
-      <p:sp>
-        <p:nvSpPr>
-          <p:cNvPr id="5" name="Rounded Rectangle 4"/>
-          <p:cNvSpPr/>
-          <p:nvPr/>
-        </p:nvSpPr>
-        <p:spPr>
-          <a:xfrm>
-            <a:off x="457200" y="1554480"/>
-            <a:ext cx="11277295" cy="1051560"/>
-          </a:xfrm>
-          <a:prstGeom prst="roundRect">
-            <a:avLst>
-              <a:gd name="adj" fmla="val 12000"/>
-            </a:avLst>
-          </a:prstGeom>
-          <a:solidFill>
-            <a:srgbClr val="F2F2F2"/>
-          </a:solidFill>
-          <a:ln>
-            <a:noFill/>
-          </a:ln>
-        </p:spPr>
-        <p:style>
-          <a:lnRef idx="1">
-            <a:schemeClr val="accent1"/>
-          </a:lnRef>
-          <a:fillRef idx="3">
-            <a:schemeClr val="accent1"/>
-          </a:fillRef>
-          <a:effectRef idx="2">
-            <a:schemeClr val="accent1"/>
-          </a:effectRef>
-          <a:fontRef idx="minor">
-            <a:schemeClr val="lt1"/>
-          </a:fontRef>
-        </p:style>
-        <p:txBody>
-          <a:bodyPr rtlCol="0" anchor="ctr"/>
-          <a:lstStyle/>
-          <a:p>
-            <a:pPr algn="ctr"/>
-          </a:p>
-        </p:txBody>
-      </p:sp>
-      <p:sp>
-        <p:nvSpPr>
-          <p:cNvPr id="6" name="Rounded Rectangle 5"/>
-          <p:cNvSpPr/>
-          <p:nvPr/>
-        </p:nvSpPr>
-        <p:spPr>
-          <a:xfrm>
-            <a:off x="594360" y="1860804"/>
-            <a:ext cx="438912" cy="438912"/>
-          </a:xfrm>
-          <a:prstGeom prst="roundRect">
-            <a:avLst>
-              <a:gd name="adj" fmla="val 12000"/>
-            </a:avLst>
-          </a:prstGeom>
-          <a:solidFill>
-            <a:srgbClr val="095292"/>
-          </a:solidFill>
-          <a:ln>
-            <a:noFill/>
-          </a:ln>
-        </p:spPr>
-        <p:style>
-          <a:lnRef idx="1">
-            <a:schemeClr val="accent1"/>
-          </a:lnRef>
-          <a:fillRef idx="3">
-            <a:schemeClr val="accent1"/>
-          </a:fillRef>
-          <a:effectRef idx="2">
-            <a:schemeClr val="accent1"/>
-          </a:effectRef>
-          <a:fontRef idx="minor">
-            <a:schemeClr val="lt1"/>
-          </a:fontRef>
-        </p:style>
-        <p:txBody>
-          <a:bodyPr rtlCol="0" anchor="ctr"/>
-          <a:lstStyle/>
-          <a:p>
-            <a:pPr algn="ctr"/>
-          </a:p>
-        </p:txBody>
-      </p:sp>
-      <p:sp>
-        <p:nvSpPr>
-          <p:cNvPr id="7" name="TextBox 6"/>
+              <a:t>Taller PI VetCare — contexto / por que importa</a:t>
+            </a:r>
+          </a:p>
+        </p:txBody>
+      </p:sp>
+      <p:sp>
+        <p:nvSpPr>
+          <p:cNvPr id="5" name="TextBox 4"/>
           <p:cNvSpPr txBox="1"/>
           <p:nvPr/>
         </p:nvSpPr>
         <p:spPr>
           <a:xfrm>
-            <a:off x="594360" y="1860804"/>
-            <a:ext cx="438912" cy="438912"/>
+            <a:off x="457200" y="1170432"/>
+            <a:ext cx="11277295" cy="5230368"/>
           </a:xfrm>
           <a:prstGeom prst="rect">
             <a:avLst/>
@@ -3952,522 +4676,117 @@
           <a:noFill/>
         </p:spPr>
         <p:txBody>
-          <a:bodyPr wrap="square" anchor="ctr"/>
-          <a:lstStyle/>
-          <a:p>
-            <a:pPr algn="ctr"/>
+          <a:bodyPr wrap="square">
+            <a:spAutoFit/>
+          </a:bodyPr>
+          <a:lstStyle/>
+          <a:p>
+            <a:pPr>
+              <a:spcAft>
+                <a:spcPts val="800"/>
+              </a:spcAft>
+            </a:pPr>
+            <a:r>
+              <a:rPr sz="1600" b="0" i="0">
+                <a:solidFill>
+                  <a:srgbClr val="333333"/>
+                </a:solidFill>
+                <a:latin typeface="Calibri"/>
+              </a:rPr>
+              <a:t>–   </a:t>
+            </a:r>
             <a:r>
               <a:rPr sz="1600" b="1" i="0">
                 <a:solidFill>
-                  <a:srgbClr val="FFFFFF"/>
-                </a:solidFill>
-                <a:latin typeface="Calibri"/>
-              </a:rPr>
-              <a:t>1</a:t>
-            </a:r>
-          </a:p>
-        </p:txBody>
-      </p:sp>
-      <p:sp>
-        <p:nvSpPr>
-          <p:cNvPr id="8" name="TextBox 7"/>
-          <p:cNvSpPr txBox="1"/>
-          <p:nvPr/>
-        </p:nvSpPr>
-        <p:spPr>
-          <a:xfrm>
-            <a:off x="1188720" y="1645920"/>
-            <a:ext cx="10271455" cy="886968"/>
-          </a:xfrm>
-          <a:prstGeom prst="rect">
-            <a:avLst/>
-          </a:prstGeom>
-          <a:noFill/>
-        </p:spPr>
-        <p:txBody>
-          <a:bodyPr wrap="square" anchor="ctr"/>
-          <a:lstStyle/>
-          <a:p>
-            <a:r>
-              <a:rPr sz="1500" b="1" i="0">
-                <a:solidFill>
-                  <a:srgbClr val="095292"/>
-                </a:solidFill>
-                <a:latin typeface="Calibri"/>
-              </a:rPr>
-              <a:t>Crear &gt;=1 funcion util al PI.</a:t>
-            </a:r>
-          </a:p>
-        </p:txBody>
-      </p:sp>
-      <p:sp>
-        <p:nvSpPr>
-          <p:cNvPr id="9" name="Rounded Rectangle 8"/>
-          <p:cNvSpPr/>
-          <p:nvPr/>
-        </p:nvSpPr>
-        <p:spPr>
-          <a:xfrm>
-            <a:off x="457200" y="2697480"/>
-            <a:ext cx="11277295" cy="1051560"/>
-          </a:xfrm>
-          <a:prstGeom prst="roundRect">
-            <a:avLst>
-              <a:gd name="adj" fmla="val 12000"/>
-            </a:avLst>
-          </a:prstGeom>
-          <a:solidFill>
-            <a:srgbClr val="E8F4FA"/>
-          </a:solidFill>
-          <a:ln>
-            <a:noFill/>
-          </a:ln>
-        </p:spPr>
-        <p:style>
-          <a:lnRef idx="1">
-            <a:schemeClr val="accent1"/>
-          </a:lnRef>
-          <a:fillRef idx="3">
-            <a:schemeClr val="accent1"/>
-          </a:fillRef>
-          <a:effectRef idx="2">
-            <a:schemeClr val="accent1"/>
-          </a:effectRef>
-          <a:fontRef idx="minor">
-            <a:schemeClr val="lt1"/>
-          </a:fontRef>
-        </p:style>
-        <p:txBody>
-          <a:bodyPr rtlCol="0" anchor="ctr"/>
-          <a:lstStyle/>
-          <a:p>
-            <a:pPr algn="ctr"/>
-          </a:p>
-        </p:txBody>
-      </p:sp>
-      <p:sp>
-        <p:nvSpPr>
-          <p:cNvPr id="10" name="Rounded Rectangle 9"/>
-          <p:cNvSpPr/>
-          <p:nvPr/>
-        </p:nvSpPr>
-        <p:spPr>
-          <a:xfrm>
-            <a:off x="594360" y="3003804"/>
-            <a:ext cx="438912" cy="438912"/>
-          </a:xfrm>
-          <a:prstGeom prst="roundRect">
-            <a:avLst>
-              <a:gd name="adj" fmla="val 12000"/>
-            </a:avLst>
-          </a:prstGeom>
-          <a:solidFill>
-            <a:srgbClr val="095292"/>
-          </a:solidFill>
-          <a:ln>
-            <a:noFill/>
-          </a:ln>
-        </p:spPr>
-        <p:style>
-          <a:lnRef idx="1">
-            <a:schemeClr val="accent1"/>
-          </a:lnRef>
-          <a:fillRef idx="3">
-            <a:schemeClr val="accent1"/>
-          </a:fillRef>
-          <a:effectRef idx="2">
-            <a:schemeClr val="accent1"/>
-          </a:effectRef>
-          <a:fontRef idx="minor">
-            <a:schemeClr val="lt1"/>
-          </a:fontRef>
-        </p:style>
-        <p:txBody>
-          <a:bodyPr rtlCol="0" anchor="ctr"/>
-          <a:lstStyle/>
-          <a:p>
-            <a:pPr algn="ctr"/>
-          </a:p>
-        </p:txBody>
-      </p:sp>
-      <p:sp>
-        <p:nvSpPr>
-          <p:cNvPr id="11" name="TextBox 10"/>
-          <p:cNvSpPr txBox="1"/>
-          <p:nvPr/>
-        </p:nvSpPr>
-        <p:spPr>
-          <a:xfrm>
-            <a:off x="594360" y="3003804"/>
-            <a:ext cx="438912" cy="438912"/>
-          </a:xfrm>
-          <a:prstGeom prst="rect">
-            <a:avLst/>
-          </a:prstGeom>
-          <a:noFill/>
-        </p:spPr>
-        <p:txBody>
-          <a:bodyPr wrap="square" anchor="ctr"/>
-          <a:lstStyle/>
-          <a:p>
-            <a:pPr algn="ctr"/>
+                  <a:srgbClr val="333333"/>
+                </a:solidFill>
+                <a:latin typeface="Calibri"/>
+              </a:rPr>
+              <a:t>Por qué importa al PI:</a:t>
+            </a:r>
+            <a:r>
+              <a:rPr sz="1600" b="0" i="0">
+                <a:solidFill>
+                  <a:srgbClr val="333333"/>
+                </a:solidFill>
+                <a:latin typeface="Calibri"/>
+              </a:rPr>
+              <a:t> integridad y trazabilidad son criterios de la rúbrica, y la evidencia son el trigger corriendo y la fila de auditoría — no una promesa.</a:t>
+            </a:r>
+          </a:p>
+          <a:p>
+            <a:pPr>
+              <a:spcAft>
+                <a:spcPts val="800"/>
+              </a:spcAft>
+            </a:pPr>
+            <a:r>
+              <a:rPr sz="1600" b="0" i="0">
+                <a:solidFill>
+                  <a:srgbClr val="333333"/>
+                </a:solidFill>
+                <a:latin typeface="Calibri"/>
+              </a:rPr>
+              <a:t>–   La auditoría es el único mecanismo que </a:t>
+            </a:r>
             <a:r>
               <a:rPr sz="1600" b="1" i="0">
                 <a:solidFill>
-                  <a:srgbClr val="FFFFFF"/>
-                </a:solidFill>
-                <a:latin typeface="Calibri"/>
-              </a:rPr>
-              <a:t>2</a:t>
-            </a:r>
-          </a:p>
-        </p:txBody>
-      </p:sp>
-      <p:sp>
-        <p:nvSpPr>
-          <p:cNvPr id="12" name="TextBox 11"/>
-          <p:cNvSpPr txBox="1"/>
-          <p:nvPr/>
-        </p:nvSpPr>
-        <p:spPr>
-          <a:xfrm>
-            <a:off x="1188720" y="2788920"/>
-            <a:ext cx="10271455" cy="886968"/>
-          </a:xfrm>
-          <a:prstGeom prst="rect">
-            <a:avLst/>
-          </a:prstGeom>
-          <a:noFill/>
-        </p:spPr>
-        <p:txBody>
-          <a:bodyPr wrap="square" anchor="ctr"/>
-          <a:lstStyle/>
-          <a:p>
-            <a:r>
-              <a:rPr sz="1500" b="1" i="0">
-                <a:solidFill>
-                  <a:srgbClr val="095292"/>
-                </a:solidFill>
-                <a:latin typeface="Calibri"/>
-              </a:rPr>
-              <a:t>Crear &gt;=1 trigger (auditoria o stock no negativo).</a:t>
-            </a:r>
-          </a:p>
-        </p:txBody>
-      </p:sp>
-      <p:sp>
-        <p:nvSpPr>
-          <p:cNvPr id="13" name="Rounded Rectangle 12"/>
-          <p:cNvSpPr/>
-          <p:nvPr/>
-        </p:nvSpPr>
-        <p:spPr>
-          <a:xfrm>
-            <a:off x="457200" y="3840480"/>
-            <a:ext cx="11277295" cy="1051560"/>
-          </a:xfrm>
-          <a:prstGeom prst="roundRect">
-            <a:avLst>
-              <a:gd name="adj" fmla="val 12000"/>
-            </a:avLst>
-          </a:prstGeom>
-          <a:solidFill>
-            <a:srgbClr val="F2F2F2"/>
-          </a:solidFill>
-          <a:ln>
-            <a:noFill/>
-          </a:ln>
-        </p:spPr>
-        <p:style>
-          <a:lnRef idx="1">
-            <a:schemeClr val="accent1"/>
-          </a:lnRef>
-          <a:fillRef idx="3">
-            <a:schemeClr val="accent1"/>
-          </a:fillRef>
-          <a:effectRef idx="2">
-            <a:schemeClr val="accent1"/>
-          </a:effectRef>
-          <a:fontRef idx="minor">
-            <a:schemeClr val="lt1"/>
-          </a:fontRef>
-        </p:style>
-        <p:txBody>
-          <a:bodyPr rtlCol="0" anchor="ctr"/>
-          <a:lstStyle/>
-          <a:p>
-            <a:pPr algn="ctr"/>
-          </a:p>
-        </p:txBody>
-      </p:sp>
-      <p:sp>
-        <p:nvSpPr>
-          <p:cNvPr id="14" name="Rounded Rectangle 13"/>
-          <p:cNvSpPr/>
-          <p:nvPr/>
-        </p:nvSpPr>
-        <p:spPr>
-          <a:xfrm>
-            <a:off x="594360" y="4146804"/>
-            <a:ext cx="438912" cy="438912"/>
-          </a:xfrm>
-          <a:prstGeom prst="roundRect">
-            <a:avLst>
-              <a:gd name="adj" fmla="val 12000"/>
-            </a:avLst>
-          </a:prstGeom>
-          <a:solidFill>
-            <a:srgbClr val="095292"/>
-          </a:solidFill>
-          <a:ln>
-            <a:noFill/>
-          </a:ln>
-        </p:spPr>
-        <p:style>
-          <a:lnRef idx="1">
-            <a:schemeClr val="accent1"/>
-          </a:lnRef>
-          <a:fillRef idx="3">
-            <a:schemeClr val="accent1"/>
-          </a:fillRef>
-          <a:effectRef idx="2">
-            <a:schemeClr val="accent1"/>
-          </a:effectRef>
-          <a:fontRef idx="minor">
-            <a:schemeClr val="lt1"/>
-          </a:fontRef>
-        </p:style>
-        <p:txBody>
-          <a:bodyPr rtlCol="0" anchor="ctr"/>
-          <a:lstStyle/>
-          <a:p>
-            <a:pPr algn="ctr"/>
-          </a:p>
-        </p:txBody>
-      </p:sp>
-      <p:sp>
-        <p:nvSpPr>
-          <p:cNvPr id="15" name="TextBox 14"/>
-          <p:cNvSpPr txBox="1"/>
-          <p:nvPr/>
-        </p:nvSpPr>
-        <p:spPr>
-          <a:xfrm>
-            <a:off x="594360" y="4146804"/>
-            <a:ext cx="438912" cy="438912"/>
-          </a:xfrm>
-          <a:prstGeom prst="rect">
-            <a:avLst/>
-          </a:prstGeom>
-          <a:noFill/>
-        </p:spPr>
-        <p:txBody>
-          <a:bodyPr wrap="square" anchor="ctr"/>
-          <a:lstStyle/>
-          <a:p>
-            <a:pPr algn="ctr"/>
+                  <a:srgbClr val="333333"/>
+                </a:solidFill>
+                <a:latin typeface="Calibri"/>
+              </a:rPr>
+              <a:t>no se puede evitar olvidándose de llamarlo</a:t>
+            </a:r>
+            <a:r>
+              <a:rPr sz="1600" b="0" i="0">
+                <a:solidFill>
+                  <a:srgbClr val="333333"/>
+                </a:solidFill>
+                <a:latin typeface="Calibri"/>
+              </a:rPr>
+              <a:t>: nadie invoca un trigger, lo dispara el motor.</a:t>
+            </a:r>
+          </a:p>
+          <a:p>
+            <a:pPr>
+              <a:spcAft>
+                <a:spcPts val="800"/>
+              </a:spcAft>
+            </a:pPr>
+            <a:r>
+              <a:rPr sz="1600" b="0" i="0">
+                <a:solidFill>
+                  <a:srgbClr val="333333"/>
+                </a:solidFill>
+                <a:latin typeface="Calibri"/>
+              </a:rPr>
+              <a:t>–   El plan de respaldo es lo que un evaluador pregunta primero: cuánto se pierde y en cuánto tiempo se vuelve a operar, con </a:t>
+            </a:r>
             <a:r>
               <a:rPr sz="1600" b="1" i="0">
                 <a:solidFill>
-                  <a:srgbClr val="FFFFFF"/>
-                </a:solidFill>
-                <a:latin typeface="Calibri"/>
-              </a:rPr>
-              <a:t>3</a:t>
-            </a:r>
-          </a:p>
-        </p:txBody>
-      </p:sp>
-      <p:sp>
-        <p:nvSpPr>
-          <p:cNvPr id="16" name="TextBox 15"/>
-          <p:cNvSpPr txBox="1"/>
-          <p:nvPr/>
-        </p:nvSpPr>
-        <p:spPr>
-          <a:xfrm>
-            <a:off x="1188720" y="3931920"/>
-            <a:ext cx="10271455" cy="886968"/>
-          </a:xfrm>
-          <a:prstGeom prst="rect">
-            <a:avLst/>
-          </a:prstGeom>
-          <a:noFill/>
-        </p:spPr>
-        <p:txBody>
-          <a:bodyPr wrap="square" anchor="ctr"/>
-          <a:lstStyle/>
-          <a:p>
-            <a:r>
-              <a:rPr sz="1500" b="1" i="0">
-                <a:solidFill>
-                  <a:srgbClr val="095292"/>
-                </a:solidFill>
-                <a:latin typeface="Calibri"/>
-              </a:rPr>
-              <a:t>Redactar plan de respaldo: frecuencia, retencion, restore de prueba.</a:t>
-            </a:r>
-          </a:p>
-        </p:txBody>
-      </p:sp>
-      <p:sp>
-        <p:nvSpPr>
-          <p:cNvPr id="17" name="Rounded Rectangle 16"/>
-          <p:cNvSpPr/>
-          <p:nvPr/>
-        </p:nvSpPr>
-        <p:spPr>
-          <a:xfrm>
-            <a:off x="457200" y="4983480"/>
-            <a:ext cx="11277295" cy="1051560"/>
-          </a:xfrm>
-          <a:prstGeom prst="roundRect">
-            <a:avLst>
-              <a:gd name="adj" fmla="val 12000"/>
-            </a:avLst>
-          </a:prstGeom>
-          <a:solidFill>
-            <a:srgbClr val="E8F4FA"/>
-          </a:solidFill>
-          <a:ln>
-            <a:noFill/>
-          </a:ln>
-        </p:spPr>
-        <p:style>
-          <a:lnRef idx="1">
-            <a:schemeClr val="accent1"/>
-          </a:lnRef>
-          <a:fillRef idx="3">
-            <a:schemeClr val="accent1"/>
-          </a:fillRef>
-          <a:effectRef idx="2">
-            <a:schemeClr val="accent1"/>
-          </a:effectRef>
-          <a:fontRef idx="minor">
-            <a:schemeClr val="lt1"/>
-          </a:fontRef>
-        </p:style>
-        <p:txBody>
-          <a:bodyPr rtlCol="0" anchor="ctr"/>
-          <a:lstStyle/>
-          <a:p>
-            <a:pPr algn="ctr"/>
-          </a:p>
-        </p:txBody>
-      </p:sp>
-      <p:sp>
-        <p:nvSpPr>
-          <p:cNvPr id="18" name="Rounded Rectangle 17"/>
-          <p:cNvSpPr/>
-          <p:nvPr/>
-        </p:nvSpPr>
-        <p:spPr>
-          <a:xfrm>
-            <a:off x="594360" y="5289804"/>
-            <a:ext cx="438912" cy="438912"/>
-          </a:xfrm>
-          <a:prstGeom prst="roundRect">
-            <a:avLst>
-              <a:gd name="adj" fmla="val 12000"/>
-            </a:avLst>
-          </a:prstGeom>
-          <a:solidFill>
-            <a:srgbClr val="095292"/>
-          </a:solidFill>
-          <a:ln>
-            <a:noFill/>
-          </a:ln>
-        </p:spPr>
-        <p:style>
-          <a:lnRef idx="1">
-            <a:schemeClr val="accent1"/>
-          </a:lnRef>
-          <a:fillRef idx="3">
-            <a:schemeClr val="accent1"/>
-          </a:fillRef>
-          <a:effectRef idx="2">
-            <a:schemeClr val="accent1"/>
-          </a:effectRef>
-          <a:fontRef idx="minor">
-            <a:schemeClr val="lt1"/>
-          </a:fontRef>
-        </p:style>
-        <p:txBody>
-          <a:bodyPr rtlCol="0" anchor="ctr"/>
-          <a:lstStyle/>
-          <a:p>
-            <a:pPr algn="ctr"/>
-          </a:p>
-        </p:txBody>
-      </p:sp>
-      <p:sp>
-        <p:nvSpPr>
-          <p:cNvPr id="19" name="TextBox 18"/>
-          <p:cNvSpPr txBox="1"/>
-          <p:nvPr/>
-        </p:nvSpPr>
-        <p:spPr>
-          <a:xfrm>
-            <a:off x="594360" y="5289804"/>
-            <a:ext cx="438912" cy="438912"/>
-          </a:xfrm>
-          <a:prstGeom prst="rect">
-            <a:avLst/>
-          </a:prstGeom>
-          <a:noFill/>
-        </p:spPr>
-        <p:txBody>
-          <a:bodyPr wrap="square" anchor="ctr"/>
-          <a:lstStyle/>
-          <a:p>
-            <a:pPr algn="ctr"/>
-            <a:r>
-              <a:rPr sz="1600" b="1" i="0">
-                <a:solidFill>
-                  <a:srgbClr val="FFFFFF"/>
-                </a:solidFill>
-                <a:latin typeface="Calibri"/>
-              </a:rPr>
-              <a:t>4</a:t>
-            </a:r>
-          </a:p>
-        </p:txBody>
-      </p:sp>
-      <p:sp>
-        <p:nvSpPr>
-          <p:cNvPr id="20" name="TextBox 19"/>
-          <p:cNvSpPr txBox="1"/>
-          <p:nvPr/>
-        </p:nvSpPr>
-        <p:spPr>
-          <a:xfrm>
-            <a:off x="1188720" y="5074920"/>
-            <a:ext cx="10271455" cy="886968"/>
-          </a:xfrm>
-          <a:prstGeom prst="rect">
-            <a:avLst/>
-          </a:prstGeom>
-          <a:noFill/>
-        </p:spPr>
-        <p:txBody>
-          <a:bodyPr wrap="square" anchor="ctr"/>
-          <a:lstStyle/>
-          <a:p>
-            <a:r>
-              <a:rPr sz="1500" b="1" i="0">
-                <a:solidFill>
-                  <a:srgbClr val="095292"/>
-                </a:solidFill>
-                <a:latin typeface="Calibri"/>
-              </a:rPr>
-              <a:t>Actualizar checklist PI: seguridad/respaldo en progreso.</a:t>
-            </a:r>
-          </a:p>
-        </p:txBody>
-      </p:sp>
-      <p:sp>
-        <p:nvSpPr>
-          <p:cNvPr id="21" name="TextBox 20"/>
+                  <a:srgbClr val="333333"/>
+                </a:solidFill>
+                <a:latin typeface="Calibri"/>
+              </a:rPr>
+              <a:t>números</a:t>
+            </a:r>
+            <a:r>
+              <a:rPr sz="1600" b="0" i="0">
+                <a:solidFill>
+                  <a:srgbClr val="333333"/>
+                </a:solidFill>
+                <a:latin typeface="Calibri"/>
+              </a:rPr>
+              <a:t>.</a:t>
+            </a:r>
+          </a:p>
+        </p:txBody>
+      </p:sp>
+      <p:sp>
+        <p:nvSpPr>
+          <p:cNvPr id="6" name="TextBox 5"/>
           <p:cNvSpPr txBox="1"/>
           <p:nvPr/>
         </p:nvSpPr>
@@ -4641,154 +4960,21 @@
                 </a:solidFill>
                 <a:latin typeface="Calibri"/>
               </a:rPr>
-              <a:t>Taller PI VetCare — pistas (checklist vacio)</a:t>
-            </a:r>
-          </a:p>
-        </p:txBody>
-      </p:sp>
-      <p:sp>
-        <p:nvSpPr>
-          <p:cNvPr id="5" name="Rounded Rectangle 4"/>
-          <p:cNvSpPr/>
-          <p:nvPr/>
-        </p:nvSpPr>
-        <p:spPr>
-          <a:xfrm>
-            <a:off x="457200" y="1261872"/>
-            <a:ext cx="11277295" cy="566928"/>
-          </a:xfrm>
-          <a:prstGeom prst="roundRect">
-            <a:avLst>
-              <a:gd name="adj" fmla="val 12000"/>
-            </a:avLst>
-          </a:prstGeom>
-          <a:solidFill>
-            <a:srgbClr val="F2F2F2"/>
-          </a:solidFill>
-          <a:ln>
-            <a:noFill/>
-          </a:ln>
-        </p:spPr>
-        <p:style>
-          <a:lnRef idx="1">
-            <a:schemeClr val="accent1"/>
-          </a:lnRef>
-          <a:fillRef idx="3">
-            <a:schemeClr val="accent1"/>
-          </a:fillRef>
-          <a:effectRef idx="2">
-            <a:schemeClr val="accent1"/>
-          </a:effectRef>
-          <a:fontRef idx="minor">
-            <a:schemeClr val="lt1"/>
-          </a:fontRef>
-        </p:style>
-        <p:txBody>
-          <a:bodyPr rtlCol="0" anchor="ctr"/>
-          <a:lstStyle/>
-          <a:p>
-            <a:pPr algn="ctr"/>
-          </a:p>
-        </p:txBody>
-      </p:sp>
-      <p:sp>
-        <p:nvSpPr>
-          <p:cNvPr id="6" name="Rectangle 5"/>
-          <p:cNvSpPr/>
-          <p:nvPr/>
-        </p:nvSpPr>
-        <p:spPr>
-          <a:xfrm>
-            <a:off x="640080" y="1408175"/>
-            <a:ext cx="274320" cy="274320"/>
-          </a:xfrm>
-          <a:prstGeom prst="rect">
-            <a:avLst/>
-          </a:prstGeom>
-          <a:solidFill>
-            <a:srgbClr val="FFFFFF"/>
-          </a:solidFill>
-          <a:ln>
-            <a:solidFill>
-              <a:srgbClr val="333333"/>
-            </a:solidFill>
-          </a:ln>
-        </p:spPr>
-        <p:style>
-          <a:lnRef idx="1">
-            <a:schemeClr val="accent1"/>
-          </a:lnRef>
-          <a:fillRef idx="3">
-            <a:schemeClr val="accent1"/>
-          </a:fillRef>
-          <a:effectRef idx="2">
-            <a:schemeClr val="accent1"/>
-          </a:effectRef>
-          <a:fontRef idx="minor">
-            <a:schemeClr val="lt1"/>
-          </a:fontRef>
-        </p:style>
-        <p:txBody>
-          <a:bodyPr rtlCol="0" anchor="ctr"/>
-          <a:lstStyle/>
-          <a:p>
-            <a:pPr algn="ctr"/>
-          </a:p>
-        </p:txBody>
-      </p:sp>
-      <p:sp>
-        <p:nvSpPr>
-          <p:cNvPr id="7" name="Rectangle 6"/>
-          <p:cNvSpPr/>
-          <p:nvPr/>
-        </p:nvSpPr>
-        <p:spPr>
-          <a:xfrm>
-            <a:off x="640080" y="1408175"/>
-            <a:ext cx="73152" cy="274320"/>
-          </a:xfrm>
-          <a:prstGeom prst="rect">
-            <a:avLst/>
-          </a:prstGeom>
-          <a:solidFill>
-            <a:srgbClr val="269CCB"/>
-          </a:solidFill>
-          <a:ln>
-            <a:noFill/>
-          </a:ln>
-        </p:spPr>
-        <p:style>
-          <a:lnRef idx="1">
-            <a:schemeClr val="accent1"/>
-          </a:lnRef>
-          <a:fillRef idx="3">
-            <a:schemeClr val="accent1"/>
-          </a:fillRef>
-          <a:effectRef idx="2">
-            <a:schemeClr val="accent1"/>
-          </a:effectRef>
-          <a:fontRef idx="minor">
-            <a:schemeClr val="lt1"/>
-          </a:fontRef>
-        </p:style>
-        <p:txBody>
-          <a:bodyPr rtlCol="0" anchor="ctr"/>
-          <a:lstStyle/>
-          <a:p>
-            <a:pPr algn="ctr"/>
-          </a:p>
-        </p:txBody>
-      </p:sp>
-      <p:sp>
-        <p:nvSpPr>
-          <p:cNvPr id="8" name="TextBox 7"/>
+              <a:t>Taller PI VetCare — objetivo y criterios</a:t>
+            </a:r>
+          </a:p>
+        </p:txBody>
+      </p:sp>
+      <p:sp>
+        <p:nvSpPr>
+          <p:cNvPr id="5" name="TextBox 4"/>
           <p:cNvSpPr txBox="1"/>
           <p:nvPr/>
         </p:nvSpPr>
         <p:spPr>
           <a:xfrm>
-            <a:off x="1097280" y="1353312"/>
-            <a:ext cx="10362895" cy="402336"/>
+            <a:off x="457200" y="1170432"/>
+            <a:ext cx="11277295" cy="5230368"/>
           </a:xfrm>
           <a:prstGeom prst="rect">
             <a:avLst/>
@@ -4796,9 +4982,16 @@
           <a:noFill/>
         </p:spPr>
         <p:txBody>
-          <a:bodyPr wrap="square" anchor="ctr"/>
-          <a:lstStyle/>
-          <a:p>
+          <a:bodyPr wrap="square">
+            <a:spAutoFit/>
+          </a:bodyPr>
+          <a:lstStyle/>
+          <a:p>
+            <a:pPr>
+              <a:spcAft>
+                <a:spcPts val="800"/>
+              </a:spcAft>
+            </a:pPr>
             <a:r>
               <a:rPr sz="1500" b="0" i="0">
                 <a:solidFill>
@@ -4806,164 +4999,17 @@
                 </a:solidFill>
                 <a:latin typeface="Calibri"/>
               </a:rPr>
-              <a:t>□ Trigger con propósito?</a:t>
-            </a:r>
-          </a:p>
-        </p:txBody>
-      </p:sp>
-      <p:sp>
-        <p:nvSpPr>
-          <p:cNvPr id="9" name="Rounded Rectangle 8"/>
-          <p:cNvSpPr/>
-          <p:nvPr/>
-        </p:nvSpPr>
-        <p:spPr>
-          <a:xfrm>
-            <a:off x="457200" y="1938528"/>
-            <a:ext cx="11277295" cy="566928"/>
-          </a:xfrm>
-          <a:prstGeom prst="roundRect">
-            <a:avLst>
-              <a:gd name="adj" fmla="val 12000"/>
-            </a:avLst>
-          </a:prstGeom>
-          <a:solidFill>
-            <a:srgbClr val="F2F2F2"/>
-          </a:solidFill>
-          <a:ln>
-            <a:noFill/>
-          </a:ln>
-        </p:spPr>
-        <p:style>
-          <a:lnRef idx="1">
-            <a:schemeClr val="accent1"/>
-          </a:lnRef>
-          <a:fillRef idx="3">
-            <a:schemeClr val="accent1"/>
-          </a:fillRef>
-          <a:effectRef idx="2">
-            <a:schemeClr val="accent1"/>
-          </a:effectRef>
-          <a:fontRef idx="minor">
-            <a:schemeClr val="lt1"/>
-          </a:fontRef>
-        </p:style>
-        <p:txBody>
-          <a:bodyPr rtlCol="0" anchor="ctr"/>
-          <a:lstStyle/>
-          <a:p>
-            <a:pPr algn="ctr"/>
-          </a:p>
-        </p:txBody>
-      </p:sp>
-      <p:sp>
-        <p:nvSpPr>
-          <p:cNvPr id="10" name="Rectangle 9"/>
-          <p:cNvSpPr/>
-          <p:nvPr/>
-        </p:nvSpPr>
-        <p:spPr>
-          <a:xfrm>
-            <a:off x="640080" y="2084832"/>
-            <a:ext cx="274320" cy="274320"/>
-          </a:xfrm>
-          <a:prstGeom prst="rect">
-            <a:avLst/>
-          </a:prstGeom>
-          <a:solidFill>
-            <a:srgbClr val="FFFFFF"/>
-          </a:solidFill>
-          <a:ln>
-            <a:solidFill>
-              <a:srgbClr val="333333"/>
-            </a:solidFill>
-          </a:ln>
-        </p:spPr>
-        <p:style>
-          <a:lnRef idx="1">
-            <a:schemeClr val="accent1"/>
-          </a:lnRef>
-          <a:fillRef idx="3">
-            <a:schemeClr val="accent1"/>
-          </a:fillRef>
-          <a:effectRef idx="2">
-            <a:schemeClr val="accent1"/>
-          </a:effectRef>
-          <a:fontRef idx="minor">
-            <a:schemeClr val="lt1"/>
-          </a:fontRef>
-        </p:style>
-        <p:txBody>
-          <a:bodyPr rtlCol="0" anchor="ctr"/>
-          <a:lstStyle/>
-          <a:p>
-            <a:pPr algn="ctr"/>
-          </a:p>
-        </p:txBody>
-      </p:sp>
-      <p:sp>
-        <p:nvSpPr>
-          <p:cNvPr id="11" name="Rectangle 10"/>
-          <p:cNvSpPr/>
-          <p:nvPr/>
-        </p:nvSpPr>
-        <p:spPr>
-          <a:xfrm>
-            <a:off x="640080" y="2084832"/>
-            <a:ext cx="73152" cy="274320"/>
-          </a:xfrm>
-          <a:prstGeom prst="rect">
-            <a:avLst/>
-          </a:prstGeom>
-          <a:solidFill>
-            <a:srgbClr val="269CCB"/>
-          </a:solidFill>
-          <a:ln>
-            <a:noFill/>
-          </a:ln>
-        </p:spPr>
-        <p:style>
-          <a:lnRef idx="1">
-            <a:schemeClr val="accent1"/>
-          </a:lnRef>
-          <a:fillRef idx="3">
-            <a:schemeClr val="accent1"/>
-          </a:fillRef>
-          <a:effectRef idx="2">
-            <a:schemeClr val="accent1"/>
-          </a:effectRef>
-          <a:fontRef idx="minor">
-            <a:schemeClr val="lt1"/>
-          </a:fontRef>
-        </p:style>
-        <p:txBody>
-          <a:bodyPr rtlCol="0" anchor="ctr"/>
-          <a:lstStyle/>
-          <a:p>
-            <a:pPr algn="ctr"/>
-          </a:p>
-        </p:txBody>
-      </p:sp>
-      <p:sp>
-        <p:nvSpPr>
-          <p:cNvPr id="12" name="TextBox 11"/>
-          <p:cNvSpPr txBox="1"/>
-          <p:nvPr/>
-        </p:nvSpPr>
-        <p:spPr>
-          <a:xfrm>
-            <a:off x="1097280" y="2029968"/>
-            <a:ext cx="10362895" cy="402336"/>
-          </a:xfrm>
-          <a:prstGeom prst="rect">
-            <a:avLst/>
-          </a:prstGeom>
-          <a:noFill/>
-        </p:spPr>
-        <p:txBody>
-          <a:bodyPr wrap="square" anchor="ctr"/>
-          <a:lstStyle/>
-          <a:p>
+              <a:t>–   </a:t>
+            </a:r>
+            <a:r>
+              <a:rPr sz="1500" b="1" i="0">
+                <a:solidFill>
+                  <a:srgbClr val="333333"/>
+                </a:solidFill>
+                <a:latin typeface="Calibri"/>
+              </a:rPr>
+              <a:t>Objetivo:</a:t>
+            </a:r>
             <a:r>
               <a:rPr sz="1500" b="0" i="0">
                 <a:solidFill>
@@ -4971,164 +5017,15 @@
                 </a:solidFill>
                 <a:latin typeface="Calibri"/>
               </a:rPr>
-              <a:t>□ Backup con restore?</a:t>
-            </a:r>
-          </a:p>
-        </p:txBody>
-      </p:sp>
-      <p:sp>
-        <p:nvSpPr>
-          <p:cNvPr id="13" name="Rounded Rectangle 12"/>
-          <p:cNvSpPr/>
-          <p:nvPr/>
-        </p:nvSpPr>
-        <p:spPr>
-          <a:xfrm>
-            <a:off x="457200" y="2615184"/>
-            <a:ext cx="11277295" cy="566928"/>
-          </a:xfrm>
-          <a:prstGeom prst="roundRect">
-            <a:avLst>
-              <a:gd name="adj" fmla="val 12000"/>
-            </a:avLst>
-          </a:prstGeom>
-          <a:solidFill>
-            <a:srgbClr val="F2F2F2"/>
-          </a:solidFill>
-          <a:ln>
-            <a:noFill/>
-          </a:ln>
-        </p:spPr>
-        <p:style>
-          <a:lnRef idx="1">
-            <a:schemeClr val="accent1"/>
-          </a:lnRef>
-          <a:fillRef idx="3">
-            <a:schemeClr val="accent1"/>
-          </a:fillRef>
-          <a:effectRef idx="2">
-            <a:schemeClr val="accent1"/>
-          </a:effectRef>
-          <a:fontRef idx="minor">
-            <a:schemeClr val="lt1"/>
-          </a:fontRef>
-        </p:style>
-        <p:txBody>
-          <a:bodyPr rtlCol="0" anchor="ctr"/>
-          <a:lstStyle/>
-          <a:p>
-            <a:pPr algn="ctr"/>
-          </a:p>
-        </p:txBody>
-      </p:sp>
-      <p:sp>
-        <p:nvSpPr>
-          <p:cNvPr id="14" name="Rectangle 13"/>
-          <p:cNvSpPr/>
-          <p:nvPr/>
-        </p:nvSpPr>
-        <p:spPr>
-          <a:xfrm>
-            <a:off x="640080" y="2761488"/>
-            <a:ext cx="274320" cy="274320"/>
-          </a:xfrm>
-          <a:prstGeom prst="rect">
-            <a:avLst/>
-          </a:prstGeom>
-          <a:solidFill>
-            <a:srgbClr val="FFFFFF"/>
-          </a:solidFill>
-          <a:ln>
-            <a:solidFill>
-              <a:srgbClr val="333333"/>
-            </a:solidFill>
-          </a:ln>
-        </p:spPr>
-        <p:style>
-          <a:lnRef idx="1">
-            <a:schemeClr val="accent1"/>
-          </a:lnRef>
-          <a:fillRef idx="3">
-            <a:schemeClr val="accent1"/>
-          </a:fillRef>
-          <a:effectRef idx="2">
-            <a:schemeClr val="accent1"/>
-          </a:effectRef>
-          <a:fontRef idx="minor">
-            <a:schemeClr val="lt1"/>
-          </a:fontRef>
-        </p:style>
-        <p:txBody>
-          <a:bodyPr rtlCol="0" anchor="ctr"/>
-          <a:lstStyle/>
-          <a:p>
-            <a:pPr algn="ctr"/>
-          </a:p>
-        </p:txBody>
-      </p:sp>
-      <p:sp>
-        <p:nvSpPr>
-          <p:cNvPr id="15" name="Rectangle 14"/>
-          <p:cNvSpPr/>
-          <p:nvPr/>
-        </p:nvSpPr>
-        <p:spPr>
-          <a:xfrm>
-            <a:off x="640080" y="2761488"/>
-            <a:ext cx="73152" cy="274320"/>
-          </a:xfrm>
-          <a:prstGeom prst="rect">
-            <a:avLst/>
-          </a:prstGeom>
-          <a:solidFill>
-            <a:srgbClr val="269CCB"/>
-          </a:solidFill>
-          <a:ln>
-            <a:noFill/>
-          </a:ln>
-        </p:spPr>
-        <p:style>
-          <a:lnRef idx="1">
-            <a:schemeClr val="accent1"/>
-          </a:lnRef>
-          <a:fillRef idx="3">
-            <a:schemeClr val="accent1"/>
-          </a:fillRef>
-          <a:effectRef idx="2">
-            <a:schemeClr val="accent1"/>
-          </a:effectRef>
-          <a:fontRef idx="minor">
-            <a:schemeClr val="lt1"/>
-          </a:fontRef>
-        </p:style>
-        <p:txBody>
-          <a:bodyPr rtlCol="0" anchor="ctr"/>
-          <a:lstStyle/>
-          <a:p>
-            <a:pPr algn="ctr"/>
-          </a:p>
-        </p:txBody>
-      </p:sp>
-      <p:sp>
-        <p:nvSpPr>
-          <p:cNvPr id="16" name="TextBox 15"/>
-          <p:cNvSpPr txBox="1"/>
-          <p:nvPr/>
-        </p:nvSpPr>
-        <p:spPr>
-          <a:xfrm>
-            <a:off x="1097280" y="2706624"/>
-            <a:ext cx="10362895" cy="402336"/>
-          </a:xfrm>
-          <a:prstGeom prst="rect">
-            <a:avLst/>
-          </a:prstGeom>
-          <a:noFill/>
-        </p:spPr>
-        <p:txBody>
-          <a:bodyPr wrap="square" anchor="ctr"/>
-          <a:lstStyle/>
-          <a:p>
+              <a:t> Una función de tarifas y dos triggers —auditoría y stock— corriendo en ExamLab, más el Plan_Backup_VetCare con sus 6 secciones.</a:t>
+            </a:r>
+          </a:p>
+          <a:p>
+            <a:pPr>
+              <a:spcAft>
+                <a:spcPts val="800"/>
+              </a:spcAft>
+            </a:pPr>
             <a:r>
               <a:rPr sz="1500" b="0" i="0">
                 <a:solidFill>
@@ -5136,14 +5033,292 @@
                 </a:solidFill>
                 <a:latin typeface="Calibri"/>
               </a:rPr>
-              <a:t>□ Evidencia SQL?</a:t>
-            </a:r>
-          </a:p>
-        </p:txBody>
-      </p:sp>
-      <p:sp>
-        <p:nvSpPr>
-          <p:cNvPr id="17" name="TextBox 16"/>
+              <a:t>–   </a:t>
+            </a:r>
+            <a:r>
+              <a:rPr sz="1500" b="1" i="0">
+                <a:solidFill>
+                  <a:srgbClr val="333333"/>
+                </a:solidFill>
+                <a:latin typeface="Calibri"/>
+              </a:rPr>
+              <a:t>Exito:</a:t>
+            </a:r>
+            <a:r>
+              <a:rPr sz="1500" b="0" i="0">
+                <a:solidFill>
+                  <a:srgbClr val="333333"/>
+                </a:solidFill>
+                <a:latin typeface="Calibri"/>
+              </a:rPr>
+              <a:t> «fn_precio_consulta» con «RETURNS NUMERIC», «IMMUTABLE», insensible a mayúsculas, recargo del 35 % y «NULL» tratado como falso (45000 → </a:t>
+            </a:r>
+            <a:r>
+              <a:rPr sz="1500" b="1" i="0">
+                <a:solidFill>
+                  <a:srgbClr val="333333"/>
+                </a:solidFill>
+                <a:latin typeface="Calibri"/>
+              </a:rPr>
+              <a:t>60750</a:t>
+            </a:r>
+            <a:r>
+              <a:rPr sz="1500" b="0" i="0">
+                <a:solidFill>
+                  <a:srgbClr val="333333"/>
+                </a:solidFill>
+                <a:latin typeface="Calibri"/>
+              </a:rPr>
+              <a:t>).</a:t>
+            </a:r>
+          </a:p>
+          <a:p>
+            <a:pPr>
+              <a:spcAft>
+                <a:spcPts val="800"/>
+              </a:spcAft>
+            </a:pPr>
+            <a:r>
+              <a:rPr sz="1500" b="0" i="0">
+                <a:solidFill>
+                  <a:srgbClr val="333333"/>
+                </a:solidFill>
+                <a:latin typeface="Calibri"/>
+              </a:rPr>
+              <a:t>–   </a:t>
+            </a:r>
+            <a:r>
+              <a:rPr sz="1500" b="1" i="0">
+                <a:solidFill>
+                  <a:srgbClr val="333333"/>
+                </a:solidFill>
+                <a:latin typeface="Calibri"/>
+              </a:rPr>
+              <a:t>Exito:</a:t>
+            </a:r>
+            <a:r>
+              <a:rPr sz="1500" b="0" i="0">
+                <a:solidFill>
+                  <a:srgbClr val="333333"/>
+                </a:solidFill>
+                <a:latin typeface="Calibri"/>
+              </a:rPr>
+              <a:t> El trigger de auditoría en sus </a:t>
+            </a:r>
+            <a:r>
+              <a:rPr sz="1500" b="1" i="0">
+                <a:solidFill>
+                  <a:srgbClr val="333333"/>
+                </a:solidFill>
+                <a:latin typeface="Calibri"/>
+              </a:rPr>
+              <a:t>dos objetos</a:t>
+            </a:r>
+            <a:r>
+              <a:rPr sz="1500" b="0" i="0">
+                <a:solidFill>
+                  <a:srgbClr val="333333"/>
+                </a:solidFill>
+                <a:latin typeface="Calibri"/>
+              </a:rPr>
+              <a:t>: «fn_trg_audit_cita() RETURNS TRIGGER» + «CREATE TRIGGER ... EXECUTE FUNCTION». Cero «:NEW» / «:OLD».</a:t>
+            </a:r>
+          </a:p>
+          <a:p>
+            <a:pPr>
+              <a:spcAft>
+                <a:spcPts val="800"/>
+              </a:spcAft>
+            </a:pPr>
+            <a:r>
+              <a:rPr sz="1500" b="0" i="0">
+                <a:solidFill>
+                  <a:srgbClr val="333333"/>
+                </a:solidFill>
+                <a:latin typeface="Calibri"/>
+              </a:rPr>
+              <a:t>–   </a:t>
+            </a:r>
+            <a:r>
+              <a:rPr sz="1500" b="1" i="0">
+                <a:solidFill>
+                  <a:srgbClr val="333333"/>
+                </a:solidFill>
+                <a:latin typeface="Calibri"/>
+              </a:rPr>
+              <a:t>Exito:</a:t>
+            </a:r>
+            <a:r>
+              <a:rPr sz="1500" b="0" i="0">
+                <a:solidFill>
+                  <a:srgbClr val="333333"/>
+                </a:solidFill>
+                <a:latin typeface="Calibri"/>
+              </a:rPr>
+              <a:t> Los 3 «UPDATE» dejan </a:t>
+            </a:r>
+            <a:r>
+              <a:rPr sz="1500" b="1" i="0">
+                <a:solidFill>
+                  <a:srgbClr val="333333"/>
+                </a:solidFill>
+                <a:latin typeface="Calibri"/>
+              </a:rPr>
+              <a:t>2 filas</a:t>
+            </a:r>
+            <a:r>
+              <a:rPr sz="1500" b="0" i="0">
+                <a:solidFill>
+                  <a:srgbClr val="333333"/>
+                </a:solidFill>
+                <a:latin typeface="Calibri"/>
+              </a:rPr>
+              <a:t> en «audit_cita» y el estudiante explica por qué la tercera no se auditó.</a:t>
+            </a:r>
+          </a:p>
+          <a:p>
+            <a:pPr>
+              <a:spcAft>
+                <a:spcPts val="800"/>
+              </a:spcAft>
+            </a:pPr>
+            <a:r>
+              <a:rPr sz="1500" b="0" i="0">
+                <a:solidFill>
+                  <a:srgbClr val="333333"/>
+                </a:solidFill>
+                <a:latin typeface="Calibri"/>
+              </a:rPr>
+              <a:t>–   </a:t>
+            </a:r>
+            <a:r>
+              <a:rPr sz="1500" b="1" i="0">
+                <a:solidFill>
+                  <a:srgbClr val="333333"/>
+                </a:solidFill>
+                <a:latin typeface="Calibri"/>
+              </a:rPr>
+              <a:t>Exito:</a:t>
+            </a:r>
+            <a:r>
+              <a:rPr sz="1500" b="0" i="0">
+                <a:solidFill>
+                  <a:srgbClr val="333333"/>
+                </a:solidFill>
+                <a:latin typeface="Calibri"/>
+              </a:rPr>
+              <a:t> El stock negativo (</a:t>
+            </a:r>
+            <a:r>
+              <a:rPr sz="1500" b="1" i="0">
+                <a:solidFill>
+                  <a:srgbClr val="333333"/>
+                </a:solidFill>
+                <a:latin typeface="Calibri"/>
+              </a:rPr>
+              <a:t>-7</a:t>
+            </a:r>
+            <a:r>
+              <a:rPr sz="1500" b="0" i="0">
+                <a:solidFill>
+                  <a:srgbClr val="333333"/>
+                </a:solidFill>
+                <a:latin typeface="Calibri"/>
+              </a:rPr>
+              <a:t>) evidenciado </a:t>
+            </a:r>
+            <a:r>
+              <a:rPr sz="1500" b="1" i="0">
+                <a:solidFill>
+                  <a:srgbClr val="333333"/>
+                </a:solidFill>
+                <a:latin typeface="Calibri"/>
+              </a:rPr>
+              <a:t>antes</a:t>
+            </a:r>
+            <a:r>
+              <a:rPr sz="1500" b="0" i="0">
+                <a:solidFill>
+                  <a:srgbClr val="333333"/>
+                </a:solidFill>
+                <a:latin typeface="Calibri"/>
+              </a:rPr>
+              <a:t> del trigger, y el trigger «BEFORE UPDATE» con el mensaje literal de la rúbrica.</a:t>
+            </a:r>
+          </a:p>
+          <a:p>
+            <a:pPr>
+              <a:spcAft>
+                <a:spcPts val="800"/>
+              </a:spcAft>
+            </a:pPr>
+            <a:r>
+              <a:rPr sz="1500" b="0" i="0">
+                <a:solidFill>
+                  <a:srgbClr val="333333"/>
+                </a:solidFill>
+                <a:latin typeface="Calibri"/>
+              </a:rPr>
+              <a:t>–   </a:t>
+            </a:r>
+            <a:r>
+              <a:rPr sz="1500" b="1" i="0">
+                <a:solidFill>
+                  <a:srgbClr val="333333"/>
+                </a:solidFill>
+                <a:latin typeface="Calibri"/>
+              </a:rPr>
+              <a:t>Exito:</a:t>
+            </a:r>
+            <a:r>
+              <a:rPr sz="1500" b="0" i="0">
+                <a:solidFill>
+                  <a:srgbClr val="333333"/>
+                </a:solidFill>
+                <a:latin typeface="Calibri"/>
+              </a:rPr>
+              <a:t> «Plan_Backup_VetCare» con las 6 secciones, RPO y RTO justificados contra el horario de la clínica, y la consulta de validación post-restore.</a:t>
+            </a:r>
+          </a:p>
+          <a:p>
+            <a:pPr>
+              <a:spcAft>
+                <a:spcPts val="800"/>
+              </a:spcAft>
+            </a:pPr>
+            <a:r>
+              <a:rPr sz="1500" b="0" i="0">
+                <a:solidFill>
+                  <a:srgbClr val="333333"/>
+                </a:solidFill>
+                <a:latin typeface="Calibri"/>
+              </a:rPr>
+              <a:t>–   </a:t>
+            </a:r>
+            <a:r>
+              <a:rPr sz="1500" b="1" i="0">
+                <a:solidFill>
+                  <a:srgbClr val="333333"/>
+                </a:solidFill>
+                <a:latin typeface="Calibri"/>
+              </a:rPr>
+              <a:t>Exito:</a:t>
+            </a:r>
+            <a:r>
+              <a:rPr sz="1500" b="0" i="0">
+                <a:solidFill>
+                  <a:srgbClr val="333333"/>
+                </a:solidFill>
+                <a:latin typeface="Calibri"/>
+              </a:rPr>
+              <a:t> Entrega domingo 23:59.</a:t>
+            </a:r>
+          </a:p>
+        </p:txBody>
+      </p:sp>
+      <p:sp>
+        <p:nvSpPr>
+          <p:cNvPr id="6" name="TextBox 5"/>
           <p:cNvSpPr txBox="1"/>
           <p:nvPr/>
         </p:nvSpPr>
@@ -5317,7 +5492,7 @@
                 </a:solidFill>
                 <a:latin typeface="Calibri"/>
               </a:rPr>
-              <a:t>Criterios de exito / entregable</a:t>
+              <a:t>Taller PI VetCare — escenario / datos de partida</a:t>
             </a:r>
           </a:p>
         </p:txBody>
@@ -5356,25 +5531,7 @@
                 </a:solidFill>
                 <a:latin typeface="Calibri"/>
               </a:rPr>
-              <a:t>–   </a:t>
-            </a:r>
-            <a:r>
-              <a:rPr sz="1600" b="1" i="0">
-                <a:solidFill>
-                  <a:srgbClr val="333333"/>
-                </a:solidFill>
-                <a:latin typeface="Calibri"/>
-              </a:rPr>
-              <a:t>Entregable:</a:t>
-            </a:r>
-            <a:r>
-              <a:rPr sz="1600" b="0" i="0">
-                <a:solidFill>
-                  <a:srgbClr val="333333"/>
-                </a:solidFill>
-                <a:latin typeface="Calibri"/>
-              </a:rPr>
-              <a:t> Scripts funcion/trigger + Plan_Backup_VetCare (1 pag.)</a:t>
+              <a:t>–   Esquema de VetCare completo y poblado: 10 citas, con consultas ya registradas en las citas 2, 5, 7 y 10.</a:t>
             </a:r>
           </a:p>
           <a:p>
@@ -5390,7 +5547,43 @@
                 </a:solidFill>
                 <a:latin typeface="Calibri"/>
               </a:rPr>
-              <a:t>–   Evidencia en playground (enlace) o archivo SQL/PNG propio.</a:t>
+              <a:t>–   «insumo» fue creada </a:t>
+            </a:r>
+            <a:r>
+              <a:rPr sz="1600" b="1" i="0">
+                <a:solidFill>
+                  <a:srgbClr val="333333"/>
+                </a:solidFill>
+                <a:latin typeface="Calibri"/>
+              </a:rPr>
+              <a:t>a propósito sin</a:t>
+            </a:r>
+            <a:r>
+              <a:rPr sz="1600" b="0" i="0">
+                <a:solidFill>
+                  <a:srgbClr val="333333"/>
+                </a:solidFill>
+                <a:latin typeface="Calibri"/>
+              </a:rPr>
+              <a:t> «CHECK (stock &gt;= 0)»: el insumo </a:t>
+            </a:r>
+            <a:r>
+              <a:rPr sz="1600" b="1" i="0">
+                <a:solidFill>
+                  <a:srgbClr val="333333"/>
+                </a:solidFill>
+                <a:latin typeface="Calibri"/>
+              </a:rPr>
+              <a:t>2 (Vacuna triple felina) tiene stock 3</a:t>
+            </a:r>
+            <a:r>
+              <a:rPr sz="1600" b="0" i="0">
+                <a:solidFill>
+                  <a:srgbClr val="333333"/>
+                </a:solidFill>
+                <a:latin typeface="Calibri"/>
+              </a:rPr>
+              <a:t>, y de ahí sale el -7 de la demostración.</a:t>
             </a:r>
           </a:p>
           <a:p>
@@ -5406,7 +5599,25 @@
                 </a:solidFill>
                 <a:latin typeface="Calibri"/>
               </a:rPr>
-              <a:t>–   Actualizar checklist PI (que criterio de rubrica avanzo).</a:t>
+              <a:t>–   </a:t>
+            </a:r>
+            <a:r>
+              <a:rPr sz="1600" b="1" i="0">
+                <a:solidFill>
+                  <a:srgbClr val="333333"/>
+                </a:solidFill>
+                <a:latin typeface="Calibri"/>
+              </a:rPr>
+              <a:t>Motor:</a:t>
+            </a:r>
+            <a:r>
+              <a:rPr sz="1600" b="0" i="0">
+                <a:solidFill>
+                  <a:srgbClr val="333333"/>
+                </a:solidFill>
+                <a:latin typeface="Calibri"/>
+              </a:rPr>
+              <a:t> PostgreSQL dentro de ExamLab. La función, los dos triggers y sus pruebas con bloques «DO» corren de verdad y ahí se califican.</a:t>
             </a:r>
           </a:p>
           <a:p>
@@ -5431,7 +5642,7 @@
                 </a:solidFill>
                 <a:latin typeface="Calibri"/>
               </a:rPr>
-              <a:t>Entrega en ExamLab</a:t>
+              <a:t>Lo que NO se ejecuta:</a:t>
             </a:r>
             <a:r>
               <a:rPr sz="1600" b="0" i="0">
@@ -5440,7 +5651,7 @@
                 </a:solidFill>
                 <a:latin typeface="Calibri"/>
               </a:rPr>
-              <a:t> (https://uniaj.examlab.workers.dev/) — domingo 23:59 cuando aplique taller.</a:t>
+              <a:t> «pg_dump», «pg_dumpall», «pg_basebackup» ni «pg_restore» —son programas que escriben archivos y ExamLab corre en el navegador—. La pregunta 5 es un documento: se califica que nombre la herramienta correcta.</a:t>
             </a:r>
           </a:p>
         </p:txBody>
@@ -5621,7 +5832,7 @@
                 </a:solidFill>
                 <a:latin typeface="Calibri"/>
               </a:rPr>
-              <a:t>Para el PI esta semana</a:t>
+              <a:t>Taller PI VetCare — pasos guiados</a:t>
             </a:r>
           </a:p>
         </p:txBody>
@@ -5634,8 +5845,163 @@
         </p:nvSpPr>
         <p:spPr>
           <a:xfrm>
-            <a:off x="457200" y="1261872"/>
-            <a:ext cx="11277295" cy="1051560"/>
+            <a:off x="457200" y="1234440"/>
+            <a:ext cx="11277295" cy="950976"/>
+          </a:xfrm>
+          <a:prstGeom prst="roundRect">
+            <a:avLst>
+              <a:gd name="adj" fmla="val 12000"/>
+            </a:avLst>
+          </a:prstGeom>
+          <a:solidFill>
+            <a:srgbClr val="F2F2F2"/>
+          </a:solidFill>
+          <a:ln>
+            <a:noFill/>
+          </a:ln>
+        </p:spPr>
+        <p:style>
+          <a:lnRef idx="1">
+            <a:schemeClr val="accent1"/>
+          </a:lnRef>
+          <a:fillRef idx="3">
+            <a:schemeClr val="accent1"/>
+          </a:fillRef>
+          <a:effectRef idx="2">
+            <a:schemeClr val="accent1"/>
+          </a:effectRef>
+          <a:fontRef idx="minor">
+            <a:schemeClr val="lt1"/>
+          </a:fontRef>
+        </p:style>
+        <p:txBody>
+          <a:bodyPr rtlCol="0" anchor="ctr"/>
+          <a:lstStyle/>
+          <a:p>
+            <a:pPr algn="ctr"/>
+          </a:p>
+        </p:txBody>
+      </p:sp>
+      <p:sp>
+        <p:nvSpPr>
+          <p:cNvPr id="6" name="Rounded Rectangle 5"/>
+          <p:cNvSpPr/>
+          <p:nvPr/>
+        </p:nvSpPr>
+        <p:spPr>
+          <a:xfrm>
+            <a:off x="594360" y="1490472"/>
+            <a:ext cx="438912" cy="438912"/>
+          </a:xfrm>
+          <a:prstGeom prst="roundRect">
+            <a:avLst>
+              <a:gd name="adj" fmla="val 12000"/>
+            </a:avLst>
+          </a:prstGeom>
+          <a:solidFill>
+            <a:srgbClr val="095292"/>
+          </a:solidFill>
+          <a:ln>
+            <a:noFill/>
+          </a:ln>
+        </p:spPr>
+        <p:style>
+          <a:lnRef idx="1">
+            <a:schemeClr val="accent1"/>
+          </a:lnRef>
+          <a:fillRef idx="3">
+            <a:schemeClr val="accent1"/>
+          </a:fillRef>
+          <a:effectRef idx="2">
+            <a:schemeClr val="accent1"/>
+          </a:effectRef>
+          <a:fontRef idx="minor">
+            <a:schemeClr val="lt1"/>
+          </a:fontRef>
+        </p:style>
+        <p:txBody>
+          <a:bodyPr rtlCol="0" anchor="ctr"/>
+          <a:lstStyle/>
+          <a:p>
+            <a:pPr algn="ctr"/>
+          </a:p>
+        </p:txBody>
+      </p:sp>
+      <p:sp>
+        <p:nvSpPr>
+          <p:cNvPr id="7" name="TextBox 6"/>
+          <p:cNvSpPr txBox="1"/>
+          <p:nvPr/>
+        </p:nvSpPr>
+        <p:spPr>
+          <a:xfrm>
+            <a:off x="594360" y="1490472"/>
+            <a:ext cx="438912" cy="438912"/>
+          </a:xfrm>
+          <a:prstGeom prst="rect">
+            <a:avLst/>
+          </a:prstGeom>
+          <a:noFill/>
+        </p:spPr>
+        <p:txBody>
+          <a:bodyPr wrap="square" anchor="ctr"/>
+          <a:lstStyle/>
+          <a:p>
+            <a:pPr algn="ctr"/>
+            <a:r>
+              <a:rPr sz="1600" b="1" i="0">
+                <a:solidFill>
+                  <a:srgbClr val="FFFFFF"/>
+                </a:solidFill>
+                <a:latin typeface="Calibri"/>
+              </a:rPr>
+              <a:t>1</a:t>
+            </a:r>
+          </a:p>
+        </p:txBody>
+      </p:sp>
+      <p:sp>
+        <p:nvSpPr>
+          <p:cNvPr id="8" name="TextBox 7"/>
+          <p:cNvSpPr txBox="1"/>
+          <p:nvPr/>
+        </p:nvSpPr>
+        <p:spPr>
+          <a:xfrm>
+            <a:off x="1188720" y="1325880"/>
+            <a:ext cx="10271455" cy="786384"/>
+          </a:xfrm>
+          <a:prstGeom prst="rect">
+            <a:avLst/>
+          </a:prstGeom>
+          <a:noFill/>
+        </p:spPr>
+        <p:txBody>
+          <a:bodyPr wrap="square" anchor="ctr"/>
+          <a:lstStyle/>
+          <a:p>
+            <a:r>
+              <a:rPr sz="1500" b="1" i="0">
+                <a:solidFill>
+                  <a:srgbClr val="095292"/>
+                </a:solidFill>
+                <a:latin typeface="Calibri"/>
+              </a:rPr>
+              <a:t>Escribir fn_precio_consulta(especie, urgencia) RETURNS NUMERIC en PL/pgSQL y probarla con SELECT sobre las 3 especies.</a:t>
+            </a:r>
+          </a:p>
+        </p:txBody>
+      </p:sp>
+      <p:sp>
+        <p:nvSpPr>
+          <p:cNvPr id="9" name="Rounded Rectangle 8"/>
+          <p:cNvSpPr/>
+          <p:nvPr/>
+        </p:nvSpPr>
+        <p:spPr>
+          <a:xfrm>
+            <a:off x="457200" y="2276856"/>
+            <a:ext cx="11277295" cy="950976"/>
           </a:xfrm>
           <a:prstGeom prst="roundRect">
             <a:avLst>
@@ -5673,20 +6039,22 @@
       </p:sp>
       <p:sp>
         <p:nvSpPr>
-          <p:cNvPr id="6" name="Rectangle 5"/>
+          <p:cNvPr id="10" name="Rounded Rectangle 9"/>
           <p:cNvSpPr/>
           <p:nvPr/>
         </p:nvSpPr>
         <p:spPr>
           <a:xfrm>
-            <a:off x="457200" y="1261872"/>
-            <a:ext cx="128016" cy="1051560"/>
-          </a:xfrm>
-          <a:prstGeom prst="rect">
-            <a:avLst/>
+            <a:off x="594360" y="2532888"/>
+            <a:ext cx="438912" cy="438912"/>
+          </a:xfrm>
+          <a:prstGeom prst="roundRect">
+            <a:avLst>
+              <a:gd name="adj" fmla="val 12000"/>
+            </a:avLst>
           </a:prstGeom>
           <a:solidFill>
-            <a:srgbClr val="269CCB"/>
+            <a:srgbClr val="095292"/>
           </a:solidFill>
           <a:ln>
             <a:noFill/>
@@ -5716,14 +6084,14 @@
       </p:sp>
       <p:sp>
         <p:nvSpPr>
-          <p:cNvPr id="7" name="TextBox 6"/>
+          <p:cNvPr id="11" name="TextBox 10"/>
           <p:cNvSpPr txBox="1"/>
           <p:nvPr/>
         </p:nvSpPr>
         <p:spPr>
           <a:xfrm>
-            <a:off x="777240" y="1399031"/>
-            <a:ext cx="10774375" cy="822959"/>
+            <a:off x="594360" y="2532888"/>
+            <a:ext cx="438912" cy="438912"/>
           </a:xfrm>
           <a:prstGeom prst="rect">
             <a:avLst/>
@@ -5731,49 +6099,64 @@
           <a:noFill/>
         </p:spPr>
         <p:txBody>
-          <a:bodyPr wrap="square">
-            <a:spAutoFit/>
-          </a:bodyPr>
-          <a:lstStyle/>
-          <a:p>
-            <a:r>
-              <a:rPr sz="1200" b="1" i="0">
-                <a:solidFill>
-                  <a:srgbClr val="269CCB"/>
-                </a:solidFill>
-                <a:latin typeface="Calibri"/>
-              </a:rPr>
-              <a:t>Info</a:t>
-            </a:r>
-          </a:p>
-          <a:p>
-            <a:pPr>
-              <a:spcBef>
-                <a:spcPts val="400"/>
-              </a:spcBef>
-            </a:pPr>
-            <a:r>
-              <a:rPr sz="1400" b="0" i="0">
-                <a:solidFill>
-                  <a:srgbClr val="333333"/>
-                </a:solidFill>
-                <a:latin typeface="Calibri"/>
-              </a:rPr>
-              <a:t>Hito: &gt;=1 funcion + &gt;=1 trigger + borrador plan de respaldo</a:t>
-            </a:r>
-          </a:p>
-        </p:txBody>
-      </p:sp>
-      <p:sp>
-        <p:nvSpPr>
-          <p:cNvPr id="8" name="Rounded Rectangle 7"/>
+          <a:bodyPr wrap="square" anchor="ctr"/>
+          <a:lstStyle/>
+          <a:p>
+            <a:pPr algn="ctr"/>
+            <a:r>
+              <a:rPr sz="1600" b="1" i="0">
+                <a:solidFill>
+                  <a:srgbClr val="FFFFFF"/>
+                </a:solidFill>
+                <a:latin typeface="Calibri"/>
+              </a:rPr>
+              <a:t>2</a:t>
+            </a:r>
+          </a:p>
+        </p:txBody>
+      </p:sp>
+      <p:sp>
+        <p:nvSpPr>
+          <p:cNvPr id="12" name="TextBox 11"/>
+          <p:cNvSpPr txBox="1"/>
+          <p:nvPr/>
+        </p:nvSpPr>
+        <p:spPr>
+          <a:xfrm>
+            <a:off x="1188720" y="2368296"/>
+            <a:ext cx="10271455" cy="786384"/>
+          </a:xfrm>
+          <a:prstGeom prst="rect">
+            <a:avLst/>
+          </a:prstGeom>
+          <a:noFill/>
+        </p:spPr>
+        <p:txBody>
+          <a:bodyPr wrap="square" anchor="ctr"/>
+          <a:lstStyle/>
+          <a:p>
+            <a:r>
+              <a:rPr sz="1500" b="1" i="0">
+                <a:solidFill>
+                  <a:srgbClr val="095292"/>
+                </a:solidFill>
+                <a:latin typeface="Calibri"/>
+              </a:rPr>
+              <a:t>Crear la tabla audit_cita y el trigger de auditoria en sus dos objetos: fn_trg_audit_cita() RETURNS TRIGGER + CREATE TRIGGER ... EXECUTE FUNCTION.</a:t>
+            </a:r>
+          </a:p>
+        </p:txBody>
+      </p:sp>
+      <p:sp>
+        <p:nvSpPr>
+          <p:cNvPr id="13" name="Rounded Rectangle 12"/>
           <p:cNvSpPr/>
           <p:nvPr/>
         </p:nvSpPr>
         <p:spPr>
           <a:xfrm>
-            <a:off x="457200" y="2478024"/>
-            <a:ext cx="11277295" cy="1051560"/>
+            <a:off x="457200" y="3319272"/>
+            <a:ext cx="11277295" cy="950976"/>
           </a:xfrm>
           <a:prstGeom prst="roundRect">
             <a:avLst>
@@ -5781,7 +6164,7 @@
             </a:avLst>
           </a:prstGeom>
           <a:solidFill>
-            <a:srgbClr val="FFF8E1"/>
+            <a:srgbClr val="F2F2F2"/>
           </a:solidFill>
           <a:ln>
             <a:noFill/>
@@ -5811,20 +6194,22 @@
       </p:sp>
       <p:sp>
         <p:nvSpPr>
-          <p:cNvPr id="9" name="Rectangle 8"/>
+          <p:cNvPr id="14" name="Rounded Rectangle 13"/>
           <p:cNvSpPr/>
           <p:nvPr/>
         </p:nvSpPr>
         <p:spPr>
           <a:xfrm>
-            <a:off x="457200" y="2478024"/>
-            <a:ext cx="128016" cy="1051560"/>
-          </a:xfrm>
-          <a:prstGeom prst="rect">
-            <a:avLst/>
+            <a:off x="594360" y="3575304"/>
+            <a:ext cx="438912" cy="438912"/>
+          </a:xfrm>
+          <a:prstGeom prst="roundRect">
+            <a:avLst>
+              <a:gd name="adj" fmla="val 12000"/>
+            </a:avLst>
           </a:prstGeom>
           <a:solidFill>
-            <a:srgbClr val="FFD000"/>
+            <a:srgbClr val="095292"/>
           </a:solidFill>
           <a:ln>
             <a:noFill/>
@@ -5854,14 +6239,14 @@
       </p:sp>
       <p:sp>
         <p:nvSpPr>
-          <p:cNvPr id="10" name="TextBox 9"/>
+          <p:cNvPr id="15" name="TextBox 14"/>
           <p:cNvSpPr txBox="1"/>
           <p:nvPr/>
         </p:nvSpPr>
         <p:spPr>
           <a:xfrm>
-            <a:off x="777240" y="2615184"/>
-            <a:ext cx="10774375" cy="822959"/>
+            <a:off x="594360" y="3575304"/>
+            <a:ext cx="438912" cy="438912"/>
           </a:xfrm>
           <a:prstGeom prst="rect">
             <a:avLst/>
@@ -5869,49 +6254,64 @@
           <a:noFill/>
         </p:spPr>
         <p:txBody>
-          <a:bodyPr wrap="square">
-            <a:spAutoFit/>
-          </a:bodyPr>
-          <a:lstStyle/>
-          <a:p>
-            <a:r>
-              <a:rPr sz="1200" b="1" i="0">
-                <a:solidFill>
-                  <a:srgbClr val="FFD000"/>
-                </a:solidFill>
-                <a:latin typeface="Calibri"/>
-              </a:rPr>
-              <a:t>Aclaración</a:t>
-            </a:r>
-          </a:p>
-          <a:p>
-            <a:pPr>
-              <a:spcBef>
-                <a:spcPts val="400"/>
-              </a:spcBef>
-            </a:pPr>
-            <a:r>
-              <a:rPr sz="1400" b="0" i="0">
-                <a:solidFill>
-                  <a:srgbClr val="333333"/>
-                </a:solidFill>
-                <a:latin typeface="Calibri"/>
-              </a:rPr>
-              <a:t>Enunciado completo: Clases/Proyecto Integrador/ (VetCare DB).</a:t>
-            </a:r>
-          </a:p>
-        </p:txBody>
-      </p:sp>
-      <p:sp>
-        <p:nvSpPr>
-          <p:cNvPr id="11" name="Rounded Rectangle 10"/>
+          <a:bodyPr wrap="square" anchor="ctr"/>
+          <a:lstStyle/>
+          <a:p>
+            <a:pPr algn="ctr"/>
+            <a:r>
+              <a:rPr sz="1600" b="1" i="0">
+                <a:solidFill>
+                  <a:srgbClr val="FFFFFF"/>
+                </a:solidFill>
+                <a:latin typeface="Calibri"/>
+              </a:rPr>
+              <a:t>3</a:t>
+            </a:r>
+          </a:p>
+        </p:txBody>
+      </p:sp>
+      <p:sp>
+        <p:nvSpPr>
+          <p:cNvPr id="16" name="TextBox 15"/>
+          <p:cNvSpPr txBox="1"/>
+          <p:nvPr/>
+        </p:nvSpPr>
+        <p:spPr>
+          <a:xfrm>
+            <a:off x="1188720" y="3410712"/>
+            <a:ext cx="10271455" cy="786384"/>
+          </a:xfrm>
+          <a:prstGeom prst="rect">
+            <a:avLst/>
+          </a:prstGeom>
+          <a:noFill/>
+        </p:spPr>
+        <p:txBody>
+          <a:bodyPr wrap="square" anchor="ctr"/>
+          <a:lstStyle/>
+          <a:p>
+            <a:r>
+              <a:rPr sz="1500" b="1" i="0">
+                <a:solidFill>
+                  <a:srgbClr val="095292"/>
+                </a:solidFill>
+                <a:latin typeface="Calibri"/>
+              </a:rPr>
+              <a:t>Crear el trigger de stock no negativo (BEFORE UPDATE), evidenciando primero que sin el el stock llega a -7.</a:t>
+            </a:r>
+          </a:p>
+        </p:txBody>
+      </p:sp>
+      <p:sp>
+        <p:nvSpPr>
+          <p:cNvPr id="17" name="Rounded Rectangle 16"/>
           <p:cNvSpPr/>
           <p:nvPr/>
         </p:nvSpPr>
         <p:spPr>
           <a:xfrm>
-            <a:off x="457200" y="3694176"/>
-            <a:ext cx="11277295" cy="1051560"/>
+            <a:off x="457200" y="4361688"/>
+            <a:ext cx="11277295" cy="950976"/>
           </a:xfrm>
           <a:prstGeom prst="roundRect">
             <a:avLst>
@@ -5919,7 +6319,7 @@
             </a:avLst>
           </a:prstGeom>
           <a:solidFill>
-            <a:srgbClr val="FBE4E4"/>
+            <a:srgbClr val="E8F4FA"/>
           </a:solidFill>
           <a:ln>
             <a:noFill/>
@@ -5949,20 +6349,22 @@
       </p:sp>
       <p:sp>
         <p:nvSpPr>
-          <p:cNvPr id="12" name="Rectangle 11"/>
+          <p:cNvPr id="18" name="Rounded Rectangle 17"/>
           <p:cNvSpPr/>
           <p:nvPr/>
         </p:nvSpPr>
         <p:spPr>
           <a:xfrm>
-            <a:off x="457200" y="3694176"/>
-            <a:ext cx="128016" cy="1051560"/>
-          </a:xfrm>
-          <a:prstGeom prst="rect">
-            <a:avLst/>
+            <a:off x="594360" y="4617720"/>
+            <a:ext cx="438912" cy="438912"/>
+          </a:xfrm>
+          <a:prstGeom prst="roundRect">
+            <a:avLst>
+              <a:gd name="adj" fmla="val 12000"/>
+            </a:avLst>
           </a:prstGeom>
           <a:solidFill>
-            <a:srgbClr val="A02030"/>
+            <a:srgbClr val="095292"/>
           </a:solidFill>
           <a:ln>
             <a:noFill/>
@@ -5992,14 +6394,14 @@
       </p:sp>
       <p:sp>
         <p:nvSpPr>
-          <p:cNvPr id="13" name="TextBox 12"/>
+          <p:cNvPr id="19" name="TextBox 18"/>
           <p:cNvSpPr txBox="1"/>
           <p:nvPr/>
         </p:nvSpPr>
         <p:spPr>
           <a:xfrm>
-            <a:off x="777240" y="3831336"/>
-            <a:ext cx="10774375" cy="822959"/>
+            <a:off x="594360" y="4617720"/>
+            <a:ext cx="438912" cy="438912"/>
           </a:xfrm>
           <a:prstGeom prst="rect">
             <a:avLst/>
@@ -6007,42 +6409,212 @@
           <a:noFill/>
         </p:spPr>
         <p:txBody>
-          <a:bodyPr wrap="square">
-            <a:spAutoFit/>
-          </a:bodyPr>
-          <a:lstStyle/>
-          <a:p>
-            <a:r>
-              <a:rPr sz="1200" b="1" i="0">
-                <a:solidFill>
-                  <a:srgbClr val="A02030"/>
-                </a:solidFill>
-                <a:latin typeface="Calibri"/>
-              </a:rPr>
-              <a:t>Atención</a:t>
-            </a:r>
-          </a:p>
-          <a:p>
-            <a:pPr>
-              <a:spcBef>
-                <a:spcPts val="400"/>
-              </a:spcBef>
-            </a:pPr>
-            <a:r>
-              <a:rPr sz="1400" b="0" i="0">
-                <a:solidFill>
-                  <a:srgbClr val="333333"/>
-                </a:solidFill>
-                <a:latin typeface="Calibri"/>
-              </a:rPr>
-              <a:t>Taller de la semana en ExamLab (https://uniaj.examlab.workers.dev/): domingo 23:59 (regla del Acuerdo) cuando aplique.</a:t>
-            </a:r>
-          </a:p>
-        </p:txBody>
-      </p:sp>
-      <p:sp>
-        <p:nvSpPr>
-          <p:cNvPr id="14" name="TextBox 13"/>
+          <a:bodyPr wrap="square" anchor="ctr"/>
+          <a:lstStyle/>
+          <a:p>
+            <a:pPr algn="ctr"/>
+            <a:r>
+              <a:rPr sz="1600" b="1" i="0">
+                <a:solidFill>
+                  <a:srgbClr val="FFFFFF"/>
+                </a:solidFill>
+                <a:latin typeface="Calibri"/>
+              </a:rPr>
+              <a:t>4</a:t>
+            </a:r>
+          </a:p>
+        </p:txBody>
+      </p:sp>
+      <p:sp>
+        <p:nvSpPr>
+          <p:cNvPr id="20" name="TextBox 19"/>
+          <p:cNvSpPr txBox="1"/>
+          <p:nvPr/>
+        </p:nvSpPr>
+        <p:spPr>
+          <a:xfrm>
+            <a:off x="1188720" y="4453128"/>
+            <a:ext cx="10271455" cy="786384"/>
+          </a:xfrm>
+          <a:prstGeom prst="rect">
+            <a:avLst/>
+          </a:prstGeom>
+          <a:noFill/>
+        </p:spPr>
+        <p:txBody>
+          <a:bodyPr wrap="square" anchor="ctr"/>
+          <a:lstStyle/>
+          <a:p>
+            <a:r>
+              <a:rPr sz="1500" b="1" i="0">
+                <a:solidFill>
+                  <a:srgbClr val="095292"/>
+                </a:solidFill>
+                <a:latin typeface="Calibri"/>
+              </a:rPr>
+              <a:t>Decidir donde vive cada validacion: CHECK, trigger o aplicacion (pregunta 4).</a:t>
+            </a:r>
+          </a:p>
+        </p:txBody>
+      </p:sp>
+      <p:sp>
+        <p:nvSpPr>
+          <p:cNvPr id="21" name="Rounded Rectangle 20"/>
+          <p:cNvSpPr/>
+          <p:nvPr/>
+        </p:nvSpPr>
+        <p:spPr>
+          <a:xfrm>
+            <a:off x="457200" y="5404104"/>
+            <a:ext cx="11277295" cy="950976"/>
+          </a:xfrm>
+          <a:prstGeom prst="roundRect">
+            <a:avLst>
+              <a:gd name="adj" fmla="val 12000"/>
+            </a:avLst>
+          </a:prstGeom>
+          <a:solidFill>
+            <a:srgbClr val="F2F2F2"/>
+          </a:solidFill>
+          <a:ln>
+            <a:noFill/>
+          </a:ln>
+        </p:spPr>
+        <p:style>
+          <a:lnRef idx="1">
+            <a:schemeClr val="accent1"/>
+          </a:lnRef>
+          <a:fillRef idx="3">
+            <a:schemeClr val="accent1"/>
+          </a:fillRef>
+          <a:effectRef idx="2">
+            <a:schemeClr val="accent1"/>
+          </a:effectRef>
+          <a:fontRef idx="minor">
+            <a:schemeClr val="lt1"/>
+          </a:fontRef>
+        </p:style>
+        <p:txBody>
+          <a:bodyPr rtlCol="0" anchor="ctr"/>
+          <a:lstStyle/>
+          <a:p>
+            <a:pPr algn="ctr"/>
+          </a:p>
+        </p:txBody>
+      </p:sp>
+      <p:sp>
+        <p:nvSpPr>
+          <p:cNvPr id="22" name="Rounded Rectangle 21"/>
+          <p:cNvSpPr/>
+          <p:nvPr/>
+        </p:nvSpPr>
+        <p:spPr>
+          <a:xfrm>
+            <a:off x="594360" y="5660136"/>
+            <a:ext cx="438912" cy="438912"/>
+          </a:xfrm>
+          <a:prstGeom prst="roundRect">
+            <a:avLst>
+              <a:gd name="adj" fmla="val 12000"/>
+            </a:avLst>
+          </a:prstGeom>
+          <a:solidFill>
+            <a:srgbClr val="095292"/>
+          </a:solidFill>
+          <a:ln>
+            <a:noFill/>
+          </a:ln>
+        </p:spPr>
+        <p:style>
+          <a:lnRef idx="1">
+            <a:schemeClr val="accent1"/>
+          </a:lnRef>
+          <a:fillRef idx="3">
+            <a:schemeClr val="accent1"/>
+          </a:fillRef>
+          <a:effectRef idx="2">
+            <a:schemeClr val="accent1"/>
+          </a:effectRef>
+          <a:fontRef idx="minor">
+            <a:schemeClr val="lt1"/>
+          </a:fontRef>
+        </p:style>
+        <p:txBody>
+          <a:bodyPr rtlCol="0" anchor="ctr"/>
+          <a:lstStyle/>
+          <a:p>
+            <a:pPr algn="ctr"/>
+          </a:p>
+        </p:txBody>
+      </p:sp>
+      <p:sp>
+        <p:nvSpPr>
+          <p:cNvPr id="23" name="TextBox 22"/>
+          <p:cNvSpPr txBox="1"/>
+          <p:nvPr/>
+        </p:nvSpPr>
+        <p:spPr>
+          <a:xfrm>
+            <a:off x="594360" y="5660136"/>
+            <a:ext cx="438912" cy="438912"/>
+          </a:xfrm>
+          <a:prstGeom prst="rect">
+            <a:avLst/>
+          </a:prstGeom>
+          <a:noFill/>
+        </p:spPr>
+        <p:txBody>
+          <a:bodyPr wrap="square" anchor="ctr"/>
+          <a:lstStyle/>
+          <a:p>
+            <a:pPr algn="ctr"/>
+            <a:r>
+              <a:rPr sz="1600" b="1" i="0">
+                <a:solidFill>
+                  <a:srgbClr val="FFFFFF"/>
+                </a:solidFill>
+                <a:latin typeface="Calibri"/>
+              </a:rPr>
+              <a:t>5</a:t>
+            </a:r>
+          </a:p>
+        </p:txBody>
+      </p:sp>
+      <p:sp>
+        <p:nvSpPr>
+          <p:cNvPr id="24" name="TextBox 23"/>
+          <p:cNvSpPr txBox="1"/>
+          <p:nvPr/>
+        </p:nvSpPr>
+        <p:spPr>
+          <a:xfrm>
+            <a:off x="1188720" y="5495544"/>
+            <a:ext cx="10271455" cy="786384"/>
+          </a:xfrm>
+          <a:prstGeom prst="rect">
+            <a:avLst/>
+          </a:prstGeom>
+          <a:noFill/>
+        </p:spPr>
+        <p:txBody>
+          <a:bodyPr wrap="square" anchor="ctr"/>
+          <a:lstStyle/>
+          <a:p>
+            <a:r>
+              <a:rPr sz="1500" b="1" i="0">
+                <a:solidFill>
+                  <a:srgbClr val="095292"/>
+                </a:solidFill>
+                <a:latin typeface="Calibri"/>
+              </a:rPr>
+              <a:t>Redactar Plan_Backup_VetCare con sus 6 secciones (plantilla en este documento): que se respalda y con que, frecuencia, retencion, RPO/RTO, restore de prueba con quien firma, y que NO cubre el plan.</a:t>
+            </a:r>
+          </a:p>
+        </p:txBody>
+      </p:sp>
+      <p:sp>
+        <p:nvSpPr>
+          <p:cNvPr id="25" name="TextBox 24"/>
           <p:cNvSpPr txBox="1"/>
           <p:nvPr/>
         </p:nvSpPr>
@@ -6110,6 +6682,2566 @@
         <p:spPr>
           <a:xfrm>
             <a:off x="0" y="0"/>
+            <a:ext cx="12191695" cy="960120"/>
+          </a:xfrm>
+          <a:prstGeom prst="rect">
+            <a:avLst/>
+          </a:prstGeom>
+          <a:solidFill>
+            <a:srgbClr val="095292"/>
+          </a:solidFill>
+          <a:ln>
+            <a:noFill/>
+          </a:ln>
+        </p:spPr>
+        <p:style>
+          <a:lnRef idx="1">
+            <a:schemeClr val="accent1"/>
+          </a:lnRef>
+          <a:fillRef idx="3">
+            <a:schemeClr val="accent1"/>
+          </a:fillRef>
+          <a:effectRef idx="2">
+            <a:schemeClr val="accent1"/>
+          </a:effectRef>
+          <a:fontRef idx="minor">
+            <a:schemeClr val="lt1"/>
+          </a:fontRef>
+        </p:style>
+        <p:txBody>
+          <a:bodyPr rtlCol="0" anchor="ctr"/>
+          <a:lstStyle/>
+          <a:p>
+            <a:pPr algn="ctr"/>
+          </a:p>
+        </p:txBody>
+      </p:sp>
+      <p:sp>
+        <p:nvSpPr>
+          <p:cNvPr id="3" name="Rectangle 2"/>
+          <p:cNvSpPr/>
+          <p:nvPr/>
+        </p:nvSpPr>
+        <p:spPr>
+          <a:xfrm>
+            <a:off x="0" y="960120"/>
+            <a:ext cx="12191695" cy="41148"/>
+          </a:xfrm>
+          <a:prstGeom prst="rect">
+            <a:avLst/>
+          </a:prstGeom>
+          <a:solidFill>
+            <a:srgbClr val="FFD000"/>
+          </a:solidFill>
+          <a:ln>
+            <a:noFill/>
+          </a:ln>
+        </p:spPr>
+        <p:style>
+          <a:lnRef idx="1">
+            <a:schemeClr val="accent1"/>
+          </a:lnRef>
+          <a:fillRef idx="3">
+            <a:schemeClr val="accent1"/>
+          </a:fillRef>
+          <a:effectRef idx="2">
+            <a:schemeClr val="accent1"/>
+          </a:effectRef>
+          <a:fontRef idx="minor">
+            <a:schemeClr val="lt1"/>
+          </a:fontRef>
+        </p:style>
+        <p:txBody>
+          <a:bodyPr rtlCol="0" anchor="ctr"/>
+          <a:lstStyle/>
+          <a:p>
+            <a:pPr algn="ctr"/>
+          </a:p>
+        </p:txBody>
+      </p:sp>
+      <p:sp>
+        <p:nvSpPr>
+          <p:cNvPr id="4" name="TextBox 3"/>
+          <p:cNvSpPr txBox="1"/>
+          <p:nvPr/>
+        </p:nvSpPr>
+        <p:spPr>
+          <a:xfrm>
+            <a:off x="457200" y="164592"/>
+            <a:ext cx="11277295" cy="502920"/>
+          </a:xfrm>
+          <a:prstGeom prst="rect">
+            <a:avLst/>
+          </a:prstGeom>
+          <a:noFill/>
+        </p:spPr>
+        <p:txBody>
+          <a:bodyPr wrap="square">
+            <a:spAutoFit/>
+          </a:bodyPr>
+          <a:lstStyle/>
+          <a:p>
+            <a:r>
+              <a:rPr sz="2600" b="1" i="0">
+                <a:solidFill>
+                  <a:srgbClr val="FFFFFF"/>
+                </a:solidFill>
+                <a:latin typeface="Calibri"/>
+              </a:rPr>
+              <a:t>Taller PI VetCare — pistas (checklist vacio)</a:t>
+            </a:r>
+          </a:p>
+        </p:txBody>
+      </p:sp>
+      <p:sp>
+        <p:nvSpPr>
+          <p:cNvPr id="5" name="Rounded Rectangle 4"/>
+          <p:cNvSpPr/>
+          <p:nvPr/>
+        </p:nvSpPr>
+        <p:spPr>
+          <a:xfrm>
+            <a:off x="457200" y="1261872"/>
+            <a:ext cx="11277295" cy="566928"/>
+          </a:xfrm>
+          <a:prstGeom prst="roundRect">
+            <a:avLst>
+              <a:gd name="adj" fmla="val 12000"/>
+            </a:avLst>
+          </a:prstGeom>
+          <a:solidFill>
+            <a:srgbClr val="F2F2F2"/>
+          </a:solidFill>
+          <a:ln>
+            <a:noFill/>
+          </a:ln>
+        </p:spPr>
+        <p:style>
+          <a:lnRef idx="1">
+            <a:schemeClr val="accent1"/>
+          </a:lnRef>
+          <a:fillRef idx="3">
+            <a:schemeClr val="accent1"/>
+          </a:fillRef>
+          <a:effectRef idx="2">
+            <a:schemeClr val="accent1"/>
+          </a:effectRef>
+          <a:fontRef idx="minor">
+            <a:schemeClr val="lt1"/>
+          </a:fontRef>
+        </p:style>
+        <p:txBody>
+          <a:bodyPr rtlCol="0" anchor="ctr"/>
+          <a:lstStyle/>
+          <a:p>
+            <a:pPr algn="ctr"/>
+          </a:p>
+        </p:txBody>
+      </p:sp>
+      <p:sp>
+        <p:nvSpPr>
+          <p:cNvPr id="6" name="Rectangle 5"/>
+          <p:cNvSpPr/>
+          <p:nvPr/>
+        </p:nvSpPr>
+        <p:spPr>
+          <a:xfrm>
+            <a:off x="640080" y="1408175"/>
+            <a:ext cx="274320" cy="274320"/>
+          </a:xfrm>
+          <a:prstGeom prst="rect">
+            <a:avLst/>
+          </a:prstGeom>
+          <a:solidFill>
+            <a:srgbClr val="FFFFFF"/>
+          </a:solidFill>
+          <a:ln>
+            <a:solidFill>
+              <a:srgbClr val="333333"/>
+            </a:solidFill>
+          </a:ln>
+        </p:spPr>
+        <p:style>
+          <a:lnRef idx="1">
+            <a:schemeClr val="accent1"/>
+          </a:lnRef>
+          <a:fillRef idx="3">
+            <a:schemeClr val="accent1"/>
+          </a:fillRef>
+          <a:effectRef idx="2">
+            <a:schemeClr val="accent1"/>
+          </a:effectRef>
+          <a:fontRef idx="minor">
+            <a:schemeClr val="lt1"/>
+          </a:fontRef>
+        </p:style>
+        <p:txBody>
+          <a:bodyPr rtlCol="0" anchor="ctr"/>
+          <a:lstStyle/>
+          <a:p>
+            <a:pPr algn="ctr"/>
+          </a:p>
+        </p:txBody>
+      </p:sp>
+      <p:sp>
+        <p:nvSpPr>
+          <p:cNvPr id="7" name="Rectangle 6"/>
+          <p:cNvSpPr/>
+          <p:nvPr/>
+        </p:nvSpPr>
+        <p:spPr>
+          <a:xfrm>
+            <a:off x="640080" y="1408175"/>
+            <a:ext cx="73152" cy="274320"/>
+          </a:xfrm>
+          <a:prstGeom prst="rect">
+            <a:avLst/>
+          </a:prstGeom>
+          <a:solidFill>
+            <a:srgbClr val="269CCB"/>
+          </a:solidFill>
+          <a:ln>
+            <a:noFill/>
+          </a:ln>
+        </p:spPr>
+        <p:style>
+          <a:lnRef idx="1">
+            <a:schemeClr val="accent1"/>
+          </a:lnRef>
+          <a:fillRef idx="3">
+            <a:schemeClr val="accent1"/>
+          </a:fillRef>
+          <a:effectRef idx="2">
+            <a:schemeClr val="accent1"/>
+          </a:effectRef>
+          <a:fontRef idx="minor">
+            <a:schemeClr val="lt1"/>
+          </a:fontRef>
+        </p:style>
+        <p:txBody>
+          <a:bodyPr rtlCol="0" anchor="ctr"/>
+          <a:lstStyle/>
+          <a:p>
+            <a:pPr algn="ctr"/>
+          </a:p>
+        </p:txBody>
+      </p:sp>
+      <p:sp>
+        <p:nvSpPr>
+          <p:cNvPr id="8" name="TextBox 7"/>
+          <p:cNvSpPr txBox="1"/>
+          <p:nvPr/>
+        </p:nvSpPr>
+        <p:spPr>
+          <a:xfrm>
+            <a:off x="1097280" y="1353312"/>
+            <a:ext cx="10362895" cy="402336"/>
+          </a:xfrm>
+          <a:prstGeom prst="rect">
+            <a:avLst/>
+          </a:prstGeom>
+          <a:noFill/>
+        </p:spPr>
+        <p:txBody>
+          <a:bodyPr wrap="square" anchor="ctr"/>
+          <a:lstStyle/>
+          <a:p>
+            <a:r>
+              <a:rPr sz="1500" b="0" i="0">
+                <a:solidFill>
+                  <a:srgbClr val="333333"/>
+                </a:solidFill>
+                <a:latin typeface="Calibri"/>
+              </a:rPr>
+              <a:t>□ ¿La función es «IMMUTABLE» y un canino en urgencia da </a:t>
+            </a:r>
+            <a:r>
+              <a:rPr sz="1500" b="1" i="0">
+                <a:solidFill>
+                  <a:srgbClr val="333333"/>
+                </a:solidFill>
+                <a:latin typeface="Calibri"/>
+              </a:rPr>
+              <a:t>60750</a:t>
+            </a:r>
+            <a:r>
+              <a:rPr sz="1500" b="0" i="0">
+                <a:solidFill>
+                  <a:srgbClr val="333333"/>
+                </a:solidFill>
+                <a:latin typeface="Calibri"/>
+              </a:rPr>
+              <a:t>?</a:t>
+            </a:r>
+          </a:p>
+        </p:txBody>
+      </p:sp>
+      <p:sp>
+        <p:nvSpPr>
+          <p:cNvPr id="9" name="Rounded Rectangle 8"/>
+          <p:cNvSpPr/>
+          <p:nvPr/>
+        </p:nvSpPr>
+        <p:spPr>
+          <a:xfrm>
+            <a:off x="457200" y="1938528"/>
+            <a:ext cx="11277295" cy="566928"/>
+          </a:xfrm>
+          <a:prstGeom prst="roundRect">
+            <a:avLst>
+              <a:gd name="adj" fmla="val 12000"/>
+            </a:avLst>
+          </a:prstGeom>
+          <a:solidFill>
+            <a:srgbClr val="F2F2F2"/>
+          </a:solidFill>
+          <a:ln>
+            <a:noFill/>
+          </a:ln>
+        </p:spPr>
+        <p:style>
+          <a:lnRef idx="1">
+            <a:schemeClr val="accent1"/>
+          </a:lnRef>
+          <a:fillRef idx="3">
+            <a:schemeClr val="accent1"/>
+          </a:fillRef>
+          <a:effectRef idx="2">
+            <a:schemeClr val="accent1"/>
+          </a:effectRef>
+          <a:fontRef idx="minor">
+            <a:schemeClr val="lt1"/>
+          </a:fontRef>
+        </p:style>
+        <p:txBody>
+          <a:bodyPr rtlCol="0" anchor="ctr"/>
+          <a:lstStyle/>
+          <a:p>
+            <a:pPr algn="ctr"/>
+          </a:p>
+        </p:txBody>
+      </p:sp>
+      <p:sp>
+        <p:nvSpPr>
+          <p:cNvPr id="10" name="Rectangle 9"/>
+          <p:cNvSpPr/>
+          <p:nvPr/>
+        </p:nvSpPr>
+        <p:spPr>
+          <a:xfrm>
+            <a:off x="640080" y="2084832"/>
+            <a:ext cx="274320" cy="274320"/>
+          </a:xfrm>
+          <a:prstGeom prst="rect">
+            <a:avLst/>
+          </a:prstGeom>
+          <a:solidFill>
+            <a:srgbClr val="FFFFFF"/>
+          </a:solidFill>
+          <a:ln>
+            <a:solidFill>
+              <a:srgbClr val="333333"/>
+            </a:solidFill>
+          </a:ln>
+        </p:spPr>
+        <p:style>
+          <a:lnRef idx="1">
+            <a:schemeClr val="accent1"/>
+          </a:lnRef>
+          <a:fillRef idx="3">
+            <a:schemeClr val="accent1"/>
+          </a:fillRef>
+          <a:effectRef idx="2">
+            <a:schemeClr val="accent1"/>
+          </a:effectRef>
+          <a:fontRef idx="minor">
+            <a:schemeClr val="lt1"/>
+          </a:fontRef>
+        </p:style>
+        <p:txBody>
+          <a:bodyPr rtlCol="0" anchor="ctr"/>
+          <a:lstStyle/>
+          <a:p>
+            <a:pPr algn="ctr"/>
+          </a:p>
+        </p:txBody>
+      </p:sp>
+      <p:sp>
+        <p:nvSpPr>
+          <p:cNvPr id="11" name="Rectangle 10"/>
+          <p:cNvSpPr/>
+          <p:nvPr/>
+        </p:nvSpPr>
+        <p:spPr>
+          <a:xfrm>
+            <a:off x="640080" y="2084832"/>
+            <a:ext cx="73152" cy="274320"/>
+          </a:xfrm>
+          <a:prstGeom prst="rect">
+            <a:avLst/>
+          </a:prstGeom>
+          <a:solidFill>
+            <a:srgbClr val="269CCB"/>
+          </a:solidFill>
+          <a:ln>
+            <a:noFill/>
+          </a:ln>
+        </p:spPr>
+        <p:style>
+          <a:lnRef idx="1">
+            <a:schemeClr val="accent1"/>
+          </a:lnRef>
+          <a:fillRef idx="3">
+            <a:schemeClr val="accent1"/>
+          </a:fillRef>
+          <a:effectRef idx="2">
+            <a:schemeClr val="accent1"/>
+          </a:effectRef>
+          <a:fontRef idx="minor">
+            <a:schemeClr val="lt1"/>
+          </a:fontRef>
+        </p:style>
+        <p:txBody>
+          <a:bodyPr rtlCol="0" anchor="ctr"/>
+          <a:lstStyle/>
+          <a:p>
+            <a:pPr algn="ctr"/>
+          </a:p>
+        </p:txBody>
+      </p:sp>
+      <p:sp>
+        <p:nvSpPr>
+          <p:cNvPr id="12" name="TextBox 11"/>
+          <p:cNvSpPr txBox="1"/>
+          <p:nvPr/>
+        </p:nvSpPr>
+        <p:spPr>
+          <a:xfrm>
+            <a:off x="1097280" y="2029968"/>
+            <a:ext cx="10362895" cy="402336"/>
+          </a:xfrm>
+          <a:prstGeom prst="rect">
+            <a:avLst/>
+          </a:prstGeom>
+          <a:noFill/>
+        </p:spPr>
+        <p:txBody>
+          <a:bodyPr wrap="square" anchor="ctr"/>
+          <a:lstStyle/>
+          <a:p>
+            <a:r>
+              <a:rPr sz="1500" b="0" i="0">
+                <a:solidFill>
+                  <a:srgbClr val="333333"/>
+                </a:solidFill>
+                <a:latin typeface="Calibri"/>
+              </a:rPr>
+              <a:t>□ ¿Creaste los </a:t>
+            </a:r>
+            <a:r>
+              <a:rPr sz="1500" b="1" i="0">
+                <a:solidFill>
+                  <a:srgbClr val="333333"/>
+                </a:solidFill>
+                <a:latin typeface="Calibri"/>
+              </a:rPr>
+              <a:t>dos</a:t>
+            </a:r>
+            <a:r>
+              <a:rPr sz="1500" b="0" i="0">
+                <a:solidFill>
+                  <a:srgbClr val="333333"/>
+                </a:solidFill>
+                <a:latin typeface="Calibri"/>
+              </a:rPr>
+              <a:t> objetos del trigger? Una función sola no dispara nada.</a:t>
+            </a:r>
+          </a:p>
+        </p:txBody>
+      </p:sp>
+      <p:sp>
+        <p:nvSpPr>
+          <p:cNvPr id="13" name="Rounded Rectangle 12"/>
+          <p:cNvSpPr/>
+          <p:nvPr/>
+        </p:nvSpPr>
+        <p:spPr>
+          <a:xfrm>
+            <a:off x="457200" y="2615184"/>
+            <a:ext cx="11277295" cy="566928"/>
+          </a:xfrm>
+          <a:prstGeom prst="roundRect">
+            <a:avLst>
+              <a:gd name="adj" fmla="val 12000"/>
+            </a:avLst>
+          </a:prstGeom>
+          <a:solidFill>
+            <a:srgbClr val="F2F2F2"/>
+          </a:solidFill>
+          <a:ln>
+            <a:noFill/>
+          </a:ln>
+        </p:spPr>
+        <p:style>
+          <a:lnRef idx="1">
+            <a:schemeClr val="accent1"/>
+          </a:lnRef>
+          <a:fillRef idx="3">
+            <a:schemeClr val="accent1"/>
+          </a:fillRef>
+          <a:effectRef idx="2">
+            <a:schemeClr val="accent1"/>
+          </a:effectRef>
+          <a:fontRef idx="minor">
+            <a:schemeClr val="lt1"/>
+          </a:fontRef>
+        </p:style>
+        <p:txBody>
+          <a:bodyPr rtlCol="0" anchor="ctr"/>
+          <a:lstStyle/>
+          <a:p>
+            <a:pPr algn="ctr"/>
+          </a:p>
+        </p:txBody>
+      </p:sp>
+      <p:sp>
+        <p:nvSpPr>
+          <p:cNvPr id="14" name="Rectangle 13"/>
+          <p:cNvSpPr/>
+          <p:nvPr/>
+        </p:nvSpPr>
+        <p:spPr>
+          <a:xfrm>
+            <a:off x="640080" y="2761488"/>
+            <a:ext cx="274320" cy="274320"/>
+          </a:xfrm>
+          <a:prstGeom prst="rect">
+            <a:avLst/>
+          </a:prstGeom>
+          <a:solidFill>
+            <a:srgbClr val="FFFFFF"/>
+          </a:solidFill>
+          <a:ln>
+            <a:solidFill>
+              <a:srgbClr val="333333"/>
+            </a:solidFill>
+          </a:ln>
+        </p:spPr>
+        <p:style>
+          <a:lnRef idx="1">
+            <a:schemeClr val="accent1"/>
+          </a:lnRef>
+          <a:fillRef idx="3">
+            <a:schemeClr val="accent1"/>
+          </a:fillRef>
+          <a:effectRef idx="2">
+            <a:schemeClr val="accent1"/>
+          </a:effectRef>
+          <a:fontRef idx="minor">
+            <a:schemeClr val="lt1"/>
+          </a:fontRef>
+        </p:style>
+        <p:txBody>
+          <a:bodyPr rtlCol="0" anchor="ctr"/>
+          <a:lstStyle/>
+          <a:p>
+            <a:pPr algn="ctr"/>
+          </a:p>
+        </p:txBody>
+      </p:sp>
+      <p:sp>
+        <p:nvSpPr>
+          <p:cNvPr id="15" name="Rectangle 14"/>
+          <p:cNvSpPr/>
+          <p:nvPr/>
+        </p:nvSpPr>
+        <p:spPr>
+          <a:xfrm>
+            <a:off x="640080" y="2761488"/>
+            <a:ext cx="73152" cy="274320"/>
+          </a:xfrm>
+          <a:prstGeom prst="rect">
+            <a:avLst/>
+          </a:prstGeom>
+          <a:solidFill>
+            <a:srgbClr val="269CCB"/>
+          </a:solidFill>
+          <a:ln>
+            <a:noFill/>
+          </a:ln>
+        </p:spPr>
+        <p:style>
+          <a:lnRef idx="1">
+            <a:schemeClr val="accent1"/>
+          </a:lnRef>
+          <a:fillRef idx="3">
+            <a:schemeClr val="accent1"/>
+          </a:fillRef>
+          <a:effectRef idx="2">
+            <a:schemeClr val="accent1"/>
+          </a:effectRef>
+          <a:fontRef idx="minor">
+            <a:schemeClr val="lt1"/>
+          </a:fontRef>
+        </p:style>
+        <p:txBody>
+          <a:bodyPr rtlCol="0" anchor="ctr"/>
+          <a:lstStyle/>
+          <a:p>
+            <a:pPr algn="ctr"/>
+          </a:p>
+        </p:txBody>
+      </p:sp>
+      <p:sp>
+        <p:nvSpPr>
+          <p:cNvPr id="16" name="TextBox 15"/>
+          <p:cNvSpPr txBox="1"/>
+          <p:nvPr/>
+        </p:nvSpPr>
+        <p:spPr>
+          <a:xfrm>
+            <a:off x="1097280" y="2706624"/>
+            <a:ext cx="10362895" cy="402336"/>
+          </a:xfrm>
+          <a:prstGeom prst="rect">
+            <a:avLst/>
+          </a:prstGeom>
+          <a:noFill/>
+        </p:spPr>
+        <p:txBody>
+          <a:bodyPr wrap="square" anchor="ctr"/>
+          <a:lstStyle/>
+          <a:p>
+            <a:r>
+              <a:rPr sz="1500" b="0" i="0">
+                <a:solidFill>
+                  <a:srgbClr val="333333"/>
+                </a:solidFill>
+                <a:latin typeface="Calibri"/>
+              </a:rPr>
+              <a:t>□ ¿Está el «WHEN (OLD.estado IS DISTINCT FROM NEW.estado)», y «audit_cita» quedó con </a:t>
+            </a:r>
+            <a:r>
+              <a:rPr sz="1500" b="1" i="0">
+                <a:solidFill>
+                  <a:srgbClr val="333333"/>
+                </a:solidFill>
+                <a:latin typeface="Calibri"/>
+              </a:rPr>
+              <a:t>2</a:t>
+            </a:r>
+            <a:r>
+              <a:rPr sz="1500" b="0" i="0">
+                <a:solidFill>
+                  <a:srgbClr val="333333"/>
+                </a:solidFill>
+                <a:latin typeface="Calibri"/>
+              </a:rPr>
+              <a:t> filas?</a:t>
+            </a:r>
+          </a:p>
+        </p:txBody>
+      </p:sp>
+      <p:sp>
+        <p:nvSpPr>
+          <p:cNvPr id="17" name="Rounded Rectangle 16"/>
+          <p:cNvSpPr/>
+          <p:nvPr/>
+        </p:nvSpPr>
+        <p:spPr>
+          <a:xfrm>
+            <a:off x="457200" y="3291840"/>
+            <a:ext cx="11277295" cy="566928"/>
+          </a:xfrm>
+          <a:prstGeom prst="roundRect">
+            <a:avLst>
+              <a:gd name="adj" fmla="val 12000"/>
+            </a:avLst>
+          </a:prstGeom>
+          <a:solidFill>
+            <a:srgbClr val="F2F2F2"/>
+          </a:solidFill>
+          <a:ln>
+            <a:noFill/>
+          </a:ln>
+        </p:spPr>
+        <p:style>
+          <a:lnRef idx="1">
+            <a:schemeClr val="accent1"/>
+          </a:lnRef>
+          <a:fillRef idx="3">
+            <a:schemeClr val="accent1"/>
+          </a:fillRef>
+          <a:effectRef idx="2">
+            <a:schemeClr val="accent1"/>
+          </a:effectRef>
+          <a:fontRef idx="minor">
+            <a:schemeClr val="lt1"/>
+          </a:fontRef>
+        </p:style>
+        <p:txBody>
+          <a:bodyPr rtlCol="0" anchor="ctr"/>
+          <a:lstStyle/>
+          <a:p>
+            <a:pPr algn="ctr"/>
+          </a:p>
+        </p:txBody>
+      </p:sp>
+      <p:sp>
+        <p:nvSpPr>
+          <p:cNvPr id="18" name="Rectangle 17"/>
+          <p:cNvSpPr/>
+          <p:nvPr/>
+        </p:nvSpPr>
+        <p:spPr>
+          <a:xfrm>
+            <a:off x="640080" y="3438144"/>
+            <a:ext cx="274320" cy="274320"/>
+          </a:xfrm>
+          <a:prstGeom prst="rect">
+            <a:avLst/>
+          </a:prstGeom>
+          <a:solidFill>
+            <a:srgbClr val="FFFFFF"/>
+          </a:solidFill>
+          <a:ln>
+            <a:solidFill>
+              <a:srgbClr val="333333"/>
+            </a:solidFill>
+          </a:ln>
+        </p:spPr>
+        <p:style>
+          <a:lnRef idx="1">
+            <a:schemeClr val="accent1"/>
+          </a:lnRef>
+          <a:fillRef idx="3">
+            <a:schemeClr val="accent1"/>
+          </a:fillRef>
+          <a:effectRef idx="2">
+            <a:schemeClr val="accent1"/>
+          </a:effectRef>
+          <a:fontRef idx="minor">
+            <a:schemeClr val="lt1"/>
+          </a:fontRef>
+        </p:style>
+        <p:txBody>
+          <a:bodyPr rtlCol="0" anchor="ctr"/>
+          <a:lstStyle/>
+          <a:p>
+            <a:pPr algn="ctr"/>
+          </a:p>
+        </p:txBody>
+      </p:sp>
+      <p:sp>
+        <p:nvSpPr>
+          <p:cNvPr id="19" name="Rectangle 18"/>
+          <p:cNvSpPr/>
+          <p:nvPr/>
+        </p:nvSpPr>
+        <p:spPr>
+          <a:xfrm>
+            <a:off x="640080" y="3438144"/>
+            <a:ext cx="73152" cy="274320"/>
+          </a:xfrm>
+          <a:prstGeom prst="rect">
+            <a:avLst/>
+          </a:prstGeom>
+          <a:solidFill>
+            <a:srgbClr val="269CCB"/>
+          </a:solidFill>
+          <a:ln>
+            <a:noFill/>
+          </a:ln>
+        </p:spPr>
+        <p:style>
+          <a:lnRef idx="1">
+            <a:schemeClr val="accent1"/>
+          </a:lnRef>
+          <a:fillRef idx="3">
+            <a:schemeClr val="accent1"/>
+          </a:fillRef>
+          <a:effectRef idx="2">
+            <a:schemeClr val="accent1"/>
+          </a:effectRef>
+          <a:fontRef idx="minor">
+            <a:schemeClr val="lt1"/>
+          </a:fontRef>
+        </p:style>
+        <p:txBody>
+          <a:bodyPr rtlCol="0" anchor="ctr"/>
+          <a:lstStyle/>
+          <a:p>
+            <a:pPr algn="ctr"/>
+          </a:p>
+        </p:txBody>
+      </p:sp>
+      <p:sp>
+        <p:nvSpPr>
+          <p:cNvPr id="20" name="TextBox 19"/>
+          <p:cNvSpPr txBox="1"/>
+          <p:nvPr/>
+        </p:nvSpPr>
+        <p:spPr>
+          <a:xfrm>
+            <a:off x="1097280" y="3383280"/>
+            <a:ext cx="10362895" cy="402336"/>
+          </a:xfrm>
+          <a:prstGeom prst="rect">
+            <a:avLst/>
+          </a:prstGeom>
+          <a:noFill/>
+        </p:spPr>
+        <p:txBody>
+          <a:bodyPr wrap="square" anchor="ctr"/>
+          <a:lstStyle/>
+          <a:p>
+            <a:r>
+              <a:rPr sz="1500" b="0" i="0">
+                <a:solidFill>
+                  <a:srgbClr val="333333"/>
+                </a:solidFill>
+                <a:latin typeface="Calibri"/>
+              </a:rPr>
+              <a:t>□ ¿«usuario_bd» y «fecha_evento» se llenan por «DEFAULT», no desde el trigger?</a:t>
+            </a:r>
+          </a:p>
+        </p:txBody>
+      </p:sp>
+      <p:sp>
+        <p:nvSpPr>
+          <p:cNvPr id="21" name="Rounded Rectangle 20"/>
+          <p:cNvSpPr/>
+          <p:nvPr/>
+        </p:nvSpPr>
+        <p:spPr>
+          <a:xfrm>
+            <a:off x="457200" y="3968496"/>
+            <a:ext cx="11277295" cy="566928"/>
+          </a:xfrm>
+          <a:prstGeom prst="roundRect">
+            <a:avLst>
+              <a:gd name="adj" fmla="val 12000"/>
+            </a:avLst>
+          </a:prstGeom>
+          <a:solidFill>
+            <a:srgbClr val="F2F2F2"/>
+          </a:solidFill>
+          <a:ln>
+            <a:noFill/>
+          </a:ln>
+        </p:spPr>
+        <p:style>
+          <a:lnRef idx="1">
+            <a:schemeClr val="accent1"/>
+          </a:lnRef>
+          <a:fillRef idx="3">
+            <a:schemeClr val="accent1"/>
+          </a:fillRef>
+          <a:effectRef idx="2">
+            <a:schemeClr val="accent1"/>
+          </a:effectRef>
+          <a:fontRef idx="minor">
+            <a:schemeClr val="lt1"/>
+          </a:fontRef>
+        </p:style>
+        <p:txBody>
+          <a:bodyPr rtlCol="0" anchor="ctr"/>
+          <a:lstStyle/>
+          <a:p>
+            <a:pPr algn="ctr"/>
+          </a:p>
+        </p:txBody>
+      </p:sp>
+      <p:sp>
+        <p:nvSpPr>
+          <p:cNvPr id="22" name="Rectangle 21"/>
+          <p:cNvSpPr/>
+          <p:nvPr/>
+        </p:nvSpPr>
+        <p:spPr>
+          <a:xfrm>
+            <a:off x="640080" y="4114800"/>
+            <a:ext cx="274320" cy="274320"/>
+          </a:xfrm>
+          <a:prstGeom prst="rect">
+            <a:avLst/>
+          </a:prstGeom>
+          <a:solidFill>
+            <a:srgbClr val="FFFFFF"/>
+          </a:solidFill>
+          <a:ln>
+            <a:solidFill>
+              <a:srgbClr val="333333"/>
+            </a:solidFill>
+          </a:ln>
+        </p:spPr>
+        <p:style>
+          <a:lnRef idx="1">
+            <a:schemeClr val="accent1"/>
+          </a:lnRef>
+          <a:fillRef idx="3">
+            <a:schemeClr val="accent1"/>
+          </a:fillRef>
+          <a:effectRef idx="2">
+            <a:schemeClr val="accent1"/>
+          </a:effectRef>
+          <a:fontRef idx="minor">
+            <a:schemeClr val="lt1"/>
+          </a:fontRef>
+        </p:style>
+        <p:txBody>
+          <a:bodyPr rtlCol="0" anchor="ctr"/>
+          <a:lstStyle/>
+          <a:p>
+            <a:pPr algn="ctr"/>
+          </a:p>
+        </p:txBody>
+      </p:sp>
+      <p:sp>
+        <p:nvSpPr>
+          <p:cNvPr id="23" name="Rectangle 22"/>
+          <p:cNvSpPr/>
+          <p:nvPr/>
+        </p:nvSpPr>
+        <p:spPr>
+          <a:xfrm>
+            <a:off x="640080" y="4114800"/>
+            <a:ext cx="73152" cy="274320"/>
+          </a:xfrm>
+          <a:prstGeom prst="rect">
+            <a:avLst/>
+          </a:prstGeom>
+          <a:solidFill>
+            <a:srgbClr val="269CCB"/>
+          </a:solidFill>
+          <a:ln>
+            <a:noFill/>
+          </a:ln>
+        </p:spPr>
+        <p:style>
+          <a:lnRef idx="1">
+            <a:schemeClr val="accent1"/>
+          </a:lnRef>
+          <a:fillRef idx="3">
+            <a:schemeClr val="accent1"/>
+          </a:fillRef>
+          <a:effectRef idx="2">
+            <a:schemeClr val="accent1"/>
+          </a:effectRef>
+          <a:fontRef idx="minor">
+            <a:schemeClr val="lt1"/>
+          </a:fontRef>
+        </p:style>
+        <p:txBody>
+          <a:bodyPr rtlCol="0" anchor="ctr"/>
+          <a:lstStyle/>
+          <a:p>
+            <a:pPr algn="ctr"/>
+          </a:p>
+        </p:txBody>
+      </p:sp>
+      <p:sp>
+        <p:nvSpPr>
+          <p:cNvPr id="24" name="TextBox 23"/>
+          <p:cNvSpPr txBox="1"/>
+          <p:nvPr/>
+        </p:nvSpPr>
+        <p:spPr>
+          <a:xfrm>
+            <a:off x="1097280" y="4059936"/>
+            <a:ext cx="10362895" cy="402336"/>
+          </a:xfrm>
+          <a:prstGeom prst="rect">
+            <a:avLst/>
+          </a:prstGeom>
+          <a:noFill/>
+        </p:spPr>
+        <p:txBody>
+          <a:bodyPr wrap="square" anchor="ctr"/>
+          <a:lstStyle/>
+          <a:p>
+            <a:r>
+              <a:rPr sz="1500" b="0" i="0">
+                <a:solidFill>
+                  <a:srgbClr val="333333"/>
+                </a:solidFill>
+                <a:latin typeface="Calibri"/>
+              </a:rPr>
+              <a:t>□ ¿Se ve el </a:t>
+            </a:r>
+            <a:r>
+              <a:rPr sz="1500" b="1" i="0">
+                <a:solidFill>
+                  <a:srgbClr val="333333"/>
+                </a:solidFill>
+                <a:latin typeface="Calibri"/>
+              </a:rPr>
+              <a:t>-7</a:t>
+            </a:r>
+            <a:r>
+              <a:rPr sz="1500" b="0" i="0">
+                <a:solidFill>
+                  <a:srgbClr val="333333"/>
+                </a:solidFill>
+                <a:latin typeface="Calibri"/>
+              </a:rPr>
+              <a:t> antes de crear el trigger, y el stock volvió a 3 para probarlo?</a:t>
+            </a:r>
+          </a:p>
+        </p:txBody>
+      </p:sp>
+      <p:sp>
+        <p:nvSpPr>
+          <p:cNvPr id="25" name="Rounded Rectangle 24"/>
+          <p:cNvSpPr/>
+          <p:nvPr/>
+        </p:nvSpPr>
+        <p:spPr>
+          <a:xfrm>
+            <a:off x="457200" y="4645152"/>
+            <a:ext cx="11277295" cy="566928"/>
+          </a:xfrm>
+          <a:prstGeom prst="roundRect">
+            <a:avLst>
+              <a:gd name="adj" fmla="val 12000"/>
+            </a:avLst>
+          </a:prstGeom>
+          <a:solidFill>
+            <a:srgbClr val="F2F2F2"/>
+          </a:solidFill>
+          <a:ln>
+            <a:noFill/>
+          </a:ln>
+        </p:spPr>
+        <p:style>
+          <a:lnRef idx="1">
+            <a:schemeClr val="accent1"/>
+          </a:lnRef>
+          <a:fillRef idx="3">
+            <a:schemeClr val="accent1"/>
+          </a:fillRef>
+          <a:effectRef idx="2">
+            <a:schemeClr val="accent1"/>
+          </a:effectRef>
+          <a:fontRef idx="minor">
+            <a:schemeClr val="lt1"/>
+          </a:fontRef>
+        </p:style>
+        <p:txBody>
+          <a:bodyPr rtlCol="0" anchor="ctr"/>
+          <a:lstStyle/>
+          <a:p>
+            <a:pPr algn="ctr"/>
+          </a:p>
+        </p:txBody>
+      </p:sp>
+      <p:sp>
+        <p:nvSpPr>
+          <p:cNvPr id="26" name="Rectangle 25"/>
+          <p:cNvSpPr/>
+          <p:nvPr/>
+        </p:nvSpPr>
+        <p:spPr>
+          <a:xfrm>
+            <a:off x="640080" y="4791456"/>
+            <a:ext cx="274320" cy="274320"/>
+          </a:xfrm>
+          <a:prstGeom prst="rect">
+            <a:avLst/>
+          </a:prstGeom>
+          <a:solidFill>
+            <a:srgbClr val="FFFFFF"/>
+          </a:solidFill>
+          <a:ln>
+            <a:solidFill>
+              <a:srgbClr val="333333"/>
+            </a:solidFill>
+          </a:ln>
+        </p:spPr>
+        <p:style>
+          <a:lnRef idx="1">
+            <a:schemeClr val="accent1"/>
+          </a:lnRef>
+          <a:fillRef idx="3">
+            <a:schemeClr val="accent1"/>
+          </a:fillRef>
+          <a:effectRef idx="2">
+            <a:schemeClr val="accent1"/>
+          </a:effectRef>
+          <a:fontRef idx="minor">
+            <a:schemeClr val="lt1"/>
+          </a:fontRef>
+        </p:style>
+        <p:txBody>
+          <a:bodyPr rtlCol="0" anchor="ctr"/>
+          <a:lstStyle/>
+          <a:p>
+            <a:pPr algn="ctr"/>
+          </a:p>
+        </p:txBody>
+      </p:sp>
+      <p:sp>
+        <p:nvSpPr>
+          <p:cNvPr id="27" name="Rectangle 26"/>
+          <p:cNvSpPr/>
+          <p:nvPr/>
+        </p:nvSpPr>
+        <p:spPr>
+          <a:xfrm>
+            <a:off x="640080" y="4791456"/>
+            <a:ext cx="73152" cy="274320"/>
+          </a:xfrm>
+          <a:prstGeom prst="rect">
+            <a:avLst/>
+          </a:prstGeom>
+          <a:solidFill>
+            <a:srgbClr val="269CCB"/>
+          </a:solidFill>
+          <a:ln>
+            <a:noFill/>
+          </a:ln>
+        </p:spPr>
+        <p:style>
+          <a:lnRef idx="1">
+            <a:schemeClr val="accent1"/>
+          </a:lnRef>
+          <a:fillRef idx="3">
+            <a:schemeClr val="accent1"/>
+          </a:fillRef>
+          <a:effectRef idx="2">
+            <a:schemeClr val="accent1"/>
+          </a:effectRef>
+          <a:fontRef idx="minor">
+            <a:schemeClr val="lt1"/>
+          </a:fontRef>
+        </p:style>
+        <p:txBody>
+          <a:bodyPr rtlCol="0" anchor="ctr"/>
+          <a:lstStyle/>
+          <a:p>
+            <a:pPr algn="ctr"/>
+          </a:p>
+        </p:txBody>
+      </p:sp>
+      <p:sp>
+        <p:nvSpPr>
+          <p:cNvPr id="28" name="TextBox 27"/>
+          <p:cNvSpPr txBox="1"/>
+          <p:nvPr/>
+        </p:nvSpPr>
+        <p:spPr>
+          <a:xfrm>
+            <a:off x="1097280" y="4736592"/>
+            <a:ext cx="10362895" cy="402336"/>
+          </a:xfrm>
+          <a:prstGeom prst="rect">
+            <a:avLst/>
+          </a:prstGeom>
+          <a:noFill/>
+        </p:spPr>
+        <p:txBody>
+          <a:bodyPr wrap="square" anchor="ctr"/>
+          <a:lstStyle/>
+          <a:p>
+            <a:r>
+              <a:rPr sz="1500" b="0" i="0">
+                <a:solidFill>
+                  <a:srgbClr val="333333"/>
+                </a:solidFill>
+                <a:latin typeface="Calibri"/>
+              </a:rPr>
+              <a:t>□ ¿El trigger de stock es «BEFORE», y el insumo 2 termina en </a:t>
+            </a:r>
+            <a:r>
+              <a:rPr sz="1500" b="1" i="0">
+                <a:solidFill>
+                  <a:srgbClr val="333333"/>
+                </a:solidFill>
+                <a:latin typeface="Calibri"/>
+              </a:rPr>
+              <a:t>stock 1</a:t>
+            </a:r>
+            <a:r>
+              <a:rPr sz="1500" b="0" i="0">
+                <a:solidFill>
+                  <a:srgbClr val="333333"/>
+                </a:solidFill>
+                <a:latin typeface="Calibri"/>
+              </a:rPr>
+              <a:t>?</a:t>
+            </a:r>
+          </a:p>
+        </p:txBody>
+      </p:sp>
+      <p:sp>
+        <p:nvSpPr>
+          <p:cNvPr id="29" name="Rounded Rectangle 28"/>
+          <p:cNvSpPr/>
+          <p:nvPr/>
+        </p:nvSpPr>
+        <p:spPr>
+          <a:xfrm>
+            <a:off x="457200" y="5321808"/>
+            <a:ext cx="11277295" cy="566928"/>
+          </a:xfrm>
+          <a:prstGeom prst="roundRect">
+            <a:avLst>
+              <a:gd name="adj" fmla="val 12000"/>
+            </a:avLst>
+          </a:prstGeom>
+          <a:solidFill>
+            <a:srgbClr val="F2F2F2"/>
+          </a:solidFill>
+          <a:ln>
+            <a:noFill/>
+          </a:ln>
+        </p:spPr>
+        <p:style>
+          <a:lnRef idx="1">
+            <a:schemeClr val="accent1"/>
+          </a:lnRef>
+          <a:fillRef idx="3">
+            <a:schemeClr val="accent1"/>
+          </a:fillRef>
+          <a:effectRef idx="2">
+            <a:schemeClr val="accent1"/>
+          </a:effectRef>
+          <a:fontRef idx="minor">
+            <a:schemeClr val="lt1"/>
+          </a:fontRef>
+        </p:style>
+        <p:txBody>
+          <a:bodyPr rtlCol="0" anchor="ctr"/>
+          <a:lstStyle/>
+          <a:p>
+            <a:pPr algn="ctr"/>
+          </a:p>
+        </p:txBody>
+      </p:sp>
+      <p:sp>
+        <p:nvSpPr>
+          <p:cNvPr id="30" name="Rectangle 29"/>
+          <p:cNvSpPr/>
+          <p:nvPr/>
+        </p:nvSpPr>
+        <p:spPr>
+          <a:xfrm>
+            <a:off x="640080" y="5468112"/>
+            <a:ext cx="274320" cy="274320"/>
+          </a:xfrm>
+          <a:prstGeom prst="rect">
+            <a:avLst/>
+          </a:prstGeom>
+          <a:solidFill>
+            <a:srgbClr val="FFFFFF"/>
+          </a:solidFill>
+          <a:ln>
+            <a:solidFill>
+              <a:srgbClr val="333333"/>
+            </a:solidFill>
+          </a:ln>
+        </p:spPr>
+        <p:style>
+          <a:lnRef idx="1">
+            <a:schemeClr val="accent1"/>
+          </a:lnRef>
+          <a:fillRef idx="3">
+            <a:schemeClr val="accent1"/>
+          </a:fillRef>
+          <a:effectRef idx="2">
+            <a:schemeClr val="accent1"/>
+          </a:effectRef>
+          <a:fontRef idx="minor">
+            <a:schemeClr val="lt1"/>
+          </a:fontRef>
+        </p:style>
+        <p:txBody>
+          <a:bodyPr rtlCol="0" anchor="ctr"/>
+          <a:lstStyle/>
+          <a:p>
+            <a:pPr algn="ctr"/>
+          </a:p>
+        </p:txBody>
+      </p:sp>
+      <p:sp>
+        <p:nvSpPr>
+          <p:cNvPr id="31" name="Rectangle 30"/>
+          <p:cNvSpPr/>
+          <p:nvPr/>
+        </p:nvSpPr>
+        <p:spPr>
+          <a:xfrm>
+            <a:off x="640080" y="5468112"/>
+            <a:ext cx="73152" cy="274320"/>
+          </a:xfrm>
+          <a:prstGeom prst="rect">
+            <a:avLst/>
+          </a:prstGeom>
+          <a:solidFill>
+            <a:srgbClr val="269CCB"/>
+          </a:solidFill>
+          <a:ln>
+            <a:noFill/>
+          </a:ln>
+        </p:spPr>
+        <p:style>
+          <a:lnRef idx="1">
+            <a:schemeClr val="accent1"/>
+          </a:lnRef>
+          <a:fillRef idx="3">
+            <a:schemeClr val="accent1"/>
+          </a:fillRef>
+          <a:effectRef idx="2">
+            <a:schemeClr val="accent1"/>
+          </a:effectRef>
+          <a:fontRef idx="minor">
+            <a:schemeClr val="lt1"/>
+          </a:fontRef>
+        </p:style>
+        <p:txBody>
+          <a:bodyPr rtlCol="0" anchor="ctr"/>
+          <a:lstStyle/>
+          <a:p>
+            <a:pPr algn="ctr"/>
+          </a:p>
+        </p:txBody>
+      </p:sp>
+      <p:sp>
+        <p:nvSpPr>
+          <p:cNvPr id="32" name="TextBox 31"/>
+          <p:cNvSpPr txBox="1"/>
+          <p:nvPr/>
+        </p:nvSpPr>
+        <p:spPr>
+          <a:xfrm>
+            <a:off x="1097280" y="5413248"/>
+            <a:ext cx="10362895" cy="402336"/>
+          </a:xfrm>
+          <a:prstGeom prst="rect">
+            <a:avLst/>
+          </a:prstGeom>
+          <a:noFill/>
+        </p:spPr>
+        <p:txBody>
+          <a:bodyPr wrap="square" anchor="ctr"/>
+          <a:lstStyle/>
+          <a:p>
+            <a:r>
+              <a:rPr sz="1500" b="0" i="0">
+                <a:solidFill>
+                  <a:srgbClr val="333333"/>
+                </a:solidFill>
+                <a:latin typeface="Calibri"/>
+              </a:rPr>
+              <a:t>□ ¿En la de selección múltiple revisaste </a:t>
+            </a:r>
+            <a:r>
+              <a:rPr sz="1500" b="1" i="0">
+                <a:solidFill>
+                  <a:srgbClr val="333333"/>
+                </a:solidFill>
+                <a:latin typeface="Calibri"/>
+              </a:rPr>
+              <a:t>las seis</a:t>
+            </a:r>
+            <a:r>
+              <a:rPr sz="1500" b="0" i="0">
+                <a:solidFill>
+                  <a:srgbClr val="333333"/>
+                </a:solidFill>
+                <a:latin typeface="Calibri"/>
+              </a:rPr>
+              <a:t> afirmaciones, preguntándote si la regla mira solo su propia fila y quién la garantiza cuando el SQL </a:t>
+            </a:r>
+            <a:r>
+              <a:rPr sz="1500" b="1" i="0">
+                <a:solidFill>
+                  <a:srgbClr val="333333"/>
+                </a:solidFill>
+                <a:latin typeface="Calibri"/>
+              </a:rPr>
+              <a:t>no</a:t>
+            </a:r>
+            <a:r>
+              <a:rPr sz="1500" b="0" i="0">
+                <a:solidFill>
+                  <a:srgbClr val="333333"/>
+                </a:solidFill>
+                <a:latin typeface="Calibri"/>
+              </a:rPr>
+              <a:t> viene de la aplicación?</a:t>
+            </a:r>
+          </a:p>
+        </p:txBody>
+      </p:sp>
+      <p:sp>
+        <p:nvSpPr>
+          <p:cNvPr id="33" name="Rounded Rectangle 32"/>
+          <p:cNvSpPr/>
+          <p:nvPr/>
+        </p:nvSpPr>
+        <p:spPr>
+          <a:xfrm>
+            <a:off x="457200" y="5998464"/>
+            <a:ext cx="11277295" cy="566928"/>
+          </a:xfrm>
+          <a:prstGeom prst="roundRect">
+            <a:avLst>
+              <a:gd name="adj" fmla="val 12000"/>
+            </a:avLst>
+          </a:prstGeom>
+          <a:solidFill>
+            <a:srgbClr val="F2F2F2"/>
+          </a:solidFill>
+          <a:ln>
+            <a:noFill/>
+          </a:ln>
+        </p:spPr>
+        <p:style>
+          <a:lnRef idx="1">
+            <a:schemeClr val="accent1"/>
+          </a:lnRef>
+          <a:fillRef idx="3">
+            <a:schemeClr val="accent1"/>
+          </a:fillRef>
+          <a:effectRef idx="2">
+            <a:schemeClr val="accent1"/>
+          </a:effectRef>
+          <a:fontRef idx="minor">
+            <a:schemeClr val="lt1"/>
+          </a:fontRef>
+        </p:style>
+        <p:txBody>
+          <a:bodyPr rtlCol="0" anchor="ctr"/>
+          <a:lstStyle/>
+          <a:p>
+            <a:pPr algn="ctr"/>
+          </a:p>
+        </p:txBody>
+      </p:sp>
+      <p:sp>
+        <p:nvSpPr>
+          <p:cNvPr id="34" name="Rectangle 33"/>
+          <p:cNvSpPr/>
+          <p:nvPr/>
+        </p:nvSpPr>
+        <p:spPr>
+          <a:xfrm>
+            <a:off x="640080" y="6144768"/>
+            <a:ext cx="274320" cy="274320"/>
+          </a:xfrm>
+          <a:prstGeom prst="rect">
+            <a:avLst/>
+          </a:prstGeom>
+          <a:solidFill>
+            <a:srgbClr val="FFFFFF"/>
+          </a:solidFill>
+          <a:ln>
+            <a:solidFill>
+              <a:srgbClr val="333333"/>
+            </a:solidFill>
+          </a:ln>
+        </p:spPr>
+        <p:style>
+          <a:lnRef idx="1">
+            <a:schemeClr val="accent1"/>
+          </a:lnRef>
+          <a:fillRef idx="3">
+            <a:schemeClr val="accent1"/>
+          </a:fillRef>
+          <a:effectRef idx="2">
+            <a:schemeClr val="accent1"/>
+          </a:effectRef>
+          <a:fontRef idx="minor">
+            <a:schemeClr val="lt1"/>
+          </a:fontRef>
+        </p:style>
+        <p:txBody>
+          <a:bodyPr rtlCol="0" anchor="ctr"/>
+          <a:lstStyle/>
+          <a:p>
+            <a:pPr algn="ctr"/>
+          </a:p>
+        </p:txBody>
+      </p:sp>
+      <p:sp>
+        <p:nvSpPr>
+          <p:cNvPr id="35" name="Rectangle 34"/>
+          <p:cNvSpPr/>
+          <p:nvPr/>
+        </p:nvSpPr>
+        <p:spPr>
+          <a:xfrm>
+            <a:off x="640080" y="6144768"/>
+            <a:ext cx="73152" cy="274320"/>
+          </a:xfrm>
+          <a:prstGeom prst="rect">
+            <a:avLst/>
+          </a:prstGeom>
+          <a:solidFill>
+            <a:srgbClr val="269CCB"/>
+          </a:solidFill>
+          <a:ln>
+            <a:noFill/>
+          </a:ln>
+        </p:spPr>
+        <p:style>
+          <a:lnRef idx="1">
+            <a:schemeClr val="accent1"/>
+          </a:lnRef>
+          <a:fillRef idx="3">
+            <a:schemeClr val="accent1"/>
+          </a:fillRef>
+          <a:effectRef idx="2">
+            <a:schemeClr val="accent1"/>
+          </a:effectRef>
+          <a:fontRef idx="minor">
+            <a:schemeClr val="lt1"/>
+          </a:fontRef>
+        </p:style>
+        <p:txBody>
+          <a:bodyPr rtlCol="0" anchor="ctr"/>
+          <a:lstStyle/>
+          <a:p>
+            <a:pPr algn="ctr"/>
+          </a:p>
+        </p:txBody>
+      </p:sp>
+      <p:sp>
+        <p:nvSpPr>
+          <p:cNvPr id="36" name="TextBox 35"/>
+          <p:cNvSpPr txBox="1"/>
+          <p:nvPr/>
+        </p:nvSpPr>
+        <p:spPr>
+          <a:xfrm>
+            <a:off x="1097280" y="6089904"/>
+            <a:ext cx="10362895" cy="402336"/>
+          </a:xfrm>
+          <a:prstGeom prst="rect">
+            <a:avLst/>
+          </a:prstGeom>
+          <a:noFill/>
+        </p:spPr>
+        <p:txBody>
+          <a:bodyPr wrap="square" anchor="ctr"/>
+          <a:lstStyle/>
+          <a:p>
+            <a:r>
+              <a:rPr sz="1500" b="0" i="0">
+                <a:solidFill>
+                  <a:srgbClr val="333333"/>
+                </a:solidFill>
+                <a:latin typeface="Calibri"/>
+              </a:rPr>
+              <a:t>□ ¿El plan trae RPO y RTO en números, «pg_dumpall» para los roles y la sección 6 de lo que </a:t>
+            </a:r>
+            <a:r>
+              <a:rPr sz="1500" b="1" i="0">
+                <a:solidFill>
+                  <a:srgbClr val="333333"/>
+                </a:solidFill>
+                <a:latin typeface="Calibri"/>
+              </a:rPr>
+              <a:t>no</a:t>
+            </a:r>
+            <a:r>
+              <a:rPr sz="1500" b="0" i="0">
+                <a:solidFill>
+                  <a:srgbClr val="333333"/>
+                </a:solidFill>
+                <a:latin typeface="Calibri"/>
+              </a:rPr>
+              <a:t> cubre?</a:t>
+            </a:r>
+          </a:p>
+        </p:txBody>
+      </p:sp>
+      <p:sp>
+        <p:nvSpPr>
+          <p:cNvPr id="37" name="TextBox 36"/>
+          <p:cNvSpPr txBox="1"/>
+          <p:nvPr/>
+        </p:nvSpPr>
+        <p:spPr>
+          <a:xfrm>
+            <a:off x="11185855" y="6473952"/>
+            <a:ext cx="640080" cy="274320"/>
+          </a:xfrm>
+          <a:prstGeom prst="rect">
+            <a:avLst/>
+          </a:prstGeom>
+          <a:noFill/>
+        </p:spPr>
+        <p:txBody>
+          <a:bodyPr wrap="square">
+            <a:spAutoFit/>
+          </a:bodyPr>
+          <a:lstStyle/>
+          <a:p>
+            <a:pPr algn="r"/>
+            <a:r>
+              <a:rPr sz="1100" b="0" i="0">
+                <a:solidFill>
+                  <a:srgbClr val="666666"/>
+                </a:solidFill>
+                <a:latin typeface="Calibri"/>
+              </a:rPr>
+              <a:t>15</a:t>
+            </a:r>
+          </a:p>
+        </p:txBody>
+      </p:sp>
+    </p:spTree>
+  </p:cSld>
+  <p:clrMapOvr>
+    <a:masterClrMapping/>
+  </p:clrMapOvr>
+</p:sld>
+</file>
+
+<file path=ppt/slides/slide16.xml><?xml version="1.0" encoding="utf-8"?>
+<p:sld xmlns:a="http://schemas.openxmlformats.org/drawingml/2006/main" xmlns:p="http://schemas.openxmlformats.org/presentationml/2006/main" xmlns:r="http://schemas.openxmlformats.org/officeDocument/2006/relationships">
+  <p:cSld>
+    <p:bg>
+      <p:bgPr>
+        <a:solidFill>
+          <a:srgbClr val="FFFFFF"/>
+        </a:solidFill>
+        <a:effectLst/>
+      </p:bgPr>
+    </p:bg>
+    <p:spTree>
+      <p:nvGrpSpPr>
+        <p:cNvPr id="1" name=""/>
+        <p:cNvGrpSpPr/>
+        <p:nvPr/>
+      </p:nvGrpSpPr>
+      <p:grpSpPr/>
+      <p:sp>
+        <p:nvSpPr>
+          <p:cNvPr id="2" name="Rectangle 1"/>
+          <p:cNvSpPr/>
+          <p:nvPr/>
+        </p:nvSpPr>
+        <p:spPr>
+          <a:xfrm>
+            <a:off x="0" y="0"/>
+            <a:ext cx="12191695" cy="960120"/>
+          </a:xfrm>
+          <a:prstGeom prst="rect">
+            <a:avLst/>
+          </a:prstGeom>
+          <a:solidFill>
+            <a:srgbClr val="095292"/>
+          </a:solidFill>
+          <a:ln>
+            <a:noFill/>
+          </a:ln>
+        </p:spPr>
+        <p:style>
+          <a:lnRef idx="1">
+            <a:schemeClr val="accent1"/>
+          </a:lnRef>
+          <a:fillRef idx="3">
+            <a:schemeClr val="accent1"/>
+          </a:fillRef>
+          <a:effectRef idx="2">
+            <a:schemeClr val="accent1"/>
+          </a:effectRef>
+          <a:fontRef idx="minor">
+            <a:schemeClr val="lt1"/>
+          </a:fontRef>
+        </p:style>
+        <p:txBody>
+          <a:bodyPr rtlCol="0" anchor="ctr"/>
+          <a:lstStyle/>
+          <a:p>
+            <a:pPr algn="ctr"/>
+          </a:p>
+        </p:txBody>
+      </p:sp>
+      <p:sp>
+        <p:nvSpPr>
+          <p:cNvPr id="3" name="Rectangle 2"/>
+          <p:cNvSpPr/>
+          <p:nvPr/>
+        </p:nvSpPr>
+        <p:spPr>
+          <a:xfrm>
+            <a:off x="0" y="960120"/>
+            <a:ext cx="12191695" cy="41148"/>
+          </a:xfrm>
+          <a:prstGeom prst="rect">
+            <a:avLst/>
+          </a:prstGeom>
+          <a:solidFill>
+            <a:srgbClr val="FFD000"/>
+          </a:solidFill>
+          <a:ln>
+            <a:noFill/>
+          </a:ln>
+        </p:spPr>
+        <p:style>
+          <a:lnRef idx="1">
+            <a:schemeClr val="accent1"/>
+          </a:lnRef>
+          <a:fillRef idx="3">
+            <a:schemeClr val="accent1"/>
+          </a:fillRef>
+          <a:effectRef idx="2">
+            <a:schemeClr val="accent1"/>
+          </a:effectRef>
+          <a:fontRef idx="minor">
+            <a:schemeClr val="lt1"/>
+          </a:fontRef>
+        </p:style>
+        <p:txBody>
+          <a:bodyPr rtlCol="0" anchor="ctr"/>
+          <a:lstStyle/>
+          <a:p>
+            <a:pPr algn="ctr"/>
+          </a:p>
+        </p:txBody>
+      </p:sp>
+      <p:sp>
+        <p:nvSpPr>
+          <p:cNvPr id="4" name="TextBox 3"/>
+          <p:cNvSpPr txBox="1"/>
+          <p:nvPr/>
+        </p:nvSpPr>
+        <p:spPr>
+          <a:xfrm>
+            <a:off x="457200" y="164592"/>
+            <a:ext cx="11277295" cy="502920"/>
+          </a:xfrm>
+          <a:prstGeom prst="rect">
+            <a:avLst/>
+          </a:prstGeom>
+          <a:noFill/>
+        </p:spPr>
+        <p:txBody>
+          <a:bodyPr wrap="square">
+            <a:spAutoFit/>
+          </a:bodyPr>
+          <a:lstStyle/>
+          <a:p>
+            <a:r>
+              <a:rPr sz="2600" b="1" i="0">
+                <a:solidFill>
+                  <a:srgbClr val="FFFFFF"/>
+                </a:solidFill>
+                <a:latin typeface="Calibri"/>
+              </a:rPr>
+              <a:t>Criterios de exito / entregable</a:t>
+            </a:r>
+          </a:p>
+        </p:txBody>
+      </p:sp>
+      <p:sp>
+        <p:nvSpPr>
+          <p:cNvPr id="5" name="TextBox 4"/>
+          <p:cNvSpPr txBox="1"/>
+          <p:nvPr/>
+        </p:nvSpPr>
+        <p:spPr>
+          <a:xfrm>
+            <a:off x="457200" y="1170432"/>
+            <a:ext cx="11277295" cy="5230368"/>
+          </a:xfrm>
+          <a:prstGeom prst="rect">
+            <a:avLst/>
+          </a:prstGeom>
+          <a:noFill/>
+        </p:spPr>
+        <p:txBody>
+          <a:bodyPr wrap="square">
+            <a:spAutoFit/>
+          </a:bodyPr>
+          <a:lstStyle/>
+          <a:p>
+            <a:pPr>
+              <a:spcAft>
+                <a:spcPts val="800"/>
+              </a:spcAft>
+            </a:pPr>
+            <a:r>
+              <a:rPr sz="1600" b="0" i="0">
+                <a:solidFill>
+                  <a:srgbClr val="333333"/>
+                </a:solidFill>
+                <a:latin typeface="Calibri"/>
+              </a:rPr>
+              <a:t>–   </a:t>
+            </a:r>
+            <a:r>
+              <a:rPr sz="1600" b="1" i="0">
+                <a:solidFill>
+                  <a:srgbClr val="333333"/>
+                </a:solidFill>
+                <a:latin typeface="Calibri"/>
+              </a:rPr>
+              <a:t>Entregable:</a:t>
+            </a:r>
+            <a:r>
+              <a:rPr sz="1600" b="0" i="0">
+                <a:solidFill>
+                  <a:srgbClr val="333333"/>
+                </a:solidFill>
+                <a:latin typeface="Calibri"/>
+              </a:rPr>
+              <a:t> fn_precio_consulta + 2 triggers corriendo en ExamLab + Plan_Backup_VetCare con sus 6 secciones (1 pag.)</a:t>
+            </a:r>
+          </a:p>
+          <a:p>
+            <a:pPr>
+              <a:spcAft>
+                <a:spcPts val="800"/>
+              </a:spcAft>
+            </a:pPr>
+            <a:r>
+              <a:rPr sz="1600" b="0" i="0">
+                <a:solidFill>
+                  <a:srgbClr val="333333"/>
+                </a:solidFill>
+                <a:latin typeface="Calibri"/>
+              </a:rPr>
+              <a:t>–   Evidencia: el SQL y su salida quedan guardados en cada pregunta de ExamLab.</a:t>
+            </a:r>
+          </a:p>
+          <a:p>
+            <a:pPr>
+              <a:spcAft>
+                <a:spcPts val="800"/>
+              </a:spcAft>
+            </a:pPr>
+            <a:r>
+              <a:rPr sz="1600" b="0" i="0">
+                <a:solidFill>
+                  <a:srgbClr val="333333"/>
+                </a:solidFill>
+                <a:latin typeface="Calibri"/>
+              </a:rPr>
+              <a:t>–   Conserva copia en tu carpeta del PI (los .sql que pide el entregable).</a:t>
+            </a:r>
+          </a:p>
+          <a:p>
+            <a:pPr>
+              <a:spcAft>
+                <a:spcPts val="800"/>
+              </a:spcAft>
+            </a:pPr>
+            <a:r>
+              <a:rPr sz="1600" b="0" i="0">
+                <a:solidFill>
+                  <a:srgbClr val="333333"/>
+                </a:solidFill>
+                <a:latin typeface="Calibri"/>
+              </a:rPr>
+              <a:t>–   Actualizar checklist PI (que criterio de rubrica avanzo).</a:t>
+            </a:r>
+          </a:p>
+          <a:p>
+            <a:pPr>
+              <a:spcAft>
+                <a:spcPts val="800"/>
+              </a:spcAft>
+            </a:pPr>
+            <a:r>
+              <a:rPr sz="1600" b="0" i="0">
+                <a:solidFill>
+                  <a:srgbClr val="333333"/>
+                </a:solidFill>
+                <a:latin typeface="Calibri"/>
+              </a:rPr>
+              <a:t>–   </a:t>
+            </a:r>
+            <a:r>
+              <a:rPr sz="1600" b="1" i="0">
+                <a:solidFill>
+                  <a:srgbClr val="333333"/>
+                </a:solidFill>
+                <a:latin typeface="Calibri"/>
+              </a:rPr>
+              <a:t>Entrega en ExamLab</a:t>
+            </a:r>
+            <a:r>
+              <a:rPr sz="1600" b="0" i="0">
+                <a:solidFill>
+                  <a:srgbClr val="333333"/>
+                </a:solidFill>
+                <a:latin typeface="Calibri"/>
+              </a:rPr>
+              <a:t> (https://uniaj.examlab.workers.dev/) — domingo 23:59 cuando aplique taller.</a:t>
+            </a:r>
+          </a:p>
+        </p:txBody>
+      </p:sp>
+      <p:sp>
+        <p:nvSpPr>
+          <p:cNvPr id="6" name="TextBox 5"/>
+          <p:cNvSpPr txBox="1"/>
+          <p:nvPr/>
+        </p:nvSpPr>
+        <p:spPr>
+          <a:xfrm>
+            <a:off x="11185855" y="6473952"/>
+            <a:ext cx="640080" cy="274320"/>
+          </a:xfrm>
+          <a:prstGeom prst="rect">
+            <a:avLst/>
+          </a:prstGeom>
+          <a:noFill/>
+        </p:spPr>
+        <p:txBody>
+          <a:bodyPr wrap="square">
+            <a:spAutoFit/>
+          </a:bodyPr>
+          <a:lstStyle/>
+          <a:p>
+            <a:pPr algn="r"/>
+            <a:r>
+              <a:rPr sz="1100" b="0" i="0">
+                <a:solidFill>
+                  <a:srgbClr val="666666"/>
+                </a:solidFill>
+                <a:latin typeface="Calibri"/>
+              </a:rPr>
+              <a:t>16</a:t>
+            </a:r>
+          </a:p>
+        </p:txBody>
+      </p:sp>
+    </p:spTree>
+  </p:cSld>
+  <p:clrMapOvr>
+    <a:masterClrMapping/>
+  </p:clrMapOvr>
+</p:sld>
+</file>
+
+<file path=ppt/slides/slide17.xml><?xml version="1.0" encoding="utf-8"?>
+<p:sld xmlns:a="http://schemas.openxmlformats.org/drawingml/2006/main" xmlns:p="http://schemas.openxmlformats.org/presentationml/2006/main" xmlns:r="http://schemas.openxmlformats.org/officeDocument/2006/relationships">
+  <p:cSld>
+    <p:bg>
+      <p:bgPr>
+        <a:solidFill>
+          <a:srgbClr val="FFFFFF"/>
+        </a:solidFill>
+        <a:effectLst/>
+      </p:bgPr>
+    </p:bg>
+    <p:spTree>
+      <p:nvGrpSpPr>
+        <p:cNvPr id="1" name=""/>
+        <p:cNvGrpSpPr/>
+        <p:nvPr/>
+      </p:nvGrpSpPr>
+      <p:grpSpPr/>
+      <p:sp>
+        <p:nvSpPr>
+          <p:cNvPr id="2" name="Rectangle 1"/>
+          <p:cNvSpPr/>
+          <p:nvPr/>
+        </p:nvSpPr>
+        <p:spPr>
+          <a:xfrm>
+            <a:off x="0" y="0"/>
+            <a:ext cx="12191695" cy="960120"/>
+          </a:xfrm>
+          <a:prstGeom prst="rect">
+            <a:avLst/>
+          </a:prstGeom>
+          <a:solidFill>
+            <a:srgbClr val="095292"/>
+          </a:solidFill>
+          <a:ln>
+            <a:noFill/>
+          </a:ln>
+        </p:spPr>
+        <p:style>
+          <a:lnRef idx="1">
+            <a:schemeClr val="accent1"/>
+          </a:lnRef>
+          <a:fillRef idx="3">
+            <a:schemeClr val="accent1"/>
+          </a:fillRef>
+          <a:effectRef idx="2">
+            <a:schemeClr val="accent1"/>
+          </a:effectRef>
+          <a:fontRef idx="minor">
+            <a:schemeClr val="lt1"/>
+          </a:fontRef>
+        </p:style>
+        <p:txBody>
+          <a:bodyPr rtlCol="0" anchor="ctr"/>
+          <a:lstStyle/>
+          <a:p>
+            <a:pPr algn="ctr"/>
+          </a:p>
+        </p:txBody>
+      </p:sp>
+      <p:sp>
+        <p:nvSpPr>
+          <p:cNvPr id="3" name="Rectangle 2"/>
+          <p:cNvSpPr/>
+          <p:nvPr/>
+        </p:nvSpPr>
+        <p:spPr>
+          <a:xfrm>
+            <a:off x="0" y="960120"/>
+            <a:ext cx="12191695" cy="41148"/>
+          </a:xfrm>
+          <a:prstGeom prst="rect">
+            <a:avLst/>
+          </a:prstGeom>
+          <a:solidFill>
+            <a:srgbClr val="FFD000"/>
+          </a:solidFill>
+          <a:ln>
+            <a:noFill/>
+          </a:ln>
+        </p:spPr>
+        <p:style>
+          <a:lnRef idx="1">
+            <a:schemeClr val="accent1"/>
+          </a:lnRef>
+          <a:fillRef idx="3">
+            <a:schemeClr val="accent1"/>
+          </a:fillRef>
+          <a:effectRef idx="2">
+            <a:schemeClr val="accent1"/>
+          </a:effectRef>
+          <a:fontRef idx="minor">
+            <a:schemeClr val="lt1"/>
+          </a:fontRef>
+        </p:style>
+        <p:txBody>
+          <a:bodyPr rtlCol="0" anchor="ctr"/>
+          <a:lstStyle/>
+          <a:p>
+            <a:pPr algn="ctr"/>
+          </a:p>
+        </p:txBody>
+      </p:sp>
+      <p:sp>
+        <p:nvSpPr>
+          <p:cNvPr id="4" name="TextBox 3"/>
+          <p:cNvSpPr txBox="1"/>
+          <p:nvPr/>
+        </p:nvSpPr>
+        <p:spPr>
+          <a:xfrm>
+            <a:off x="457200" y="164592"/>
+            <a:ext cx="11277295" cy="502920"/>
+          </a:xfrm>
+          <a:prstGeom prst="rect">
+            <a:avLst/>
+          </a:prstGeom>
+          <a:noFill/>
+        </p:spPr>
+        <p:txBody>
+          <a:bodyPr wrap="square">
+            <a:spAutoFit/>
+          </a:bodyPr>
+          <a:lstStyle/>
+          <a:p>
+            <a:r>
+              <a:rPr sz="2600" b="1" i="0">
+                <a:solidFill>
+                  <a:srgbClr val="FFFFFF"/>
+                </a:solidFill>
+                <a:latin typeface="Calibri"/>
+              </a:rPr>
+              <a:t>Para el PI esta semana</a:t>
+            </a:r>
+          </a:p>
+        </p:txBody>
+      </p:sp>
+      <p:sp>
+        <p:nvSpPr>
+          <p:cNvPr id="5" name="Rounded Rectangle 4"/>
+          <p:cNvSpPr/>
+          <p:nvPr/>
+        </p:nvSpPr>
+        <p:spPr>
+          <a:xfrm>
+            <a:off x="457200" y="1261872"/>
+            <a:ext cx="11277295" cy="1051560"/>
+          </a:xfrm>
+          <a:prstGeom prst="roundRect">
+            <a:avLst>
+              <a:gd name="adj" fmla="val 12000"/>
+            </a:avLst>
+          </a:prstGeom>
+          <a:solidFill>
+            <a:srgbClr val="E8F4FA"/>
+          </a:solidFill>
+          <a:ln>
+            <a:noFill/>
+          </a:ln>
+        </p:spPr>
+        <p:style>
+          <a:lnRef idx="1">
+            <a:schemeClr val="accent1"/>
+          </a:lnRef>
+          <a:fillRef idx="3">
+            <a:schemeClr val="accent1"/>
+          </a:fillRef>
+          <a:effectRef idx="2">
+            <a:schemeClr val="accent1"/>
+          </a:effectRef>
+          <a:fontRef idx="minor">
+            <a:schemeClr val="lt1"/>
+          </a:fontRef>
+        </p:style>
+        <p:txBody>
+          <a:bodyPr rtlCol="0" anchor="ctr"/>
+          <a:lstStyle/>
+          <a:p>
+            <a:pPr algn="ctr"/>
+          </a:p>
+        </p:txBody>
+      </p:sp>
+      <p:sp>
+        <p:nvSpPr>
+          <p:cNvPr id="6" name="Rectangle 5"/>
+          <p:cNvSpPr/>
+          <p:nvPr/>
+        </p:nvSpPr>
+        <p:spPr>
+          <a:xfrm>
+            <a:off x="457200" y="1261872"/>
+            <a:ext cx="128016" cy="1051560"/>
+          </a:xfrm>
+          <a:prstGeom prst="rect">
+            <a:avLst/>
+          </a:prstGeom>
+          <a:solidFill>
+            <a:srgbClr val="269CCB"/>
+          </a:solidFill>
+          <a:ln>
+            <a:noFill/>
+          </a:ln>
+        </p:spPr>
+        <p:style>
+          <a:lnRef idx="1">
+            <a:schemeClr val="accent1"/>
+          </a:lnRef>
+          <a:fillRef idx="3">
+            <a:schemeClr val="accent1"/>
+          </a:fillRef>
+          <a:effectRef idx="2">
+            <a:schemeClr val="accent1"/>
+          </a:effectRef>
+          <a:fontRef idx="minor">
+            <a:schemeClr val="lt1"/>
+          </a:fontRef>
+        </p:style>
+        <p:txBody>
+          <a:bodyPr rtlCol="0" anchor="ctr"/>
+          <a:lstStyle/>
+          <a:p>
+            <a:pPr algn="ctr"/>
+          </a:p>
+        </p:txBody>
+      </p:sp>
+      <p:sp>
+        <p:nvSpPr>
+          <p:cNvPr id="7" name="TextBox 6"/>
+          <p:cNvSpPr txBox="1"/>
+          <p:nvPr/>
+        </p:nvSpPr>
+        <p:spPr>
+          <a:xfrm>
+            <a:off x="777240" y="1399031"/>
+            <a:ext cx="10774375" cy="822959"/>
+          </a:xfrm>
+          <a:prstGeom prst="rect">
+            <a:avLst/>
+          </a:prstGeom>
+          <a:noFill/>
+        </p:spPr>
+        <p:txBody>
+          <a:bodyPr wrap="square">
+            <a:spAutoFit/>
+          </a:bodyPr>
+          <a:lstStyle/>
+          <a:p>
+            <a:r>
+              <a:rPr sz="1200" b="1" i="0">
+                <a:solidFill>
+                  <a:srgbClr val="269CCB"/>
+                </a:solidFill>
+                <a:latin typeface="Calibri"/>
+              </a:rPr>
+              <a:t>Info</a:t>
+            </a:r>
+          </a:p>
+          <a:p>
+            <a:pPr>
+              <a:spcBef>
+                <a:spcPts val="400"/>
+              </a:spcBef>
+            </a:pPr>
+            <a:r>
+              <a:rPr sz="1400" b="0" i="0">
+                <a:solidFill>
+                  <a:srgbClr val="333333"/>
+                </a:solidFill>
+                <a:latin typeface="Calibri"/>
+              </a:rPr>
+              <a:t>Hito: &gt;=1 funcion + &gt;=1 trigger + borrador plan de respaldo</a:t>
+            </a:r>
+          </a:p>
+        </p:txBody>
+      </p:sp>
+      <p:sp>
+        <p:nvSpPr>
+          <p:cNvPr id="8" name="Rounded Rectangle 7"/>
+          <p:cNvSpPr/>
+          <p:nvPr/>
+        </p:nvSpPr>
+        <p:spPr>
+          <a:xfrm>
+            <a:off x="457200" y="2478024"/>
+            <a:ext cx="11277295" cy="1051560"/>
+          </a:xfrm>
+          <a:prstGeom prst="roundRect">
+            <a:avLst>
+              <a:gd name="adj" fmla="val 12000"/>
+            </a:avLst>
+          </a:prstGeom>
+          <a:solidFill>
+            <a:srgbClr val="FFF8E1"/>
+          </a:solidFill>
+          <a:ln>
+            <a:noFill/>
+          </a:ln>
+        </p:spPr>
+        <p:style>
+          <a:lnRef idx="1">
+            <a:schemeClr val="accent1"/>
+          </a:lnRef>
+          <a:fillRef idx="3">
+            <a:schemeClr val="accent1"/>
+          </a:fillRef>
+          <a:effectRef idx="2">
+            <a:schemeClr val="accent1"/>
+          </a:effectRef>
+          <a:fontRef idx="minor">
+            <a:schemeClr val="lt1"/>
+          </a:fontRef>
+        </p:style>
+        <p:txBody>
+          <a:bodyPr rtlCol="0" anchor="ctr"/>
+          <a:lstStyle/>
+          <a:p>
+            <a:pPr algn="ctr"/>
+          </a:p>
+        </p:txBody>
+      </p:sp>
+      <p:sp>
+        <p:nvSpPr>
+          <p:cNvPr id="9" name="Rectangle 8"/>
+          <p:cNvSpPr/>
+          <p:nvPr/>
+        </p:nvSpPr>
+        <p:spPr>
+          <a:xfrm>
+            <a:off x="457200" y="2478024"/>
+            <a:ext cx="128016" cy="1051560"/>
+          </a:xfrm>
+          <a:prstGeom prst="rect">
+            <a:avLst/>
+          </a:prstGeom>
+          <a:solidFill>
+            <a:srgbClr val="FFD000"/>
+          </a:solidFill>
+          <a:ln>
+            <a:noFill/>
+          </a:ln>
+        </p:spPr>
+        <p:style>
+          <a:lnRef idx="1">
+            <a:schemeClr val="accent1"/>
+          </a:lnRef>
+          <a:fillRef idx="3">
+            <a:schemeClr val="accent1"/>
+          </a:fillRef>
+          <a:effectRef idx="2">
+            <a:schemeClr val="accent1"/>
+          </a:effectRef>
+          <a:fontRef idx="minor">
+            <a:schemeClr val="lt1"/>
+          </a:fontRef>
+        </p:style>
+        <p:txBody>
+          <a:bodyPr rtlCol="0" anchor="ctr"/>
+          <a:lstStyle/>
+          <a:p>
+            <a:pPr algn="ctr"/>
+          </a:p>
+        </p:txBody>
+      </p:sp>
+      <p:sp>
+        <p:nvSpPr>
+          <p:cNvPr id="10" name="TextBox 9"/>
+          <p:cNvSpPr txBox="1"/>
+          <p:nvPr/>
+        </p:nvSpPr>
+        <p:spPr>
+          <a:xfrm>
+            <a:off x="777240" y="2615184"/>
+            <a:ext cx="10774375" cy="822959"/>
+          </a:xfrm>
+          <a:prstGeom prst="rect">
+            <a:avLst/>
+          </a:prstGeom>
+          <a:noFill/>
+        </p:spPr>
+        <p:txBody>
+          <a:bodyPr wrap="square">
+            <a:spAutoFit/>
+          </a:bodyPr>
+          <a:lstStyle/>
+          <a:p>
+            <a:r>
+              <a:rPr sz="1200" b="1" i="0">
+                <a:solidFill>
+                  <a:srgbClr val="FFD000"/>
+                </a:solidFill>
+                <a:latin typeface="Calibri"/>
+              </a:rPr>
+              <a:t>Aclaración</a:t>
+            </a:r>
+          </a:p>
+          <a:p>
+            <a:pPr>
+              <a:spcBef>
+                <a:spcPts val="400"/>
+              </a:spcBef>
+            </a:pPr>
+            <a:r>
+              <a:rPr sz="1400" b="0" i="0">
+                <a:solidFill>
+                  <a:srgbClr val="333333"/>
+                </a:solidFill>
+                <a:latin typeface="Calibri"/>
+              </a:rPr>
+              <a:t>Enunciado completo: Clases/Proyecto Integrador/ (VetCare DB).</a:t>
+            </a:r>
+          </a:p>
+        </p:txBody>
+      </p:sp>
+      <p:sp>
+        <p:nvSpPr>
+          <p:cNvPr id="11" name="Rounded Rectangle 10"/>
+          <p:cNvSpPr/>
+          <p:nvPr/>
+        </p:nvSpPr>
+        <p:spPr>
+          <a:xfrm>
+            <a:off x="457200" y="3694176"/>
+            <a:ext cx="11277295" cy="1051560"/>
+          </a:xfrm>
+          <a:prstGeom prst="roundRect">
+            <a:avLst>
+              <a:gd name="adj" fmla="val 12000"/>
+            </a:avLst>
+          </a:prstGeom>
+          <a:solidFill>
+            <a:srgbClr val="FBE4E4"/>
+          </a:solidFill>
+          <a:ln>
+            <a:noFill/>
+          </a:ln>
+        </p:spPr>
+        <p:style>
+          <a:lnRef idx="1">
+            <a:schemeClr val="accent1"/>
+          </a:lnRef>
+          <a:fillRef idx="3">
+            <a:schemeClr val="accent1"/>
+          </a:fillRef>
+          <a:effectRef idx="2">
+            <a:schemeClr val="accent1"/>
+          </a:effectRef>
+          <a:fontRef idx="minor">
+            <a:schemeClr val="lt1"/>
+          </a:fontRef>
+        </p:style>
+        <p:txBody>
+          <a:bodyPr rtlCol="0" anchor="ctr"/>
+          <a:lstStyle/>
+          <a:p>
+            <a:pPr algn="ctr"/>
+          </a:p>
+        </p:txBody>
+      </p:sp>
+      <p:sp>
+        <p:nvSpPr>
+          <p:cNvPr id="12" name="Rectangle 11"/>
+          <p:cNvSpPr/>
+          <p:nvPr/>
+        </p:nvSpPr>
+        <p:spPr>
+          <a:xfrm>
+            <a:off x="457200" y="3694176"/>
+            <a:ext cx="128016" cy="1051560"/>
+          </a:xfrm>
+          <a:prstGeom prst="rect">
+            <a:avLst/>
+          </a:prstGeom>
+          <a:solidFill>
+            <a:srgbClr val="A02030"/>
+          </a:solidFill>
+          <a:ln>
+            <a:noFill/>
+          </a:ln>
+        </p:spPr>
+        <p:style>
+          <a:lnRef idx="1">
+            <a:schemeClr val="accent1"/>
+          </a:lnRef>
+          <a:fillRef idx="3">
+            <a:schemeClr val="accent1"/>
+          </a:fillRef>
+          <a:effectRef idx="2">
+            <a:schemeClr val="accent1"/>
+          </a:effectRef>
+          <a:fontRef idx="minor">
+            <a:schemeClr val="lt1"/>
+          </a:fontRef>
+        </p:style>
+        <p:txBody>
+          <a:bodyPr rtlCol="0" anchor="ctr"/>
+          <a:lstStyle/>
+          <a:p>
+            <a:pPr algn="ctr"/>
+          </a:p>
+        </p:txBody>
+      </p:sp>
+      <p:sp>
+        <p:nvSpPr>
+          <p:cNvPr id="13" name="TextBox 12"/>
+          <p:cNvSpPr txBox="1"/>
+          <p:nvPr/>
+        </p:nvSpPr>
+        <p:spPr>
+          <a:xfrm>
+            <a:off x="777240" y="3831336"/>
+            <a:ext cx="10774375" cy="822959"/>
+          </a:xfrm>
+          <a:prstGeom prst="rect">
+            <a:avLst/>
+          </a:prstGeom>
+          <a:noFill/>
+        </p:spPr>
+        <p:txBody>
+          <a:bodyPr wrap="square">
+            <a:spAutoFit/>
+          </a:bodyPr>
+          <a:lstStyle/>
+          <a:p>
+            <a:r>
+              <a:rPr sz="1200" b="1" i="0">
+                <a:solidFill>
+                  <a:srgbClr val="A02030"/>
+                </a:solidFill>
+                <a:latin typeface="Calibri"/>
+              </a:rPr>
+              <a:t>Atención</a:t>
+            </a:r>
+          </a:p>
+          <a:p>
+            <a:pPr>
+              <a:spcBef>
+                <a:spcPts val="400"/>
+              </a:spcBef>
+            </a:pPr>
+            <a:r>
+              <a:rPr sz="1400" b="0" i="0">
+                <a:solidFill>
+                  <a:srgbClr val="333333"/>
+                </a:solidFill>
+                <a:latin typeface="Calibri"/>
+              </a:rPr>
+              <a:t>Taller de la semana en ExamLab (https://uniaj.examlab.workers.dev/): domingo 23:59 (regla del Acuerdo) cuando aplique.</a:t>
+            </a:r>
+          </a:p>
+        </p:txBody>
+      </p:sp>
+      <p:sp>
+        <p:nvSpPr>
+          <p:cNvPr id="14" name="TextBox 13"/>
+          <p:cNvSpPr txBox="1"/>
+          <p:nvPr/>
+        </p:nvSpPr>
+        <p:spPr>
+          <a:xfrm>
+            <a:off x="11185855" y="6473952"/>
+            <a:ext cx="640080" cy="274320"/>
+          </a:xfrm>
+          <a:prstGeom prst="rect">
+            <a:avLst/>
+          </a:prstGeom>
+          <a:noFill/>
+        </p:spPr>
+        <p:txBody>
+          <a:bodyPr wrap="square">
+            <a:spAutoFit/>
+          </a:bodyPr>
+          <a:lstStyle/>
+          <a:p>
+            <a:pPr algn="r"/>
+            <a:r>
+              <a:rPr sz="1100" b="0" i="0">
+                <a:solidFill>
+                  <a:srgbClr val="666666"/>
+                </a:solidFill>
+                <a:latin typeface="Calibri"/>
+              </a:rPr>
+              <a:t>17</a:t>
+            </a:r>
+          </a:p>
+        </p:txBody>
+      </p:sp>
+    </p:spTree>
+  </p:cSld>
+  <p:clrMapOvr>
+    <a:masterClrMapping/>
+  </p:clrMapOvr>
+</p:sld>
+</file>
+
+<file path=ppt/slides/slide18.xml><?xml version="1.0" encoding="utf-8"?>
+<p:sld xmlns:a="http://schemas.openxmlformats.org/drawingml/2006/main" xmlns:p="http://schemas.openxmlformats.org/presentationml/2006/main" xmlns:r="http://schemas.openxmlformats.org/officeDocument/2006/relationships">
+  <p:cSld>
+    <p:bg>
+      <p:bgPr>
+        <a:solidFill>
+          <a:srgbClr val="FFFFFF"/>
+        </a:solidFill>
+        <a:effectLst/>
+      </p:bgPr>
+    </p:bg>
+    <p:spTree>
+      <p:nvGrpSpPr>
+        <p:cNvPr id="1" name=""/>
+        <p:cNvGrpSpPr/>
+        <p:nvPr/>
+      </p:nvGrpSpPr>
+      <p:grpSpPr/>
+      <p:sp>
+        <p:nvSpPr>
+          <p:cNvPr id="2" name="Rectangle 1"/>
+          <p:cNvSpPr/>
+          <p:nvPr/>
+        </p:nvSpPr>
+        <p:spPr>
+          <a:xfrm>
+            <a:off x="0" y="0"/>
             <a:ext cx="12191695" cy="164592"/>
           </a:xfrm>
           <a:prstGeom prst="rect">
@@ -6251,7 +9383,7 @@
                 </a:solidFill>
                 <a:latin typeface="Calibri"/>
               </a:rPr>
-              <a:t>Entregable: Scripts funcion/trigger + Plan_Backup_VetCare (1 pag.)</a:t>
+              <a:t>Entregable: fn_precio_consulta + 2 triggers corriendo en ExamLab + Plan_Backup_VetCare con sus 6 secciones (1 pag.)</a:t>
             </a:r>
           </a:p>
           <a:p>
@@ -6530,7 +9662,7 @@
                 </a:solidFill>
                 <a:latin typeface="Calibri"/>
               </a:rPr>
-              <a:t>Oracle Live SQL + Google Docs</a:t>
+              <a:t>ExamLab (PostgreSQL) + Google Docs</a:t>
             </a:r>
             <a:r>
               <a:rPr sz="1600" b="0" i="0">
@@ -6591,7 +9723,7 @@
                 </a:solidFill>
                 <a:latin typeface="Calibri"/>
               </a:rPr>
-              <a:t> Scripts funcion/trigger + Plan_Backup_VetCare (1 pag.)</a:t>
+              <a:t> fn_precio_consulta + 2 triggers corriendo en ExamLab + Plan_Backup_VetCare con sus 6 secciones (1 pag.)</a:t>
             </a:r>
           </a:p>
           <a:p>
@@ -7743,7 +10875,7 @@
                 </a:solidFill>
                 <a:latin typeface="Calibri"/>
               </a:rPr>
-              <a:t>–   Riesgo real de los triggers: son invisibles en el codigo de la app (un desarrollador que solo mira el INSERT…</a:t>
+              <a:t>–   En PostgreSQL un trigger son SIEMPRE dos objetos, no uno: la funcion y la asociacion</a:t>
             </a:r>
           </a:p>
           <a:p>
@@ -7759,7 +10891,7 @@
                 </a:solidFill>
                 <a:latin typeface="Calibri"/>
               </a:rPr>
-              <a:t>–   Seguridad y respaldo van juntos: seguridad evita que datos se corrompan o se filtren; respaldo (backup) asume…</a:t>
+              <a:t>–   BEFORE o AFTER no es un detalle de estilo: un trigger que VALIDA va BEFORE, porque tiene que abortar antes de…</a:t>
             </a:r>
           </a:p>
           <a:p>
@@ -7775,7 +10907,7 @@
                 </a:solidFill>
                 <a:latin typeface="Calibri"/>
               </a:rPr>
-              <a:t>–   RPO (Recovery Point Objective) = cuantos datos se puede permitir perder, medido en tiempo ('maximo 1 hora de…</a:t>
+              <a:t>–   Riesgo real de los triggers: son invisibles en el codigo de la app (un desarrollador que solo mira el INSERT…</a:t>
             </a:r>
           </a:p>
         </p:txBody>
@@ -7956,7 +11088,7 @@
                 </a:solidFill>
                 <a:latin typeface="Calibri"/>
               </a:rPr>
-              <a:t>Trigger de auditoria: nadie tiene que acordarse de registrarlo</a:t>
+              <a:t>Un trigger son DOS objetos: la funcion y la asociacion</a:t>
             </a:r>
           </a:p>
         </p:txBody>
@@ -8115,7 +11247,7 @@
                 </a:solidFill>
                 <a:latin typeface="Calibri"/>
               </a:rPr>
-              <a:t>CREATE OR REPLACE TRIGGER trg_audit_cancelacion_cita</a:t>
+              <a:t>-- 1) La funcion: NEW y OLD SIN dos puntos</a:t>
             </a:r>
           </a:p>
           <a:p>
@@ -8131,7 +11263,7 @@
                 </a:solidFill>
                 <a:latin typeface="Calibri"/>
               </a:rPr>
-              <a:t>AFTER UPDATE ON cita FOR EACH ROW</a:t>
+              <a:t>CREATE OR REPLACE FUNCTION fn_trg_audit_cita()</a:t>
             </a:r>
           </a:p>
           <a:p>
@@ -8147,7 +11279,7 @@
                 </a:solidFill>
                 <a:latin typeface="Calibri"/>
               </a:rPr>
-              <a:t>WHEN (NEW.estado = 'CANCELADA')</a:t>
+              <a:t>RETURNS TRIGGER LANGUAGE plpgsql AS $fn$</a:t>
             </a:r>
           </a:p>
           <a:p>
@@ -8179,7 +11311,7 @@
                 </a:solidFill>
                 <a:latin typeface="Calibri"/>
               </a:rPr>
-              <a:t>  INSERT INTO auditoria_cita(id_cita, estado_ant, estado_new, usuario, fecha)</a:t>
+              <a:t>  INSERT INTO audit_cita(id_cita, accion,</a:t>
             </a:r>
           </a:p>
           <a:p>
@@ -8195,7 +11327,7 @@
                 </a:solidFill>
                 <a:latin typeface="Calibri"/>
               </a:rPr>
-              <a:t>  VALUES (:NEW.id_cita, :OLD.estado, :NEW.estado, USER, SYSDATE);</a:t>
+              <a:t>                         valor_anterior, valor_nuevo)</a:t>
             </a:r>
           </a:p>
           <a:p>
@@ -8211,7 +11343,151 @@
                 </a:solidFill>
                 <a:latin typeface="Calibri"/>
               </a:rPr>
-              <a:t>END;</a:t>
+              <a:t>  VALUES (NEW.id_cita, 'CAMBIO_ESTADO',</a:t>
+            </a:r>
+          </a:p>
+          <a:p>
+            <a:pPr>
+              <a:spcAft>
+                <a:spcPts val="400"/>
+              </a:spcAft>
+            </a:pPr>
+            <a:r>
+              <a:rPr sz="1400" b="0" i="0">
+                <a:solidFill>
+                  <a:srgbClr val="FFFFFF"/>
+                </a:solidFill>
+                <a:latin typeface="Calibri"/>
+              </a:rPr>
+              <a:t>          OLD.estado, NEW.estado);   -- usuario y fecha: DEFAULT</a:t>
+            </a:r>
+          </a:p>
+          <a:p>
+            <a:pPr>
+              <a:spcAft>
+                <a:spcPts val="400"/>
+              </a:spcAft>
+            </a:pPr>
+            <a:r>
+              <a:rPr sz="1400" b="0" i="0">
+                <a:solidFill>
+                  <a:srgbClr val="FFFFFF"/>
+                </a:solidFill>
+                <a:latin typeface="Calibri"/>
+              </a:rPr>
+              <a:t>  RETURN NEW;                        -- obligatorio</a:t>
+            </a:r>
+          </a:p>
+          <a:p>
+            <a:pPr>
+              <a:spcAft>
+                <a:spcPts val="400"/>
+              </a:spcAft>
+            </a:pPr>
+            <a:r>
+              <a:rPr sz="1400" b="0" i="0">
+                <a:solidFill>
+                  <a:srgbClr val="FFFFFF"/>
+                </a:solidFill>
+                <a:latin typeface="Calibri"/>
+              </a:rPr>
+              <a:t>END; $fn$;</a:t>
+            </a:r>
+          </a:p>
+          <a:p>
+            <a:pPr>
+              <a:spcAft>
+                <a:spcPts val="400"/>
+              </a:spcAft>
+            </a:pPr>
+            <a:r>
+              <a:rPr sz="1400" b="0" i="0">
+                <a:solidFill>
+                  <a:srgbClr val="FFFFFF"/>
+                </a:solidFill>
+                <a:latin typeface="Calibri"/>
+              </a:rPr>
+              <a:t/>
+            </a:r>
+          </a:p>
+          <a:p>
+            <a:pPr>
+              <a:spcAft>
+                <a:spcPts val="400"/>
+              </a:spcAft>
+            </a:pPr>
+            <a:r>
+              <a:rPr sz="1400" b="0" i="0">
+                <a:solidFill>
+                  <a:srgbClr val="FFFFFF"/>
+                </a:solidFill>
+                <a:latin typeface="Calibri"/>
+              </a:rPr>
+              <a:t>-- 2) La asociacion: cuando se dispara y a quien llama</a:t>
+            </a:r>
+          </a:p>
+          <a:p>
+            <a:pPr>
+              <a:spcAft>
+                <a:spcPts val="400"/>
+              </a:spcAft>
+            </a:pPr>
+            <a:r>
+              <a:rPr sz="1400" b="0" i="0">
+                <a:solidFill>
+                  <a:srgbClr val="FFFFFF"/>
+                </a:solidFill>
+                <a:latin typeface="Calibri"/>
+              </a:rPr>
+              <a:t>CREATE TRIGGER trg_audit_cita</a:t>
+            </a:r>
+          </a:p>
+          <a:p>
+            <a:pPr>
+              <a:spcAft>
+                <a:spcPts val="400"/>
+              </a:spcAft>
+            </a:pPr>
+            <a:r>
+              <a:rPr sz="1400" b="0" i="0">
+                <a:solidFill>
+                  <a:srgbClr val="FFFFFF"/>
+                </a:solidFill>
+                <a:latin typeface="Calibri"/>
+              </a:rPr>
+              <a:t>AFTER UPDATE OF estado ON cita FOR EACH ROW</a:t>
+            </a:r>
+          </a:p>
+          <a:p>
+            <a:pPr>
+              <a:spcAft>
+                <a:spcPts val="400"/>
+              </a:spcAft>
+            </a:pPr>
+            <a:r>
+              <a:rPr sz="1400" b="0" i="0">
+                <a:solidFill>
+                  <a:srgbClr val="FFFFFF"/>
+                </a:solidFill>
+                <a:latin typeface="Calibri"/>
+              </a:rPr>
+              <a:t>WHEN (OLD.estado IS DISTINCT FROM NEW.estado)</a:t>
+            </a:r>
+          </a:p>
+          <a:p>
+            <a:pPr>
+              <a:spcAft>
+                <a:spcPts val="400"/>
+              </a:spcAft>
+            </a:pPr>
+            <a:r>
+              <a:rPr sz="1400" b="0" i="0">
+                <a:solidFill>
+                  <a:srgbClr val="FFFFFF"/>
+                </a:solidFill>
+                <a:latin typeface="Calibri"/>
+              </a:rPr>
+              <a:t>EXECUTE FUNCTION fn_trg_audit_cita();</a:t>
             </a:r>
           </a:p>
         </p:txBody>
@@ -8246,7 +11522,7 @@
                 </a:solidFill>
                 <a:latin typeface="Calibri"/>
               </a:rPr>
-              <a:t>Se dispara solo. Riesgo: es invisible para quien solo lee el codigo de la app.</a:t>
+              <a:t>El «WHEN» es lo que hace que 3 UPDATE dejen 2 filas de auditoria. Se dispara solo: el riesgo es que sea invisible para quien solo lee el codigo de la app.</a:t>
             </a:r>
           </a:p>
         </p:txBody>
@@ -8321,7 +11597,7 @@
         <p:spPr>
           <a:xfrm>
             <a:off x="0" y="0"/>
-            <a:ext cx="12191695" cy="960120"/>
+            <a:ext cx="12191695" cy="1170432"/>
           </a:xfrm>
           <a:prstGeom prst="rect">
             <a:avLst/>
@@ -8363,7 +11639,7 @@
         </p:nvSpPr>
         <p:spPr>
           <a:xfrm>
-            <a:off x="0" y="960120"/>
+            <a:off x="0" y="1170432"/>
             <a:ext cx="12191695" cy="41148"/>
           </a:xfrm>
           <a:prstGeom prst="rect">
@@ -8407,7 +11683,7 @@
         <p:spPr>
           <a:xfrm>
             <a:off x="457200" y="164592"/>
-            <a:ext cx="11277295" cy="502920"/>
+            <a:ext cx="11277295" cy="384048"/>
           </a:xfrm>
           <a:prstGeom prst="rect">
             <a:avLst/>
@@ -8427,7 +11703,7 @@
                 </a:solidFill>
                 <a:latin typeface="Calibri"/>
               </a:rPr>
-              <a:t>Demo del dia</a:t>
+              <a:t>La funcion de tarifas: RETURNS NUMERIC, CASE, COALESCE e IMMUTABLE</a:t>
             </a:r>
           </a:p>
         </p:txBody>
@@ -8440,8 +11716,42 @@
         </p:nvSpPr>
         <p:spPr>
           <a:xfrm>
-            <a:off x="457200" y="1170432"/>
-            <a:ext cx="11277295" cy="5230368"/>
+            <a:off x="457200" y="566928"/>
+            <a:ext cx="11277295" cy="411480"/>
+          </a:xfrm>
+          <a:prstGeom prst="rect">
+            <a:avLst/>
+          </a:prstGeom>
+          <a:noFill/>
+        </p:spPr>
+        <p:txBody>
+          <a:bodyPr wrap="square">
+            <a:spAutoFit/>
+          </a:bodyPr>
+          <a:lstStyle/>
+          <a:p>
+            <a:r>
+              <a:rPr sz="1400" b="0" i="0">
+                <a:solidFill>
+                  <a:srgbClr val="B8D8EE"/>
+                </a:solidFill>
+                <a:latin typeface="Calibri"/>
+              </a:rPr>
+              <a:t>Son 20 de los 100 puntos, y se pierden casi siempre por tres cosas: un RETURNS TRIGGER copiado del trigger, el UPPER() olvidado y un IMMUTABLE que lee tablas</a:t>
+            </a:r>
+          </a:p>
+        </p:txBody>
+      </p:sp>
+      <p:sp>
+        <p:nvSpPr>
+          <p:cNvPr id="6" name="TextBox 5"/>
+          <p:cNvSpPr txBox="1"/>
+          <p:nvPr/>
+        </p:nvSpPr>
+        <p:spPr>
+          <a:xfrm>
+            <a:off x="457200" y="1380744"/>
+            <a:ext cx="11277295" cy="5020056"/>
           </a:xfrm>
           <a:prstGeom prst="rect">
             <a:avLst/>
@@ -8460,7 +11770,7 @@
               </a:spcAft>
             </a:pPr>
             <a:r>
-              <a:rPr sz="1600" b="0" i="0">
+              <a:rPr sz="1300" b="0" i="0">
                 <a:solidFill>
                   <a:srgbClr val="333333"/>
                 </a:solidFill>
@@ -8469,22 +11779,40 @@
               <a:t>–   </a:t>
             </a:r>
             <a:r>
-              <a:rPr sz="1600" b="1" i="0">
-                <a:solidFill>
-                  <a:srgbClr val="333333"/>
-                </a:solidFill>
-                <a:latin typeface="Calibri"/>
-              </a:rPr>
-              <a:t>Herramienta:</a:t>
-            </a:r>
-            <a:r>
-              <a:rPr sz="1600" b="0" i="0">
-                <a:solidFill>
-                  <a:srgbClr val="333333"/>
-                </a:solidFill>
-                <a:latin typeface="Calibri"/>
-              </a:rPr>
-              <a:t> Oracle Live SQL + Google Docs</a:t>
+              <a:rPr sz="1300" b="1" i="0">
+                <a:solidFill>
+                  <a:srgbClr val="333333"/>
+                </a:solidFill>
+                <a:latin typeface="Calibri"/>
+              </a:rPr>
+              <a:t>La firma decide todo lo demas.</a:t>
+            </a:r>
+            <a:r>
+              <a:rPr sz="1300" b="0" i="0">
+                <a:solidFill>
+                  <a:srgbClr val="333333"/>
+                </a:solidFill>
+                <a:latin typeface="Calibri"/>
+              </a:rPr>
+              <a:t> «CREATE FUNCTION fn_precio_consulta(p_especie TEXT, p_urgencia BOOLEAN) RETURNS NUMERIC LANGUAGE plpgsql IMMUTABLE AS $fn$ ... $fn$;». Es «RETURNS NUMERIC», </a:t>
+            </a:r>
+            <a:r>
+              <a:rPr sz="1300" b="1" i="0">
+                <a:solidFill>
+                  <a:srgbClr val="333333"/>
+                </a:solidFill>
+                <a:latin typeface="Calibri"/>
+              </a:rPr>
+              <a:t>no «RETURNS TRIGGER»</a:t>
+            </a:r>
+            <a:r>
+              <a:rPr sz="1300" b="0" i="0">
+                <a:solidFill>
+                  <a:srgbClr val="333333"/>
+                </a:solidFill>
+                <a:latin typeface="Calibri"/>
+              </a:rPr>
+              <a:t>: esta funcion no se asocia a ninguna tabla, se llama desde una consulta.</a:t>
             </a:r>
           </a:p>
           <a:p>
@@ -8494,7 +11822,7 @@
               </a:spcAft>
             </a:pPr>
             <a:r>
-              <a:rPr sz="1600" b="0" i="0">
+              <a:rPr sz="1300" b="0" i="0">
                 <a:solidFill>
                   <a:srgbClr val="333333"/>
                 </a:solidFill>
@@ -8503,22 +11831,40 @@
               <a:t>–   </a:t>
             </a:r>
             <a:r>
-              <a:rPr sz="1600" b="1" i="0">
-                <a:solidFill>
-                  <a:srgbClr val="333333"/>
-                </a:solidFill>
-                <a:latin typeface="Calibri"/>
-              </a:rPr>
-              <a:t>Demo:</a:t>
-            </a:r>
-            <a:r>
-              <a:rPr sz="1600" b="0" i="0">
-                <a:solidFill>
-                  <a:srgbClr val="333333"/>
-                </a:solidFill>
-                <a:latin typeface="Calibri"/>
-              </a:rPr>
-              <a:t> fn_precio_consulta + trg_audit_cancelacion_cita + outline backup.</a:t>
+              <a:rPr sz="1300" b="1" i="0">
+                <a:solidFill>
+                  <a:srgbClr val="333333"/>
+                </a:solidFill>
+                <a:latin typeface="Calibri"/>
+              </a:rPr>
+              <a:t>La tabla de tarifas es un «CASE».</a:t>
+            </a:r>
+            <a:r>
+              <a:rPr sz="1300" b="0" i="0">
+                <a:solidFill>
+                  <a:srgbClr val="333333"/>
+                </a:solidFill>
+                <a:latin typeface="Calibri"/>
+              </a:rPr>
+              <a:t> «CASE UPPER(p_especie) WHEN 'CANINO' THEN 45000 WHEN 'FELINO' THEN 40000 ELSE 35000 END». El «UPPER()» es lo que hace la comparacion </a:t>
+            </a:r>
+            <a:r>
+              <a:rPr sz="1300" b="1" i="0">
+                <a:solidFill>
+                  <a:srgbClr val="333333"/>
+                </a:solidFill>
+                <a:latin typeface="Calibri"/>
+              </a:rPr>
+              <a:t>insensible a mayusculas</a:t>
+            </a:r>
+            <a:r>
+              <a:rPr sz="1300" b="0" i="0">
+                <a:solidFill>
+                  <a:srgbClr val="333333"/>
+                </a:solidFill>
+                <a:latin typeface="Calibri"/>
+              </a:rPr>
+              <a:t>: sin el, «canino» en minuscula cae en el «ELSE» y cobra 35000.</a:t>
             </a:r>
           </a:p>
           <a:p>
@@ -8528,13 +11874,49 @@
               </a:spcAft>
             </a:pPr>
             <a:r>
-              <a:rPr sz="1600" b="0" i="0">
-                <a:solidFill>
-                  <a:srgbClr val="333333"/>
-                </a:solidFill>
-                <a:latin typeface="Calibri"/>
-              </a:rPr>
-              <a:t>–   Sigan el mismo dominio VetCare (no inventen otro caso).</a:t>
+              <a:rPr sz="1300" b="0" i="0">
+                <a:solidFill>
+                  <a:srgbClr val="333333"/>
+                </a:solidFill>
+                <a:latin typeface="Calibri"/>
+              </a:rPr>
+              <a:t>–   </a:t>
+            </a:r>
+            <a:r>
+              <a:rPr sz="1300" b="1" i="0">
+                <a:solidFill>
+                  <a:srgbClr val="333333"/>
+                </a:solidFill>
+                <a:latin typeface="Calibri"/>
+              </a:rPr>
+              <a:t>El «NULL» de la urgencia: hazlo explicito con «COALESCE».</a:t>
+            </a:r>
+            <a:r>
+              <a:rPr sz="1300" b="0" i="0">
+                <a:solidFill>
+                  <a:srgbClr val="333333"/>
+                </a:solidFill>
+                <a:latin typeface="Calibri"/>
+              </a:rPr>
+              <a:t> «IF COALESCE(p_urgencia, FALSE) THEN v_base := v_base * 1.35; END IF;». Un «IF» a secas ya trata «NULL» como falso, pero en cuanto el booleano entra en una </a:t>
+            </a:r>
+            <a:r>
+              <a:rPr sz="1300" b="1" i="0">
+                <a:solidFill>
+                  <a:srgbClr val="333333"/>
+                </a:solidFill>
+                <a:latin typeface="Calibri"/>
+              </a:rPr>
+              <a:t>cuenta</a:t>
+            </a:r>
+            <a:r>
+              <a:rPr sz="1300" b="0" i="0">
+                <a:solidFill>
+                  <a:srgbClr val="333333"/>
+                </a:solidFill>
+                <a:latin typeface="Calibri"/>
+              </a:rPr>
+              <a:t> el «NULL» se propaga y la funcion devuelve «NULL».</a:t>
             </a:r>
           </a:p>
           <a:p>
@@ -8544,20 +11926,126 @@
               </a:spcAft>
             </a:pPr>
             <a:r>
-              <a:rPr sz="1600" b="0" i="0">
-                <a:solidFill>
-                  <a:srgbClr val="333333"/>
-                </a:solidFill>
-                <a:latin typeface="Calibri"/>
-              </a:rPr>
-              <a:t>–   Al final de la demo: dejar enlace/script compartible al grupo.</a:t>
-            </a:r>
-          </a:p>
-        </p:txBody>
-      </p:sp>
-      <p:sp>
-        <p:nvSpPr>
-          <p:cNvPr id="6" name="TextBox 5"/>
+              <a:rPr sz="1300" b="0" i="0">
+                <a:solidFill>
+                  <a:srgbClr val="333333"/>
+                </a:solidFill>
+                <a:latin typeface="Calibri"/>
+              </a:rPr>
+              <a:t>–   </a:t>
+            </a:r>
+            <a:r>
+              <a:rPr sz="1300" b="1" i="0">
+                <a:solidFill>
+                  <a:srgbClr val="333333"/>
+                </a:solidFill>
+                <a:latin typeface="Calibri"/>
+              </a:rPr>
+              <a:t>«IMMUTABLE» es una promesa que el motor cobra:</a:t>
+            </a:r>
+            <a:r>
+              <a:rPr sz="1300" b="0" i="0">
+                <a:solidFill>
+                  <a:srgbClr val="333333"/>
+                </a:solidFill>
+                <a:latin typeface="Calibri"/>
+              </a:rPr>
+              <a:t> </a:t>
+            </a:r>
+            <a:r>
+              <a:rPr sz="1300" b="1" i="0">
+                <a:solidFill>
+                  <a:srgbClr val="333333"/>
+                </a:solidFill>
+                <a:latin typeface="Calibri"/>
+              </a:rPr>
+              <a:t>misma entrada, misma salida, sin leer tablas</a:t>
+            </a:r>
+            <a:r>
+              <a:rPr sz="1300" b="0" i="0">
+                <a:solidFill>
+                  <a:srgbClr val="333333"/>
+                </a:solidFill>
+                <a:latin typeface="Calibri"/>
+              </a:rPr>
+              <a:t>. Por eso el filtro «WHERE m.activa = 'S'» va en la consulta y </a:t>
+            </a:r>
+            <a:r>
+              <a:rPr sz="1300" b="1" i="0">
+                <a:solidFill>
+                  <a:srgbClr val="333333"/>
+                </a:solidFill>
+                <a:latin typeface="Calibri"/>
+              </a:rPr>
+              <a:t>no</a:t>
+            </a:r>
+            <a:r>
+              <a:rPr sz="1300" b="0" i="0">
+                <a:solidFill>
+                  <a:srgbClr val="333333"/>
+                </a:solidFill>
+                <a:latin typeface="Calibri"/>
+              </a:rPr>
+              <a:t> dentro de la funcion. Una funcion que consulta tablas seria «STABLE», nunca «IMMUTABLE».</a:t>
+            </a:r>
+          </a:p>
+          <a:p>
+            <a:pPr>
+              <a:spcAft>
+                <a:spcPts val="800"/>
+              </a:spcAft>
+            </a:pPr>
+            <a:r>
+              <a:rPr sz="1300" b="0" i="0">
+                <a:solidFill>
+                  <a:srgbClr val="333333"/>
+                </a:solidFill>
+                <a:latin typeface="Calibri"/>
+              </a:rPr>
+              <a:t>–   </a:t>
+            </a:r>
+            <a:r>
+              <a:rPr sz="1300" b="1" i="0">
+                <a:solidFill>
+                  <a:srgbClr val="333333"/>
+                </a:solidFill>
+                <a:latin typeface="Calibri"/>
+              </a:rPr>
+              <a:t>Y se usa dentro del «SELECT», que es lo que la hace funcion</a:t>
+            </a:r>
+            <a:r>
+              <a:rPr sz="1300" b="0" i="0">
+                <a:solidFill>
+                  <a:srgbClr val="333333"/>
+                </a:solidFill>
+                <a:latin typeface="Calibri"/>
+              </a:rPr>
+              <a:t> (el contraste de la Clase 3): «SELECT nombre, especie, fn_precio_consulta(especie, FALSE) AS tarifa_normal, fn_precio_consulta(especie, TRUE) AS tarifa_urgencia FROM mascota ORDER BY id_mascota;» — un canino en urgencia da </a:t>
+            </a:r>
+            <a:r>
+              <a:rPr sz="1300" b="1" i="0">
+                <a:solidFill>
+                  <a:srgbClr val="333333"/>
+                </a:solidFill>
+                <a:latin typeface="Calibri"/>
+              </a:rPr>
+              <a:t>60750</a:t>
+            </a:r>
+            <a:r>
+              <a:rPr sz="1300" b="0" i="0">
+                <a:solidFill>
+                  <a:srgbClr val="333333"/>
+                </a:solidFill>
+                <a:latin typeface="Calibri"/>
+              </a:rPr>
+              <a:t> (45000 × 1.35).</a:t>
+            </a:r>
+          </a:p>
+        </p:txBody>
+      </p:sp>
+      <p:sp>
+        <p:nvSpPr>
+          <p:cNvPr id="7" name="TextBox 6"/>
           <p:cNvSpPr txBox="1"/>
           <p:nvPr/>
         </p:nvSpPr>
@@ -8731,7 +12219,7 @@
                 </a:solidFill>
                 <a:latin typeface="Calibri"/>
               </a:rPr>
-              <a:t>Herramientas de hoy</a:t>
+              <a:t>Donde vive cada validacion: CHECK, trigger o aplicacion</a:t>
             </a:r>
           </a:p>
         </p:txBody>
@@ -8765,176 +12253,21 @@
                 </a:solidFill>
                 <a:latin typeface="Calibri"/>
               </a:rPr>
-              <a:t>Gratis · navegador o free tier</a:t>
-            </a:r>
-          </a:p>
-        </p:txBody>
-      </p:sp>
-      <p:sp>
-        <p:nvSpPr>
-          <p:cNvPr id="6" name="Rounded Rectangle 5"/>
-          <p:cNvSpPr/>
-          <p:nvPr/>
-        </p:nvSpPr>
-        <p:spPr>
-          <a:xfrm>
-            <a:off x="457200" y="1591056"/>
-            <a:ext cx="3624986" cy="2331720"/>
-          </a:xfrm>
-          <a:prstGeom prst="roundRect">
-            <a:avLst>
-              <a:gd name="adj" fmla="val 12000"/>
-            </a:avLst>
-          </a:prstGeom>
-          <a:solidFill>
-            <a:srgbClr val="F2F2F2"/>
-          </a:solidFill>
-          <a:ln>
-            <a:noFill/>
-          </a:ln>
-        </p:spPr>
-        <p:style>
-          <a:lnRef idx="1">
-            <a:schemeClr val="accent1"/>
-          </a:lnRef>
-          <a:fillRef idx="3">
-            <a:schemeClr val="accent1"/>
-          </a:fillRef>
-          <a:effectRef idx="2">
-            <a:schemeClr val="accent1"/>
-          </a:effectRef>
-          <a:fontRef idx="minor">
-            <a:schemeClr val="lt1"/>
-          </a:fontRef>
-        </p:style>
-        <p:txBody>
-          <a:bodyPr rtlCol="0" anchor="ctr"/>
-          <a:lstStyle/>
-          <a:p>
-            <a:pPr algn="ctr"/>
-          </a:p>
-        </p:txBody>
-      </p:sp>
-      <p:sp>
-        <p:nvSpPr>
-          <p:cNvPr id="7" name="Rectangle 6"/>
-          <p:cNvSpPr/>
-          <p:nvPr/>
-        </p:nvSpPr>
-        <p:spPr>
-          <a:xfrm>
-            <a:off x="457200" y="1591056"/>
-            <a:ext cx="3624986" cy="64008"/>
-          </a:xfrm>
-          <a:prstGeom prst="rect">
-            <a:avLst/>
-          </a:prstGeom>
-          <a:solidFill>
-            <a:srgbClr val="095292"/>
-          </a:solidFill>
-          <a:ln>
-            <a:noFill/>
-          </a:ln>
-        </p:spPr>
-        <p:style>
-          <a:lnRef idx="1">
-            <a:schemeClr val="accent1"/>
-          </a:lnRef>
-          <a:fillRef idx="3">
-            <a:schemeClr val="accent1"/>
-          </a:fillRef>
-          <a:effectRef idx="2">
-            <a:schemeClr val="accent1"/>
-          </a:effectRef>
-          <a:fontRef idx="minor">
-            <a:schemeClr val="lt1"/>
-          </a:fontRef>
-        </p:style>
-        <p:txBody>
-          <a:bodyPr rtlCol="0" anchor="ctr"/>
-          <a:lstStyle/>
-          <a:p>
-            <a:pPr algn="ctr"/>
-          </a:p>
-        </p:txBody>
-      </p:sp>
-      <p:sp>
-        <p:nvSpPr>
-          <p:cNvPr id="8" name="Rectangle 7"/>
-          <p:cNvSpPr/>
-          <p:nvPr/>
-        </p:nvSpPr>
-        <p:spPr>
-          <a:xfrm>
-            <a:off x="457200" y="1655064"/>
-            <a:ext cx="3624986" cy="27432"/>
-          </a:xfrm>
-          <a:prstGeom prst="rect">
-            <a:avLst/>
-          </a:prstGeom>
-          <a:solidFill>
-            <a:srgbClr val="FFD000"/>
-          </a:solidFill>
-          <a:ln>
-            <a:noFill/>
-          </a:ln>
-        </p:spPr>
-        <p:style>
-          <a:lnRef idx="1">
-            <a:schemeClr val="accent1"/>
-          </a:lnRef>
-          <a:fillRef idx="3">
-            <a:schemeClr val="accent1"/>
-          </a:fillRef>
-          <a:effectRef idx="2">
-            <a:schemeClr val="accent1"/>
-          </a:effectRef>
-          <a:fontRef idx="minor">
-            <a:schemeClr val="lt1"/>
-          </a:fontRef>
-        </p:style>
-        <p:txBody>
-          <a:bodyPr rtlCol="0" anchor="ctr"/>
-          <a:lstStyle/>
-          <a:p>
-            <a:pPr algn="ctr"/>
-          </a:p>
-        </p:txBody>
-      </p:sp>
-      <p:pic>
-        <p:nvPicPr>
-          <p:cNvPr id="9" name="Picture 8" descr="oracle_livesql.png"/>
-          <p:cNvPicPr>
-            <a:picLocks noChangeAspect="1"/>
-          </p:cNvPicPr>
-          <p:nvPr/>
-        </p:nvPicPr>
-        <p:blipFill>
-          <a:blip r:embed="rId2"/>
-          <a:stretch>
-            <a:fillRect/>
-          </a:stretch>
-        </p:blipFill>
-        <p:spPr>
-          <a:xfrm>
-            <a:off x="1643329" y="1847087"/>
-            <a:ext cx="1252728" cy="1252728"/>
-          </a:xfrm>
-          <a:prstGeom prst="rect">
-            <a:avLst/>
-          </a:prstGeom>
-        </p:spPr>
-      </p:pic>
-      <p:sp>
-        <p:nvSpPr>
-          <p:cNvPr id="10" name="TextBox 9"/>
+              <a:t>La pregunta 4 son 15 puntos y no pide codigo: pide ubicar cada validacion en su capa y justificar por que ahi</a:t>
+            </a:r>
+          </a:p>
+        </p:txBody>
+      </p:sp>
+      <p:sp>
+        <p:nvSpPr>
+          <p:cNvPr id="6" name="TextBox 5"/>
           <p:cNvSpPr txBox="1"/>
           <p:nvPr/>
         </p:nvSpPr>
         <p:spPr>
           <a:xfrm>
-            <a:off x="530352" y="3191256"/>
-            <a:ext cx="3478682" cy="621792"/>
+            <a:off x="457200" y="1380744"/>
+            <a:ext cx="11277295" cy="5020056"/>
           </a:xfrm>
           <a:prstGeom prst="rect">
             <a:avLst/>
@@ -8942,449 +12275,230 @@
           <a:noFill/>
         </p:spPr>
         <p:txBody>
-          <a:bodyPr wrap="square" anchor="t"/>
-          <a:lstStyle/>
-          <a:p>
-            <a:pPr algn="ctr"/>
+          <a:bodyPr wrap="square">
+            <a:spAutoFit/>
+          </a:bodyPr>
+          <a:lstStyle/>
+          <a:p>
+            <a:pPr>
+              <a:spcAft>
+                <a:spcPts val="800"/>
+              </a:spcAft>
+            </a:pPr>
+            <a:r>
+              <a:rPr sz="1300" b="0" i="0">
+                <a:solidFill>
+                  <a:srgbClr val="333333"/>
+                </a:solidFill>
+                <a:latin typeface="Calibri"/>
+              </a:rPr>
+              <a:t>–   </a:t>
+            </a:r>
             <a:r>
               <a:rPr sz="1300" b="1" i="0">
                 <a:solidFill>
-                  <a:srgbClr val="095292"/>
-                </a:solidFill>
-                <a:latin typeface="Calibri"/>
-              </a:rPr>
-              <a:t>Oracle Live SQL</a:t>
-            </a:r>
-          </a:p>
-          <a:p>
-            <a:pPr algn="ctr">
-              <a:spcBef>
-                <a:spcPts val="200"/>
-              </a:spcBef>
+                  <a:srgbClr val="333333"/>
+                </a:solidFill>
+                <a:latin typeface="Calibri"/>
+              </a:rPr>
+              <a:t>«CHECK»: una sola fila, una sola columna.</a:t>
+            </a:r>
+            <a:r>
+              <a:rPr sz="1300" b="0" i="0">
+                <a:solidFill>
+                  <a:srgbClr val="333333"/>
+                </a:solidFill>
+                <a:latin typeface="Calibri"/>
+              </a:rPr>
+              <a:t> «stock &gt;= 0», «precio &gt; 0», «estado IN (...)». Es lo mas barato y lo mas dificil de saltarse, porque lo aplica el motor sin una linea de codigo. </a:t>
+            </a:r>
+            <a:r>
+              <a:rPr sz="1300" b="1" i="0">
+                <a:solidFill>
+                  <a:srgbClr val="333333"/>
+                </a:solidFill>
+                <a:latin typeface="Calibri"/>
+              </a:rPr>
+              <a:t>Si la regla cabe en un CHECK, no se hace trigger.</a:t>
+            </a:r>
+          </a:p>
+          <a:p>
+            <a:pPr>
+              <a:spcAft>
+                <a:spcPts val="800"/>
+              </a:spcAft>
             </a:pPr>
             <a:r>
-              <a:rPr sz="1000" b="0" i="0">
-                <a:solidFill>
-                  <a:srgbClr val="666666"/>
-                </a:solidFill>
-                <a:latin typeface="Calibri"/>
-              </a:rPr>
-              <a:t>Fn/trigger</a:t>
-            </a:r>
-          </a:p>
-        </p:txBody>
-      </p:sp>
-      <p:sp>
-        <p:nvSpPr>
-          <p:cNvPr id="11" name="Rounded Rectangle 10"/>
-          <p:cNvSpPr/>
-          <p:nvPr/>
-        </p:nvSpPr>
-        <p:spPr>
-          <a:xfrm>
-            <a:off x="4283354" y="1591056"/>
-            <a:ext cx="3624986" cy="2331720"/>
-          </a:xfrm>
-          <a:prstGeom prst="roundRect">
-            <a:avLst>
-              <a:gd name="adj" fmla="val 12000"/>
-            </a:avLst>
-          </a:prstGeom>
-          <a:solidFill>
-            <a:srgbClr val="F2F2F2"/>
-          </a:solidFill>
-          <a:ln>
-            <a:noFill/>
-          </a:ln>
-        </p:spPr>
-        <p:style>
-          <a:lnRef idx="1">
-            <a:schemeClr val="accent1"/>
-          </a:lnRef>
-          <a:fillRef idx="3">
-            <a:schemeClr val="accent1"/>
-          </a:fillRef>
-          <a:effectRef idx="2">
-            <a:schemeClr val="accent1"/>
-          </a:effectRef>
-          <a:fontRef idx="minor">
-            <a:schemeClr val="lt1"/>
-          </a:fontRef>
-        </p:style>
-        <p:txBody>
-          <a:bodyPr rtlCol="0" anchor="ctr"/>
-          <a:lstStyle/>
-          <a:p>
-            <a:pPr algn="ctr"/>
-          </a:p>
-        </p:txBody>
-      </p:sp>
-      <p:sp>
-        <p:nvSpPr>
-          <p:cNvPr id="12" name="Rectangle 11"/>
-          <p:cNvSpPr/>
-          <p:nvPr/>
-        </p:nvSpPr>
-        <p:spPr>
-          <a:xfrm>
-            <a:off x="4283354" y="1591056"/>
-            <a:ext cx="3624986" cy="64008"/>
-          </a:xfrm>
-          <a:prstGeom prst="rect">
-            <a:avLst/>
-          </a:prstGeom>
-          <a:solidFill>
-            <a:srgbClr val="095292"/>
-          </a:solidFill>
-          <a:ln>
-            <a:noFill/>
-          </a:ln>
-        </p:spPr>
-        <p:style>
-          <a:lnRef idx="1">
-            <a:schemeClr val="accent1"/>
-          </a:lnRef>
-          <a:fillRef idx="3">
-            <a:schemeClr val="accent1"/>
-          </a:fillRef>
-          <a:effectRef idx="2">
-            <a:schemeClr val="accent1"/>
-          </a:effectRef>
-          <a:fontRef idx="minor">
-            <a:schemeClr val="lt1"/>
-          </a:fontRef>
-        </p:style>
-        <p:txBody>
-          <a:bodyPr rtlCol="0" anchor="ctr"/>
-          <a:lstStyle/>
-          <a:p>
-            <a:pPr algn="ctr"/>
-          </a:p>
-        </p:txBody>
-      </p:sp>
-      <p:sp>
-        <p:nvSpPr>
-          <p:cNvPr id="13" name="Rectangle 12"/>
-          <p:cNvSpPr/>
-          <p:nvPr/>
-        </p:nvSpPr>
-        <p:spPr>
-          <a:xfrm>
-            <a:off x="4283354" y="1655064"/>
-            <a:ext cx="3624986" cy="27432"/>
-          </a:xfrm>
-          <a:prstGeom prst="rect">
-            <a:avLst/>
-          </a:prstGeom>
-          <a:solidFill>
-            <a:srgbClr val="FFD000"/>
-          </a:solidFill>
-          <a:ln>
-            <a:noFill/>
-          </a:ln>
-        </p:spPr>
-        <p:style>
-          <a:lnRef idx="1">
-            <a:schemeClr val="accent1"/>
-          </a:lnRef>
-          <a:fillRef idx="3">
-            <a:schemeClr val="accent1"/>
-          </a:fillRef>
-          <a:effectRef idx="2">
-            <a:schemeClr val="accent1"/>
-          </a:effectRef>
-          <a:fontRef idx="minor">
-            <a:schemeClr val="lt1"/>
-          </a:fontRef>
-        </p:style>
-        <p:txBody>
-          <a:bodyPr rtlCol="0" anchor="ctr"/>
-          <a:lstStyle/>
-          <a:p>
-            <a:pPr algn="ctr"/>
-          </a:p>
-        </p:txBody>
-      </p:sp>
-      <p:pic>
-        <p:nvPicPr>
-          <p:cNvPr id="14" name="Picture 13" descr="dbfiddle.png"/>
-          <p:cNvPicPr>
-            <a:picLocks noChangeAspect="1"/>
-          </p:cNvPicPr>
-          <p:nvPr/>
-        </p:nvPicPr>
-        <p:blipFill>
-          <a:blip r:embed="rId3"/>
-          <a:stretch>
-            <a:fillRect/>
-          </a:stretch>
-        </p:blipFill>
-        <p:spPr>
-          <a:xfrm>
-            <a:off x="5469483" y="1847087"/>
-            <a:ext cx="1252728" cy="1252728"/>
-          </a:xfrm>
-          <a:prstGeom prst="rect">
-            <a:avLst/>
-          </a:prstGeom>
-        </p:spPr>
-      </p:pic>
-      <p:sp>
-        <p:nvSpPr>
-          <p:cNvPr id="15" name="TextBox 14"/>
-          <p:cNvSpPr txBox="1"/>
-          <p:nvPr/>
-        </p:nvSpPr>
-        <p:spPr>
-          <a:xfrm>
-            <a:off x="4356506" y="3191256"/>
-            <a:ext cx="3478682" cy="621792"/>
-          </a:xfrm>
-          <a:prstGeom prst="rect">
-            <a:avLst/>
-          </a:prstGeom>
-          <a:noFill/>
-        </p:spPr>
-        <p:txBody>
-          <a:bodyPr wrap="square" anchor="t"/>
-          <a:lstStyle/>
-          <a:p>
-            <a:pPr algn="ctr"/>
+              <a:rPr sz="1300" b="0" i="0">
+                <a:solidFill>
+                  <a:srgbClr val="333333"/>
+                </a:solidFill>
+                <a:latin typeface="Calibri"/>
+              </a:rPr>
+              <a:t>–   </a:t>
+            </a:r>
             <a:r>
               <a:rPr sz="1300" b="1" i="0">
                 <a:solidFill>
-                  <a:srgbClr val="095292"/>
-                </a:solidFill>
-                <a:latin typeface="Calibri"/>
-              </a:rPr>
-              <a:t>DB Fiddle</a:t>
-            </a:r>
-          </a:p>
-          <a:p>
-            <a:pPr algn="ctr">
-              <a:spcBef>
-                <a:spcPts val="200"/>
-              </a:spcBef>
+                  <a:srgbClr val="333333"/>
+                </a:solidFill>
+                <a:latin typeface="Calibri"/>
+              </a:rPr>
+              <a:t>«UNIQUE» y «FK»: la relacion entre filas o entre tablas.</a:t>
+            </a:r>
+            <a:r>
+              <a:rPr sz="1300" b="0" i="0">
+                <a:solidFill>
+                  <a:srgbClr val="333333"/>
+                </a:solidFill>
+                <a:latin typeface="Calibri"/>
+              </a:rPr>
+              <a:t> «un veterinario no puede tener dos citas en la misma franja» es «UNIQUE (id_veterinario, fecha_hora)», no un trigger.</a:t>
+            </a:r>
+          </a:p>
+          <a:p>
+            <a:pPr>
+              <a:spcAft>
+                <a:spcPts val="800"/>
+              </a:spcAft>
             </a:pPr>
             <a:r>
-              <a:rPr sz="1000" b="0" i="0">
-                <a:solidFill>
-                  <a:srgbClr val="666666"/>
-                </a:solidFill>
-                <a:latin typeface="Calibri"/>
-              </a:rPr>
-              <a:t>Pruebas</a:t>
-            </a:r>
-          </a:p>
-        </p:txBody>
-      </p:sp>
-      <p:sp>
-        <p:nvSpPr>
-          <p:cNvPr id="16" name="Rounded Rectangle 15"/>
-          <p:cNvSpPr/>
-          <p:nvPr/>
-        </p:nvSpPr>
-        <p:spPr>
-          <a:xfrm>
-            <a:off x="8109508" y="1591056"/>
-            <a:ext cx="3624986" cy="2331720"/>
-          </a:xfrm>
-          <a:prstGeom prst="roundRect">
-            <a:avLst>
-              <a:gd name="adj" fmla="val 12000"/>
-            </a:avLst>
-          </a:prstGeom>
-          <a:solidFill>
-            <a:srgbClr val="F2F2F2"/>
-          </a:solidFill>
-          <a:ln>
-            <a:noFill/>
-          </a:ln>
-        </p:spPr>
-        <p:style>
-          <a:lnRef idx="1">
-            <a:schemeClr val="accent1"/>
-          </a:lnRef>
-          <a:fillRef idx="3">
-            <a:schemeClr val="accent1"/>
-          </a:fillRef>
-          <a:effectRef idx="2">
-            <a:schemeClr val="accent1"/>
-          </a:effectRef>
-          <a:fontRef idx="minor">
-            <a:schemeClr val="lt1"/>
-          </a:fontRef>
-        </p:style>
-        <p:txBody>
-          <a:bodyPr rtlCol="0" anchor="ctr"/>
-          <a:lstStyle/>
-          <a:p>
-            <a:pPr algn="ctr"/>
-          </a:p>
-        </p:txBody>
-      </p:sp>
-      <p:sp>
-        <p:nvSpPr>
-          <p:cNvPr id="17" name="Rectangle 16"/>
-          <p:cNvSpPr/>
-          <p:nvPr/>
-        </p:nvSpPr>
-        <p:spPr>
-          <a:xfrm>
-            <a:off x="8109508" y="1591056"/>
-            <a:ext cx="3624986" cy="64008"/>
-          </a:xfrm>
-          <a:prstGeom prst="rect">
-            <a:avLst/>
-          </a:prstGeom>
-          <a:solidFill>
-            <a:srgbClr val="095292"/>
-          </a:solidFill>
-          <a:ln>
-            <a:noFill/>
-          </a:ln>
-        </p:spPr>
-        <p:style>
-          <a:lnRef idx="1">
-            <a:schemeClr val="accent1"/>
-          </a:lnRef>
-          <a:fillRef idx="3">
-            <a:schemeClr val="accent1"/>
-          </a:fillRef>
-          <a:effectRef idx="2">
-            <a:schemeClr val="accent1"/>
-          </a:effectRef>
-          <a:fontRef idx="minor">
-            <a:schemeClr val="lt1"/>
-          </a:fontRef>
-        </p:style>
-        <p:txBody>
-          <a:bodyPr rtlCol="0" anchor="ctr"/>
-          <a:lstStyle/>
-          <a:p>
-            <a:pPr algn="ctr"/>
-          </a:p>
-        </p:txBody>
-      </p:sp>
-      <p:sp>
-        <p:nvSpPr>
-          <p:cNvPr id="18" name="Rectangle 17"/>
-          <p:cNvSpPr/>
-          <p:nvPr/>
-        </p:nvSpPr>
-        <p:spPr>
-          <a:xfrm>
-            <a:off x="8109508" y="1655064"/>
-            <a:ext cx="3624986" cy="27432"/>
-          </a:xfrm>
-          <a:prstGeom prst="rect">
-            <a:avLst/>
-          </a:prstGeom>
-          <a:solidFill>
-            <a:srgbClr val="FFD000"/>
-          </a:solidFill>
-          <a:ln>
-            <a:noFill/>
-          </a:ln>
-        </p:spPr>
-        <p:style>
-          <a:lnRef idx="1">
-            <a:schemeClr val="accent1"/>
-          </a:lnRef>
-          <a:fillRef idx="3">
-            <a:schemeClr val="accent1"/>
-          </a:fillRef>
-          <a:effectRef idx="2">
-            <a:schemeClr val="accent1"/>
-          </a:effectRef>
-          <a:fontRef idx="minor">
-            <a:schemeClr val="lt1"/>
-          </a:fontRef>
-        </p:style>
-        <p:txBody>
-          <a:bodyPr rtlCol="0" anchor="ctr"/>
-          <a:lstStyle/>
-          <a:p>
-            <a:pPr algn="ctr"/>
-          </a:p>
-        </p:txBody>
-      </p:sp>
-      <p:pic>
-        <p:nvPicPr>
-          <p:cNvPr id="19" name="Picture 18" descr="google_docs.png"/>
-          <p:cNvPicPr>
-            <a:picLocks noChangeAspect="1"/>
-          </p:cNvPicPr>
-          <p:nvPr/>
-        </p:nvPicPr>
-        <p:blipFill>
-          <a:blip r:embed="rId4"/>
-          <a:stretch>
-            <a:fillRect/>
-          </a:stretch>
-        </p:blipFill>
-        <p:spPr>
-          <a:xfrm>
-            <a:off x="9295638" y="1847087"/>
-            <a:ext cx="1252728" cy="1252728"/>
-          </a:xfrm>
-          <a:prstGeom prst="rect">
-            <a:avLst/>
-          </a:prstGeom>
-        </p:spPr>
-      </p:pic>
-      <p:sp>
-        <p:nvSpPr>
-          <p:cNvPr id="20" name="TextBox 19"/>
-          <p:cNvSpPr txBox="1"/>
-          <p:nvPr/>
-        </p:nvSpPr>
-        <p:spPr>
-          <a:xfrm>
-            <a:off x="8182660" y="3191256"/>
-            <a:ext cx="3478682" cy="621792"/>
-          </a:xfrm>
-          <a:prstGeom prst="rect">
-            <a:avLst/>
-          </a:prstGeom>
-          <a:noFill/>
-        </p:spPr>
-        <p:txBody>
-          <a:bodyPr wrap="square" anchor="t"/>
-          <a:lstStyle/>
-          <a:p>
-            <a:pPr algn="ctr"/>
+              <a:rPr sz="1300" b="0" i="0">
+                <a:solidFill>
+                  <a:srgbClr val="333333"/>
+                </a:solidFill>
+                <a:latin typeface="Calibri"/>
+              </a:rPr>
+              <a:t>–   </a:t>
+            </a:r>
             <a:r>
               <a:rPr sz="1300" b="1" i="0">
                 <a:solidFill>
-                  <a:srgbClr val="095292"/>
-                </a:solidFill>
-                <a:latin typeface="Calibri"/>
-              </a:rPr>
-              <a:t>Google Docs</a:t>
-            </a:r>
-          </a:p>
-          <a:p>
-            <a:pPr algn="ctr">
-              <a:spcBef>
-                <a:spcPts val="200"/>
-              </a:spcBef>
+                  <a:srgbClr val="333333"/>
+                </a:solidFill>
+                <a:latin typeface="Calibri"/>
+              </a:rPr>
+              <a:t>Trigger: cuando la regla necesita OTRA fila u OTRA tabla.</a:t>
+            </a:r>
+            <a:r>
+              <a:rPr sz="1300" b="0" i="0">
+                <a:solidFill>
+                  <a:srgbClr val="333333"/>
+                </a:solidFill>
+                <a:latin typeface="Calibri"/>
+              </a:rPr>
+              <a:t> Comparar «OLD» con «NEW», mirar el stock de «insumo» mientras se actualiza otra tabla, o </a:t>
+            </a:r>
+            <a:r>
+              <a:rPr sz="1300" b="1" i="0">
+                <a:solidFill>
+                  <a:srgbClr val="333333"/>
+                </a:solidFill>
+                <a:latin typeface="Calibri"/>
+              </a:rPr>
+              <a:t>escribir en una segunda tabla</a:t>
+            </a:r>
+            <a:r>
+              <a:rPr sz="1300" b="0" i="0">
+                <a:solidFill>
+                  <a:srgbClr val="333333"/>
+                </a:solidFill>
+                <a:latin typeface="Calibri"/>
+              </a:rPr>
+              <a:t> (auditoria). Nada de eso cabe en un «CHECK».</a:t>
+            </a:r>
+          </a:p>
+          <a:p>
+            <a:pPr>
+              <a:spcAft>
+                <a:spcPts val="800"/>
+              </a:spcAft>
             </a:pPr>
             <a:r>
-              <a:rPr sz="1000" b="0" i="0">
-                <a:solidFill>
-                  <a:srgbClr val="666666"/>
-                </a:solidFill>
-                <a:latin typeface="Calibri"/>
-              </a:rPr>
-              <a:t>Plan backup</a:t>
-            </a:r>
-          </a:p>
-        </p:txBody>
-      </p:sp>
-      <p:sp>
-        <p:nvSpPr>
-          <p:cNvPr id="21" name="TextBox 20"/>
+              <a:rPr sz="1300" b="0" i="0">
+                <a:solidFill>
+                  <a:srgbClr val="333333"/>
+                </a:solidFill>
+                <a:latin typeface="Calibri"/>
+              </a:rPr>
+              <a:t>–   </a:t>
+            </a:r>
+            <a:r>
+              <a:rPr sz="1300" b="1" i="0">
+                <a:solidFill>
+                  <a:srgbClr val="333333"/>
+                </a:solidFill>
+                <a:latin typeface="Calibri"/>
+              </a:rPr>
+              <a:t>Aplicacion: solo lo que la base no puede saber.</a:t>
+            </a:r>
+            <a:r>
+              <a:rPr sz="1300" b="0" i="0">
+                <a:solidFill>
+                  <a:srgbClr val="333333"/>
+                </a:solidFill>
+                <a:latin typeface="Calibri"/>
+              </a:rPr>
+              <a:t> El formato del correo, el permiso de la pantalla, la traduccion del mensaje. Y el criterio para decidir: </a:t>
+            </a:r>
+            <a:r>
+              <a:rPr sz="1300" b="1" i="0">
+                <a:solidFill>
+                  <a:srgbClr val="333333"/>
+                </a:solidFill>
+                <a:latin typeface="Calibri"/>
+              </a:rPr>
+              <a:t>una validacion que solo vive en la app se salta conectandose por «psql»</a:t>
+            </a:r>
+            <a:r>
+              <a:rPr sz="1300" b="0" i="0">
+                <a:solidFill>
+                  <a:srgbClr val="333333"/>
+                </a:solidFill>
+                <a:latin typeface="Calibri"/>
+              </a:rPr>
+              <a:t>.</a:t>
+            </a:r>
+          </a:p>
+          <a:p>
+            <a:pPr>
+              <a:spcAft>
+                <a:spcPts val="800"/>
+              </a:spcAft>
+            </a:pPr>
+            <a:r>
+              <a:rPr sz="1300" b="0" i="0">
+                <a:solidFill>
+                  <a:srgbClr val="333333"/>
+                </a:solidFill>
+                <a:latin typeface="Calibri"/>
+              </a:rPr>
+              <a:t>–   </a:t>
+            </a:r>
+            <a:r>
+              <a:rPr sz="1300" b="1" i="0">
+                <a:solidFill>
+                  <a:srgbClr val="333333"/>
+                </a:solidFill>
+                <a:latin typeface="Calibri"/>
+              </a:rPr>
+              <a:t>BEFORE valida, AFTER audita.</a:t>
+            </a:r>
+            <a:r>
+              <a:rPr sz="1300" b="0" i="0">
+                <a:solidFill>
+                  <a:srgbClr val="333333"/>
+                </a:solidFill>
+                <a:latin typeface="Calibri"/>
+              </a:rPr>
+              <a:t> Un trigger que rechaza corre «BEFORE», porque despues el dato ya esta escrito; uno que registra un hecho consumado corre «AFTER». Poner «AFTER» en el de stock es el error mas comun del dia.</a:t>
+            </a:r>
+          </a:p>
+        </p:txBody>
+      </p:sp>
+      <p:sp>
+        <p:nvSpPr>
+          <p:cNvPr id="7" name="TextBox 6"/>
           <p:cNvSpPr txBox="1"/>
           <p:nvPr/>
         </p:nvSpPr>
@@ -9452,7 +12566,7 @@
         <p:spPr>
           <a:xfrm>
             <a:off x="0" y="0"/>
-            <a:ext cx="12191695" cy="960120"/>
+            <a:ext cx="12191695" cy="1170432"/>
           </a:xfrm>
           <a:prstGeom prst="rect">
             <a:avLst/>
@@ -9494,7 +12608,7 @@
         </p:nvSpPr>
         <p:spPr>
           <a:xfrm>
-            <a:off x="0" y="960120"/>
+            <a:off x="0" y="1170432"/>
             <a:ext cx="12191695" cy="41148"/>
           </a:xfrm>
           <a:prstGeom prst="rect">
@@ -9538,7 +12652,7 @@
         <p:spPr>
           <a:xfrm>
             <a:off x="457200" y="164592"/>
-            <a:ext cx="11277295" cy="502920"/>
+            <a:ext cx="11277295" cy="384048"/>
           </a:xfrm>
           <a:prstGeom prst="rect">
             <a:avLst/>
@@ -9558,7 +12672,7 @@
                 </a:solidFill>
                 <a:latin typeface="Calibri"/>
               </a:rPr>
-              <a:t>Taller PI VetCare — contexto / por que importa</a:t>
+              <a:t>Plan de respaldo: 6 secciones y herramientas reales de PostgreSQL</a:t>
             </a:r>
           </a:p>
         </p:txBody>
@@ -9571,8 +12685,42 @@
         </p:nvSpPr>
         <p:spPr>
           <a:xfrm>
-            <a:off x="457200" y="1170432"/>
-            <a:ext cx="11277295" cy="5230368"/>
+            <a:off x="457200" y="566928"/>
+            <a:ext cx="11277295" cy="411480"/>
+          </a:xfrm>
+          <a:prstGeom prst="rect">
+            <a:avLst/>
+          </a:prstGeom>
+          <a:noFill/>
+        </p:spPr>
+        <p:txBody>
+          <a:bodyPr wrap="square">
+            <a:spAutoFit/>
+          </a:bodyPr>
+          <a:lstStyle/>
+          <a:p>
+            <a:r>
+              <a:rPr sz="1400" b="0" i="0">
+                <a:solidFill>
+                  <a:srgbClr val="B8D8EE"/>
+                </a:solidFill>
+                <a:latin typeface="Calibri"/>
+              </a:rPr>
+              <a:t>Son 25 de los 100 puntos de la clase y se califican seccion por seccion. La plantilla en blanco esta en el Taller del PI</a:t>
+            </a:r>
+          </a:p>
+        </p:txBody>
+      </p:sp>
+      <p:sp>
+        <p:nvSpPr>
+          <p:cNvPr id="6" name="TextBox 5"/>
+          <p:cNvSpPr txBox="1"/>
+          <p:nvPr/>
+        </p:nvSpPr>
+        <p:spPr>
+          <a:xfrm>
+            <a:off x="457200" y="1380744"/>
+            <a:ext cx="11277295" cy="5020056"/>
           </a:xfrm>
           <a:prstGeom prst="rect">
             <a:avLst/>
@@ -9591,7 +12739,7 @@
               </a:spcAft>
             </a:pPr>
             <a:r>
-              <a:rPr sz="1600" b="0" i="0">
+              <a:rPr sz="1300" b="0" i="0">
                 <a:solidFill>
                   <a:srgbClr val="333333"/>
                 </a:solidFill>
@@ -9600,22 +12748,40 @@
               <a:t>–   </a:t>
             </a:r>
             <a:r>
-              <a:rPr sz="1600" b="1" i="0">
-                <a:solidFill>
-                  <a:srgbClr val="333333"/>
-                </a:solidFill>
-                <a:latin typeface="Calibri"/>
-              </a:rPr>
-              <a:t>Por qué importa al PI:</a:t>
-            </a:r>
-            <a:r>
-              <a:rPr sz="1600" b="0" i="0">
-                <a:solidFill>
-                  <a:srgbClr val="333333"/>
-                </a:solidFill>
-                <a:latin typeface="Calibri"/>
-              </a:rPr>
-              <a:t> integridad + RAA1.</a:t>
+              <a:rPr sz="1300" b="1" i="0">
+                <a:solidFill>
+                  <a:srgbClr val="333333"/>
+                </a:solidFill>
+                <a:latin typeface="Calibri"/>
+              </a:rPr>
+              <a:t>1. Que se respalda y con que.</a:t>
+            </a:r>
+            <a:r>
+              <a:rPr sz="1300" b="0" i="0">
+                <a:solidFill>
+                  <a:srgbClr val="333333"/>
+                </a:solidFill>
+                <a:latin typeface="Calibri"/>
+              </a:rPr>
+              <a:t> «pg_dump -Fc -d vetcare -f vetcare_AAAAMMDD.dump» para los datos, y «pg_dumpall --globals-only» para los </a:t>
+            </a:r>
+            <a:r>
+              <a:rPr sz="1300" b="1" i="0">
+                <a:solidFill>
+                  <a:srgbClr val="333333"/>
+                </a:solidFill>
+                <a:latin typeface="Calibri"/>
+              </a:rPr>
+              <a:t>roles de la Clase 2</a:t>
+            </a:r>
+            <a:r>
+              <a:rPr sz="1300" b="0" i="0">
+                <a:solidFill>
+                  <a:srgbClr val="333333"/>
+                </a:solidFill>
+                <a:latin typeface="Calibri"/>
+              </a:rPr>
+              <a:t>: «pg_dump» es de UNA base y los roles son del cluster, asi que no los respalda. Si falta, se restaura la base y ningun rol tiene permisos.</a:t>
             </a:r>
           </a:p>
           <a:p>
@@ -9625,20 +12791,248 @@
               </a:spcAft>
             </a:pPr>
             <a:r>
-              <a:rPr sz="1600" b="0" i="0">
-                <a:solidFill>
-                  <a:srgbClr val="333333"/>
-                </a:solidFill>
-                <a:latin typeface="Calibri"/>
-              </a:rPr>
-              <a:t>–   Trigger evita inconsistencias silenciosas.</a:t>
-            </a:r>
-          </a:p>
-        </p:txBody>
-      </p:sp>
-      <p:sp>
-        <p:nvSpPr>
-          <p:cNvPr id="6" name="TextBox 5"/>
+              <a:rPr sz="1300" b="0" i="0">
+                <a:solidFill>
+                  <a:srgbClr val="333333"/>
+                </a:solidFill>
+                <a:latin typeface="Calibri"/>
+              </a:rPr>
+              <a:t>–   </a:t>
+            </a:r>
+            <a:r>
+              <a:rPr sz="1300" b="1" i="0">
+                <a:solidFill>
+                  <a:srgbClr val="333333"/>
+                </a:solidFill>
+                <a:latin typeface="Calibri"/>
+              </a:rPr>
+              <a:t>2. Frecuencia, con su razon.</a:t>
+            </a:r>
+            <a:r>
+              <a:rPr sz="1300" b="0" i="0">
+                <a:solidFill>
+                  <a:srgbClr val="333333"/>
+                </a:solidFill>
+                <a:latin typeface="Calibri"/>
+              </a:rPr>
+              <a:t> No «diario»: ««pg_dump -Fc» a las 20:30 </a:t>
+            </a:r>
+            <a:r>
+              <a:rPr sz="1300" b="1" i="0">
+                <a:solidFill>
+                  <a:srgbClr val="333333"/>
+                </a:solidFill>
+                <a:latin typeface="Calibri"/>
+              </a:rPr>
+              <a:t>porque</a:t>
+            </a:r>
+            <a:r>
+              <a:rPr sz="1300" b="0" i="0">
+                <a:solidFill>
+                  <a:srgbClr val="333333"/>
+                </a:solidFill>
+                <a:latin typeface="Calibri"/>
+              </a:rPr>
+              <a:t> la facturacion de Huellitas cierra a las 20:00». La hora se justifica con un hecho del negocio.</a:t>
+            </a:r>
+          </a:p>
+          <a:p>
+            <a:pPr>
+              <a:spcAft>
+                <a:spcPts val="800"/>
+              </a:spcAft>
+            </a:pPr>
+            <a:r>
+              <a:rPr sz="1300" b="0" i="0">
+                <a:solidFill>
+                  <a:srgbClr val="333333"/>
+                </a:solidFill>
+                <a:latin typeface="Calibri"/>
+              </a:rPr>
+              <a:t>–   </a:t>
+            </a:r>
+            <a:r>
+              <a:rPr sz="1300" b="1" i="0">
+                <a:solidFill>
+                  <a:srgbClr val="333333"/>
+                </a:solidFill>
+                <a:latin typeface="Calibri"/>
+              </a:rPr>
+              <a:t>3. Retencion</a:t>
+            </a:r>
+            <a:r>
+              <a:rPr sz="1300" b="0" i="0">
+                <a:solidFill>
+                  <a:srgbClr val="333333"/>
+                </a:solidFill>
+                <a:latin typeface="Calibri"/>
+              </a:rPr>
+              <a:t> —cuantas copias y donde: 7 diarias, 4 semanales, 12 mensuales, y </a:t>
+            </a:r>
+            <a:r>
+              <a:rPr sz="1300" b="1" i="0">
+                <a:solidFill>
+                  <a:srgbClr val="333333"/>
+                </a:solidFill>
+                <a:latin typeface="Calibri"/>
+              </a:rPr>
+              <a:t>al menos una fuera del mismo servidor</a:t>
+            </a:r>
+            <a:r>
+              <a:rPr sz="1300" b="0" i="0">
+                <a:solidFill>
+                  <a:srgbClr val="333333"/>
+                </a:solidFill>
+                <a:latin typeface="Calibri"/>
+              </a:rPr>
+              <a:t>— y </a:t>
+            </a:r>
+            <a:r>
+              <a:rPr sz="1300" b="1" i="0">
+                <a:solidFill>
+                  <a:srgbClr val="333333"/>
+                </a:solidFill>
+                <a:latin typeface="Calibri"/>
+              </a:rPr>
+              <a:t>4. RPO y RTO en numeros</a:t>
+            </a:r>
+            <a:r>
+              <a:rPr sz="1300" b="0" i="0">
+                <a:solidFill>
+                  <a:srgbClr val="333333"/>
+                </a:solidFill>
+                <a:latin typeface="Calibri"/>
+              </a:rPr>
+              <a:t>: cuantos datos se acepta perder («maximo 1 hora de citas») y cuanto puede estar caida la base. Un dump diario implica un RPO de 24 h: si no alcanza, hace falta </a:t>
+            </a:r>
+            <a:r>
+              <a:rPr sz="1300" b="1" i="0">
+                <a:solidFill>
+                  <a:srgbClr val="333333"/>
+                </a:solidFill>
+                <a:latin typeface="Calibri"/>
+              </a:rPr>
+              <a:t>archivado de WAL</a:t>
+            </a:r>
+            <a:r>
+              <a:rPr sz="1300" b="0" i="0">
+                <a:solidFill>
+                  <a:srgbClr val="333333"/>
+                </a:solidFill>
+                <a:latin typeface="Calibri"/>
+              </a:rPr>
+              <a:t>.</a:t>
+            </a:r>
+          </a:p>
+          <a:p>
+            <a:pPr>
+              <a:spcAft>
+                <a:spcPts val="800"/>
+              </a:spcAft>
+            </a:pPr>
+            <a:r>
+              <a:rPr sz="1300" b="0" i="0">
+                <a:solidFill>
+                  <a:srgbClr val="333333"/>
+                </a:solidFill>
+                <a:latin typeface="Calibri"/>
+              </a:rPr>
+              <a:t>–   </a:t>
+            </a:r>
+            <a:r>
+              <a:rPr sz="1300" b="1" i="0">
+                <a:solidFill>
+                  <a:srgbClr val="333333"/>
+                </a:solidFill>
+                <a:latin typeface="Calibri"/>
+              </a:rPr>
+              <a:t>5. Restore de prueba</a:t>
+            </a:r>
+            <a:r>
+              <a:rPr sz="1300" b="0" i="0">
+                <a:solidFill>
+                  <a:srgbClr val="333333"/>
+                </a:solidFill>
+                <a:latin typeface="Calibri"/>
+              </a:rPr>
+              <a:t> con «pg_restore» sobre una base vacia: fecha, duracion medida, la consulta que confirma el conteo, cada cuanto se ensaya y quien firma. </a:t>
+            </a:r>
+            <a:r>
+              <a:rPr sz="1300" b="1" i="0">
+                <a:solidFill>
+                  <a:srgbClr val="333333"/>
+                </a:solidFill>
+                <a:latin typeface="Calibri"/>
+              </a:rPr>
+              <a:t>Un respaldo que nunca se restauro no es un respaldo:</a:t>
+            </a:r>
+            <a:r>
+              <a:rPr sz="1300" b="0" i="0">
+                <a:solidFill>
+                  <a:srgbClr val="333333"/>
+                </a:solidFill>
+                <a:latin typeface="Calibri"/>
+              </a:rPr>
+              <a:t> es un archivo.</a:t>
+            </a:r>
+          </a:p>
+          <a:p>
+            <a:pPr>
+              <a:spcAft>
+                <a:spcPts val="800"/>
+              </a:spcAft>
+            </a:pPr>
+            <a:r>
+              <a:rPr sz="1300" b="0" i="0">
+                <a:solidFill>
+                  <a:srgbClr val="333333"/>
+                </a:solidFill>
+                <a:latin typeface="Calibri"/>
+              </a:rPr>
+              <a:t>–   </a:t>
+            </a:r>
+            <a:r>
+              <a:rPr sz="1300" b="1" i="0">
+                <a:solidFill>
+                  <a:srgbClr val="333333"/>
+                </a:solidFill>
+                <a:latin typeface="Calibri"/>
+              </a:rPr>
+              <a:t>6. Que NO cubre el plan</a:t>
+            </a:r>
+            <a:r>
+              <a:rPr sz="1300" b="0" i="0">
+                <a:solidFill>
+                  <a:srgbClr val="333333"/>
+                </a:solidFill>
+                <a:latin typeface="Calibri"/>
+              </a:rPr>
+              <a:t> y cual es el riesgo residual que se asume: el borrado por error que se descubre tres dias despues, la hora de citas que cabe en el RPO. </a:t>
+            </a:r>
+            <a:r>
+              <a:rPr sz="1300" b="1" i="0">
+                <a:solidFill>
+                  <a:srgbClr val="333333"/>
+                </a:solidFill>
+                <a:latin typeface="Calibri"/>
+              </a:rPr>
+              <a:t>Es la seccion que separa un plan de una lista de comandos</a:t>
+            </a:r>
+            <a:r>
+              <a:rPr sz="1300" b="0" i="0">
+                <a:solidFill>
+                  <a:srgbClr val="333333"/>
+                </a:solidFill>
+                <a:latin typeface="Calibri"/>
+              </a:rPr>
+              <a:t>, y la que mas se olvida.</a:t>
+            </a:r>
+          </a:p>
+        </p:txBody>
+      </p:sp>
+      <p:sp>
+        <p:nvSpPr>
+          <p:cNvPr id="7" name="TextBox 6"/>
           <p:cNvSpPr txBox="1"/>
           <p:nvPr/>
         </p:nvSpPr>
@@ -9812,7 +13206,7 @@
                 </a:solidFill>
                 <a:latin typeface="Calibri"/>
               </a:rPr>
-              <a:t>Taller PI VetCare — objetivo y criterios</a:t>
+              <a:t>Demo del dia</a:t>
             </a:r>
           </a:p>
         </p:txBody>
@@ -9845,7 +13239,7 @@
               </a:spcAft>
             </a:pPr>
             <a:r>
-              <a:rPr sz="1500" b="0" i="0">
+              <a:rPr sz="1600" b="0" i="0">
                 <a:solidFill>
                   <a:srgbClr val="333333"/>
                 </a:solidFill>
@@ -9854,22 +13248,22 @@
               <a:t>–   </a:t>
             </a:r>
             <a:r>
-              <a:rPr sz="1500" b="1" i="0">
-                <a:solidFill>
-                  <a:srgbClr val="333333"/>
-                </a:solidFill>
-                <a:latin typeface="Calibri"/>
-              </a:rPr>
-              <a:t>Objetivo:</a:t>
-            </a:r>
-            <a:r>
-              <a:rPr sz="1500" b="0" i="0">
-                <a:solidFill>
-                  <a:srgbClr val="333333"/>
-                </a:solidFill>
-                <a:latin typeface="Calibri"/>
-              </a:rPr>
-              <a:t> &gt;=1 funcion + &gt;=1 trigger + plan backup.</a:t>
+              <a:rPr sz="1600" b="1" i="0">
+                <a:solidFill>
+                  <a:srgbClr val="333333"/>
+                </a:solidFill>
+                <a:latin typeface="Calibri"/>
+              </a:rPr>
+              <a:t>Herramienta:</a:t>
+            </a:r>
+            <a:r>
+              <a:rPr sz="1600" b="0" i="0">
+                <a:solidFill>
+                  <a:srgbClr val="333333"/>
+                </a:solidFill>
+                <a:latin typeface="Calibri"/>
+              </a:rPr>
+              <a:t> ExamLab (PostgreSQL) + Google Docs</a:t>
             </a:r>
           </a:p>
           <a:p>
@@ -9879,7 +13273,7 @@
               </a:spcAft>
             </a:pPr>
             <a:r>
-              <a:rPr sz="1500" b="0" i="0">
+              <a:rPr sz="1600" b="0" i="0">
                 <a:solidFill>
                   <a:srgbClr val="333333"/>
                 </a:solidFill>
@@ -9888,22 +13282,22 @@
               <a:t>–   </a:t>
             </a:r>
             <a:r>
-              <a:rPr sz="1500" b="1" i="0">
-                <a:solidFill>
-                  <a:srgbClr val="333333"/>
-                </a:solidFill>
-                <a:latin typeface="Calibri"/>
-              </a:rPr>
-              <a:t>Exito:</a:t>
-            </a:r>
-            <a:r>
-              <a:rPr sz="1500" b="0" i="0">
-                <a:solidFill>
-                  <a:srgbClr val="333333"/>
-                </a:solidFill>
-                <a:latin typeface="Calibri"/>
-              </a:rPr>
-              <a:t> Funcion util.</a:t>
+              <a:rPr sz="1600" b="1" i="0">
+                <a:solidFill>
+                  <a:srgbClr val="333333"/>
+                </a:solidFill>
+                <a:latin typeface="Calibri"/>
+              </a:rPr>
+              <a:t>Demo:</a:t>
+            </a:r>
+            <a:r>
+              <a:rPr sz="1600" b="0" i="0">
+                <a:solidFill>
+                  <a:srgbClr val="333333"/>
+                </a:solidFill>
+                <a:latin typeface="Calibri"/>
+              </a:rPr>
+              <a:t> fn_precio_consulta + fn_trg_audit_cita con su CREATE TRIGGER ... EXECUTE FUNCTION, en ExamLab, y el esqueleto del plan de respaldo.</a:t>
             </a:r>
           </a:p>
           <a:p>
@@ -9913,31 +13307,13 @@
               </a:spcAft>
             </a:pPr>
             <a:r>
-              <a:rPr sz="1500" b="0" i="0">
-                <a:solidFill>
-                  <a:srgbClr val="333333"/>
-                </a:solidFill>
-                <a:latin typeface="Calibri"/>
-              </a:rPr>
-              <a:t>–   </a:t>
-            </a:r>
-            <a:r>
-              <a:rPr sz="1500" b="1" i="0">
-                <a:solidFill>
-                  <a:srgbClr val="333333"/>
-                </a:solidFill>
-                <a:latin typeface="Calibri"/>
-              </a:rPr>
-              <a:t>Exito:</a:t>
-            </a:r>
-            <a:r>
-              <a:rPr sz="1500" b="0" i="0">
-                <a:solidFill>
-                  <a:srgbClr val="333333"/>
-                </a:solidFill>
-                <a:latin typeface="Calibri"/>
-              </a:rPr>
-              <a:t> Trigger auditoria/stock.</a:t>
+              <a:rPr sz="1600" b="0" i="0">
+                <a:solidFill>
+                  <a:srgbClr val="333333"/>
+                </a:solidFill>
+                <a:latin typeface="Calibri"/>
+              </a:rPr>
+              <a:t>–   Sigan el mismo dominio VetCare (no inventen otro caso).</a:t>
             </a:r>
           </a:p>
           <a:p>
@@ -9947,65 +13323,13 @@
               </a:spcAft>
             </a:pPr>
             <a:r>
-              <a:rPr sz="1500" b="0" i="0">
-                <a:solidFill>
-                  <a:srgbClr val="333333"/>
-                </a:solidFill>
-                <a:latin typeface="Calibri"/>
-              </a:rPr>
-              <a:t>–   </a:t>
-            </a:r>
-            <a:r>
-              <a:rPr sz="1500" b="1" i="0">
-                <a:solidFill>
-                  <a:srgbClr val="333333"/>
-                </a:solidFill>
-                <a:latin typeface="Calibri"/>
-              </a:rPr>
-              <a:t>Exito:</a:t>
-            </a:r>
-            <a:r>
-              <a:rPr sz="1500" b="0" i="0">
-                <a:solidFill>
-                  <a:srgbClr val="333333"/>
-                </a:solidFill>
-                <a:latin typeface="Calibri"/>
-              </a:rPr>
-              <a:t> Plan backup 1 pag.</a:t>
-            </a:r>
-          </a:p>
-          <a:p>
-            <a:pPr>
-              <a:spcAft>
-                <a:spcPts val="800"/>
-              </a:spcAft>
-            </a:pPr>
-            <a:r>
-              <a:rPr sz="1500" b="0" i="0">
-                <a:solidFill>
-                  <a:srgbClr val="333333"/>
-                </a:solidFill>
-                <a:latin typeface="Calibri"/>
-              </a:rPr>
-              <a:t>–   </a:t>
-            </a:r>
-            <a:r>
-              <a:rPr sz="1500" b="1" i="0">
-                <a:solidFill>
-                  <a:srgbClr val="333333"/>
-                </a:solidFill>
-                <a:latin typeface="Calibri"/>
-              </a:rPr>
-              <a:t>Exito:</a:t>
-            </a:r>
-            <a:r>
-              <a:rPr sz="1500" b="0" i="0">
-                <a:solidFill>
-                  <a:srgbClr val="333333"/>
-                </a:solidFill>
-                <a:latin typeface="Calibri"/>
-              </a:rPr>
-              <a:t> Checklist PI.</a:t>
+              <a:rPr sz="1600" b="0" i="0">
+                <a:solidFill>
+                  <a:srgbClr val="333333"/>
+                </a:solidFill>
+                <a:latin typeface="Calibri"/>
+              </a:rPr>
+              <a:t>–   Al final de la demo: dejar enlace/script compartible al grupo.</a:t>
             </a:r>
           </a:p>
         </p:txBody>

--- a/Bases de Datos II/Clases/Clase 4 - Funciones disparadores seguridad respaldo/Presentacion.pptx
+++ b/Bases de Datos II/Clases/Clase 4 - Funciones disparadores seguridad respaldo/Presentacion.pptx
@@ -4687,7 +4687,7 @@
               </a:spcAft>
             </a:pPr>
             <a:r>
-              <a:rPr sz="1600" b="0" i="0">
+              <a:rPr sz="2000" b="0" i="0">
                 <a:solidFill>
                   <a:srgbClr val="333333"/>
                 </a:solidFill>
@@ -4696,7 +4696,7 @@
               <a:t>–   </a:t>
             </a:r>
             <a:r>
-              <a:rPr sz="1600" b="1" i="0">
+              <a:rPr sz="2000" b="1" i="0">
                 <a:solidFill>
                   <a:srgbClr val="333333"/>
                 </a:solidFill>
@@ -4705,7 +4705,7 @@
               <a:t>Por qué importa al PI:</a:t>
             </a:r>
             <a:r>
-              <a:rPr sz="1600" b="0" i="0">
+              <a:rPr sz="2000" b="0" i="0">
                 <a:solidFill>
                   <a:srgbClr val="333333"/>
                 </a:solidFill>
@@ -4721,7 +4721,7 @@
               </a:spcAft>
             </a:pPr>
             <a:r>
-              <a:rPr sz="1600" b="0" i="0">
+              <a:rPr sz="2000" b="0" i="0">
                 <a:solidFill>
                   <a:srgbClr val="333333"/>
                 </a:solidFill>
@@ -4730,7 +4730,7 @@
               <a:t>–   La auditoría es el único mecanismo que </a:t>
             </a:r>
             <a:r>
-              <a:rPr sz="1600" b="1" i="0">
+              <a:rPr sz="2000" b="1" i="0">
                 <a:solidFill>
                   <a:srgbClr val="333333"/>
                 </a:solidFill>
@@ -4739,7 +4739,7 @@
               <a:t>no se puede evitar olvidándose de llamarlo</a:t>
             </a:r>
             <a:r>
-              <a:rPr sz="1600" b="0" i="0">
+              <a:rPr sz="2000" b="0" i="0">
                 <a:solidFill>
                   <a:srgbClr val="333333"/>
                 </a:solidFill>
@@ -4755,7 +4755,7 @@
               </a:spcAft>
             </a:pPr>
             <a:r>
-              <a:rPr sz="1600" b="0" i="0">
+              <a:rPr sz="2000" b="0" i="0">
                 <a:solidFill>
                   <a:srgbClr val="333333"/>
                 </a:solidFill>
@@ -4764,7 +4764,7 @@
               <a:t>–   El plan de respaldo es lo que un evaluador pregunta primero: cuánto se pierde y en cuánto tiempo se vuelve a operar, con </a:t>
             </a:r>
             <a:r>
-              <a:rPr sz="1600" b="1" i="0">
+              <a:rPr sz="2000" b="1" i="0">
                 <a:solidFill>
                   <a:srgbClr val="333333"/>
                 </a:solidFill>
@@ -4773,7 +4773,7 @@
               <a:t>números</a:t>
             </a:r>
             <a:r>
-              <a:rPr sz="1600" b="0" i="0">
+              <a:rPr sz="2000" b="0" i="0">
                 <a:solidFill>
                   <a:srgbClr val="333333"/>
                 </a:solidFill>
@@ -4993,7 +4993,7 @@
               </a:spcAft>
             </a:pPr>
             <a:r>
-              <a:rPr sz="1500" b="0" i="0">
+              <a:rPr sz="2000" b="0" i="0">
                 <a:solidFill>
                   <a:srgbClr val="333333"/>
                 </a:solidFill>
@@ -5002,7 +5002,7 @@
               <a:t>–   </a:t>
             </a:r>
             <a:r>
-              <a:rPr sz="1500" b="1" i="0">
+              <a:rPr sz="2000" b="1" i="0">
                 <a:solidFill>
                   <a:srgbClr val="333333"/>
                 </a:solidFill>
@@ -5011,7 +5011,7 @@
               <a:t>Objetivo:</a:t>
             </a:r>
             <a:r>
-              <a:rPr sz="1500" b="0" i="0">
+              <a:rPr sz="2000" b="0" i="0">
                 <a:solidFill>
                   <a:srgbClr val="333333"/>
                 </a:solidFill>
@@ -5027,7 +5027,7 @@
               </a:spcAft>
             </a:pPr>
             <a:r>
-              <a:rPr sz="1500" b="0" i="0">
+              <a:rPr sz="2000" b="0" i="0">
                 <a:solidFill>
                   <a:srgbClr val="333333"/>
                 </a:solidFill>
@@ -5036,7 +5036,7 @@
               <a:t>–   </a:t>
             </a:r>
             <a:r>
-              <a:rPr sz="1500" b="1" i="0">
+              <a:rPr sz="2000" b="1" i="0">
                 <a:solidFill>
                   <a:srgbClr val="333333"/>
                 </a:solidFill>
@@ -5045,7 +5045,7 @@
               <a:t>Exito:</a:t>
             </a:r>
             <a:r>
-              <a:rPr sz="1500" b="0" i="0">
+              <a:rPr sz="2000" b="0" i="0">
                 <a:solidFill>
                   <a:srgbClr val="333333"/>
                 </a:solidFill>
@@ -5054,7 +5054,7 @@
               <a:t> «fn_precio_consulta» con «RETURNS NUMERIC», «IMMUTABLE», insensible a mayúsculas, recargo del 35 % y «NULL» tratado como falso (45000 → </a:t>
             </a:r>
             <a:r>
-              <a:rPr sz="1500" b="1" i="0">
+              <a:rPr sz="2000" b="1" i="0">
                 <a:solidFill>
                   <a:srgbClr val="333333"/>
                 </a:solidFill>
@@ -5063,7 +5063,7 @@
               <a:t>60750</a:t>
             </a:r>
             <a:r>
-              <a:rPr sz="1500" b="0" i="0">
+              <a:rPr sz="2000" b="0" i="0">
                 <a:solidFill>
                   <a:srgbClr val="333333"/>
                 </a:solidFill>
@@ -5079,7 +5079,7 @@
               </a:spcAft>
             </a:pPr>
             <a:r>
-              <a:rPr sz="1500" b="0" i="0">
+              <a:rPr sz="2000" b="0" i="0">
                 <a:solidFill>
                   <a:srgbClr val="333333"/>
                 </a:solidFill>
@@ -5088,7 +5088,7 @@
               <a:t>–   </a:t>
             </a:r>
             <a:r>
-              <a:rPr sz="1500" b="1" i="0">
+              <a:rPr sz="2000" b="1" i="0">
                 <a:solidFill>
                   <a:srgbClr val="333333"/>
                 </a:solidFill>
@@ -5097,7 +5097,7 @@
               <a:t>Exito:</a:t>
             </a:r>
             <a:r>
-              <a:rPr sz="1500" b="0" i="0">
+              <a:rPr sz="2000" b="0" i="0">
                 <a:solidFill>
                   <a:srgbClr val="333333"/>
                 </a:solidFill>
@@ -5106,7 +5106,7 @@
               <a:t> El trigger de auditoría en sus </a:t>
             </a:r>
             <a:r>
-              <a:rPr sz="1500" b="1" i="0">
+              <a:rPr sz="2000" b="1" i="0">
                 <a:solidFill>
                   <a:srgbClr val="333333"/>
                 </a:solidFill>
@@ -5115,7 +5115,7 @@
               <a:t>dos objetos</a:t>
             </a:r>
             <a:r>
-              <a:rPr sz="1500" b="0" i="0">
+              <a:rPr sz="2000" b="0" i="0">
                 <a:solidFill>
                   <a:srgbClr val="333333"/>
                 </a:solidFill>
@@ -5131,7 +5131,7 @@
               </a:spcAft>
             </a:pPr>
             <a:r>
-              <a:rPr sz="1500" b="0" i="0">
+              <a:rPr sz="2000" b="0" i="0">
                 <a:solidFill>
                   <a:srgbClr val="333333"/>
                 </a:solidFill>
@@ -5140,7 +5140,7 @@
               <a:t>–   </a:t>
             </a:r>
             <a:r>
-              <a:rPr sz="1500" b="1" i="0">
+              <a:rPr sz="2000" b="1" i="0">
                 <a:solidFill>
                   <a:srgbClr val="333333"/>
                 </a:solidFill>
@@ -5149,7 +5149,7 @@
               <a:t>Exito:</a:t>
             </a:r>
             <a:r>
-              <a:rPr sz="1500" b="0" i="0">
+              <a:rPr sz="2000" b="0" i="0">
                 <a:solidFill>
                   <a:srgbClr val="333333"/>
                 </a:solidFill>
@@ -5158,7 +5158,7 @@
               <a:t> Los 3 «UPDATE» dejan </a:t>
             </a:r>
             <a:r>
-              <a:rPr sz="1500" b="1" i="0">
+              <a:rPr sz="2000" b="1" i="0">
                 <a:solidFill>
                   <a:srgbClr val="333333"/>
                 </a:solidFill>
@@ -5167,7 +5167,7 @@
               <a:t>2 filas</a:t>
             </a:r>
             <a:r>
-              <a:rPr sz="1500" b="0" i="0">
+              <a:rPr sz="2000" b="0" i="0">
                 <a:solidFill>
                   <a:srgbClr val="333333"/>
                 </a:solidFill>
@@ -5183,7 +5183,7 @@
               </a:spcAft>
             </a:pPr>
             <a:r>
-              <a:rPr sz="1500" b="0" i="0">
+              <a:rPr sz="2000" b="0" i="0">
                 <a:solidFill>
                   <a:srgbClr val="333333"/>
                 </a:solidFill>
@@ -5192,7 +5192,7 @@
               <a:t>–   </a:t>
             </a:r>
             <a:r>
-              <a:rPr sz="1500" b="1" i="0">
+              <a:rPr sz="2000" b="1" i="0">
                 <a:solidFill>
                   <a:srgbClr val="333333"/>
                 </a:solidFill>
@@ -5201,7 +5201,7 @@
               <a:t>Exito:</a:t>
             </a:r>
             <a:r>
-              <a:rPr sz="1500" b="0" i="0">
+              <a:rPr sz="2000" b="0" i="0">
                 <a:solidFill>
                   <a:srgbClr val="333333"/>
                 </a:solidFill>
@@ -5210,7 +5210,7 @@
               <a:t> El stock negativo (</a:t>
             </a:r>
             <a:r>
-              <a:rPr sz="1500" b="1" i="0">
+              <a:rPr sz="2000" b="1" i="0">
                 <a:solidFill>
                   <a:srgbClr val="333333"/>
                 </a:solidFill>
@@ -5219,7 +5219,7 @@
               <a:t>-7</a:t>
             </a:r>
             <a:r>
-              <a:rPr sz="1500" b="0" i="0">
+              <a:rPr sz="2000" b="0" i="0">
                 <a:solidFill>
                   <a:srgbClr val="333333"/>
                 </a:solidFill>
@@ -5228,7 +5228,7 @@
               <a:t>) evidenciado </a:t>
             </a:r>
             <a:r>
-              <a:rPr sz="1500" b="1" i="0">
+              <a:rPr sz="2000" b="1" i="0">
                 <a:solidFill>
                   <a:srgbClr val="333333"/>
                 </a:solidFill>
@@ -5237,7 +5237,7 @@
               <a:t>antes</a:t>
             </a:r>
             <a:r>
-              <a:rPr sz="1500" b="0" i="0">
+              <a:rPr sz="2000" b="0" i="0">
                 <a:solidFill>
                   <a:srgbClr val="333333"/>
                 </a:solidFill>
@@ -5253,7 +5253,7 @@
               </a:spcAft>
             </a:pPr>
             <a:r>
-              <a:rPr sz="1500" b="0" i="0">
+              <a:rPr sz="2000" b="0" i="0">
                 <a:solidFill>
                   <a:srgbClr val="333333"/>
                 </a:solidFill>
@@ -5262,7 +5262,7 @@
               <a:t>–   </a:t>
             </a:r>
             <a:r>
-              <a:rPr sz="1500" b="1" i="0">
+              <a:rPr sz="2000" b="1" i="0">
                 <a:solidFill>
                   <a:srgbClr val="333333"/>
                 </a:solidFill>
@@ -5271,7 +5271,7 @@
               <a:t>Exito:</a:t>
             </a:r>
             <a:r>
-              <a:rPr sz="1500" b="0" i="0">
+              <a:rPr sz="2000" b="0" i="0">
                 <a:solidFill>
                   <a:srgbClr val="333333"/>
                 </a:solidFill>
@@ -5287,7 +5287,7 @@
               </a:spcAft>
             </a:pPr>
             <a:r>
-              <a:rPr sz="1500" b="0" i="0">
+              <a:rPr sz="2000" b="0" i="0">
                 <a:solidFill>
                   <a:srgbClr val="333333"/>
                 </a:solidFill>
@@ -5296,7 +5296,7 @@
               <a:t>–   </a:t>
             </a:r>
             <a:r>
-              <a:rPr sz="1500" b="1" i="0">
+              <a:rPr sz="2000" b="1" i="0">
                 <a:solidFill>
                   <a:srgbClr val="333333"/>
                 </a:solidFill>
@@ -5305,7 +5305,7 @@
               <a:t>Exito:</a:t>
             </a:r>
             <a:r>
-              <a:rPr sz="1500" b="0" i="0">
+              <a:rPr sz="2000" b="0" i="0">
                 <a:solidFill>
                   <a:srgbClr val="333333"/>
                 </a:solidFill>
@@ -5525,7 +5525,7 @@
               </a:spcAft>
             </a:pPr>
             <a:r>
-              <a:rPr sz="1600" b="0" i="0">
+              <a:rPr sz="2000" b="0" i="0">
                 <a:solidFill>
                   <a:srgbClr val="333333"/>
                 </a:solidFill>
@@ -5541,7 +5541,7 @@
               </a:spcAft>
             </a:pPr>
             <a:r>
-              <a:rPr sz="1600" b="0" i="0">
+              <a:rPr sz="2000" b="0" i="0">
                 <a:solidFill>
                   <a:srgbClr val="333333"/>
                 </a:solidFill>
@@ -5550,7 +5550,7 @@
               <a:t>–   «insumo» fue creada </a:t>
             </a:r>
             <a:r>
-              <a:rPr sz="1600" b="1" i="0">
+              <a:rPr sz="2000" b="1" i="0">
                 <a:solidFill>
                   <a:srgbClr val="333333"/>
                 </a:solidFill>
@@ -5559,7 +5559,7 @@
               <a:t>a propósito sin</a:t>
             </a:r>
             <a:r>
-              <a:rPr sz="1600" b="0" i="0">
+              <a:rPr sz="2000" b="0" i="0">
                 <a:solidFill>
                   <a:srgbClr val="333333"/>
                 </a:solidFill>
@@ -5568,7 +5568,7 @@
               <a:t> «CHECK (stock &gt;= 0)»: el insumo </a:t>
             </a:r>
             <a:r>
-              <a:rPr sz="1600" b="1" i="0">
+              <a:rPr sz="2000" b="1" i="0">
                 <a:solidFill>
                   <a:srgbClr val="333333"/>
                 </a:solidFill>
@@ -5577,7 +5577,7 @@
               <a:t>2 (Vacuna triple felina) tiene stock 3</a:t>
             </a:r>
             <a:r>
-              <a:rPr sz="1600" b="0" i="0">
+              <a:rPr sz="2000" b="0" i="0">
                 <a:solidFill>
                   <a:srgbClr val="333333"/>
                 </a:solidFill>
@@ -5593,7 +5593,7 @@
               </a:spcAft>
             </a:pPr>
             <a:r>
-              <a:rPr sz="1600" b="0" i="0">
+              <a:rPr sz="2000" b="0" i="0">
                 <a:solidFill>
                   <a:srgbClr val="333333"/>
                 </a:solidFill>
@@ -5602,7 +5602,7 @@
               <a:t>–   </a:t>
             </a:r>
             <a:r>
-              <a:rPr sz="1600" b="1" i="0">
+              <a:rPr sz="2000" b="1" i="0">
                 <a:solidFill>
                   <a:srgbClr val="333333"/>
                 </a:solidFill>
@@ -5611,7 +5611,7 @@
               <a:t>Motor:</a:t>
             </a:r>
             <a:r>
-              <a:rPr sz="1600" b="0" i="0">
+              <a:rPr sz="2000" b="0" i="0">
                 <a:solidFill>
                   <a:srgbClr val="333333"/>
                 </a:solidFill>
@@ -5627,7 +5627,7 @@
               </a:spcAft>
             </a:pPr>
             <a:r>
-              <a:rPr sz="1600" b="0" i="0">
+              <a:rPr sz="2000" b="0" i="0">
                 <a:solidFill>
                   <a:srgbClr val="333333"/>
                 </a:solidFill>
@@ -5636,7 +5636,7 @@
               <a:t>–   </a:t>
             </a:r>
             <a:r>
-              <a:rPr sz="1600" b="1" i="0">
+              <a:rPr sz="2000" b="1" i="0">
                 <a:solidFill>
                   <a:srgbClr val="333333"/>
                 </a:solidFill>
@@ -5645,7 +5645,7 @@
               <a:t>Lo que NO se ejecuta:</a:t>
             </a:r>
             <a:r>
-              <a:rPr sz="1600" b="0" i="0">
+              <a:rPr sz="2000" b="0" i="0">
                 <a:solidFill>
                   <a:srgbClr val="333333"/>
                 </a:solidFill>
@@ -8466,7 +8466,7 @@
               </a:spcAft>
             </a:pPr>
             <a:r>
-              <a:rPr sz="1600" b="0" i="0">
+              <a:rPr sz="2000" b="0" i="0">
                 <a:solidFill>
                   <a:srgbClr val="333333"/>
                 </a:solidFill>
@@ -8475,7 +8475,7 @@
               <a:t>–   </a:t>
             </a:r>
             <a:r>
-              <a:rPr sz="1600" b="1" i="0">
+              <a:rPr sz="2000" b="1" i="0">
                 <a:solidFill>
                   <a:srgbClr val="333333"/>
                 </a:solidFill>
@@ -8484,7 +8484,7 @@
               <a:t>Entregable:</a:t>
             </a:r>
             <a:r>
-              <a:rPr sz="1600" b="0" i="0">
+              <a:rPr sz="2000" b="0" i="0">
                 <a:solidFill>
                   <a:srgbClr val="333333"/>
                 </a:solidFill>
@@ -8500,7 +8500,7 @@
               </a:spcAft>
             </a:pPr>
             <a:r>
-              <a:rPr sz="1600" b="0" i="0">
+              <a:rPr sz="2000" b="0" i="0">
                 <a:solidFill>
                   <a:srgbClr val="333333"/>
                 </a:solidFill>
@@ -8516,7 +8516,7 @@
               </a:spcAft>
             </a:pPr>
             <a:r>
-              <a:rPr sz="1600" b="0" i="0">
+              <a:rPr sz="2000" b="0" i="0">
                 <a:solidFill>
                   <a:srgbClr val="333333"/>
                 </a:solidFill>
@@ -8532,7 +8532,7 @@
               </a:spcAft>
             </a:pPr>
             <a:r>
-              <a:rPr sz="1600" b="0" i="0">
+              <a:rPr sz="2000" b="0" i="0">
                 <a:solidFill>
                   <a:srgbClr val="333333"/>
                 </a:solidFill>
@@ -8548,7 +8548,7 @@
               </a:spcAft>
             </a:pPr>
             <a:r>
-              <a:rPr sz="1600" b="0" i="0">
+              <a:rPr sz="2000" b="0" i="0">
                 <a:solidFill>
                   <a:srgbClr val="333333"/>
                 </a:solidFill>
@@ -8557,7 +8557,7 @@
               <a:t>–   </a:t>
             </a:r>
             <a:r>
-              <a:rPr sz="1600" b="1" i="0">
+              <a:rPr sz="2000" b="1" i="0">
                 <a:solidFill>
                   <a:srgbClr val="333333"/>
                 </a:solidFill>
@@ -8566,7 +8566,7 @@
               <a:t>Entrega en ExamLab</a:t>
             </a:r>
             <a:r>
-              <a:rPr sz="1600" b="0" i="0">
+              <a:rPr sz="2000" b="0" i="0">
                 <a:solidFill>
                   <a:srgbClr val="333333"/>
                 </a:solidFill>
@@ -9613,7 +9613,7 @@
               </a:spcAft>
             </a:pPr>
             <a:r>
-              <a:rPr sz="1600" b="0" i="0">
+              <a:rPr sz="2000" b="0" i="0">
                 <a:solidFill>
                   <a:srgbClr val="333333"/>
                 </a:solidFill>
@@ -9622,7 +9622,7 @@
               <a:t>–   </a:t>
             </a:r>
             <a:r>
-              <a:rPr sz="1600" b="1" i="0">
+              <a:rPr sz="2000" b="1" i="0">
                 <a:solidFill>
                   <a:srgbClr val="333333"/>
                 </a:solidFill>
@@ -9631,7 +9631,7 @@
               <a:t>Hoy avanzamos el PI en:</a:t>
             </a:r>
             <a:r>
-              <a:rPr sz="1600" b="0" i="0">
+              <a:rPr sz="2000" b="0" i="0">
                 <a:solidFill>
                   <a:srgbClr val="333333"/>
                 </a:solidFill>
@@ -9647,7 +9647,7 @@
               </a:spcAft>
             </a:pPr>
             <a:r>
-              <a:rPr sz="1600" b="0" i="0">
+              <a:rPr sz="2000" b="0" i="0">
                 <a:solidFill>
                   <a:srgbClr val="333333"/>
                 </a:solidFill>
@@ -9656,7 +9656,7 @@
               <a:t>–   Herramienta: </a:t>
             </a:r>
             <a:r>
-              <a:rPr sz="1600" b="1" i="0">
+              <a:rPr sz="2000" b="1" i="0">
                 <a:solidFill>
                   <a:srgbClr val="333333"/>
                 </a:solidFill>
@@ -9665,7 +9665,7 @@
               <a:t>ExamLab (PostgreSQL) + Google Docs</a:t>
             </a:r>
             <a:r>
-              <a:rPr sz="1600" b="0" i="0">
+              <a:rPr sz="2000" b="0" i="0">
                 <a:solidFill>
                   <a:srgbClr val="333333"/>
                 </a:solidFill>
@@ -9674,7 +9674,7 @@
               <a:t> · Bloque </a:t>
             </a:r>
             <a:r>
-              <a:rPr sz="1600" b="1" i="0">
+              <a:rPr sz="2000" b="1" i="0">
                 <a:solidFill>
                   <a:srgbClr val="333333"/>
                 </a:solidFill>
@@ -9683,7 +9683,7 @@
               <a:t>120 min</a:t>
             </a:r>
             <a:r>
-              <a:rPr sz="1600" b="0" i="0">
+              <a:rPr sz="2000" b="0" i="0">
                 <a:solidFill>
                   <a:srgbClr val="333333"/>
                 </a:solidFill>
@@ -9699,7 +9699,7 @@
               </a:spcAft>
             </a:pPr>
             <a:r>
-              <a:rPr sz="1600" b="0" i="0">
+              <a:rPr sz="2000" b="0" i="0">
                 <a:solidFill>
                   <a:srgbClr val="333333"/>
                 </a:solidFill>
@@ -9708,7 +9708,7 @@
               <a:t>–   </a:t>
             </a:r>
             <a:r>
-              <a:rPr sz="1600" b="1" i="0">
+              <a:rPr sz="2000" b="1" i="0">
                 <a:solidFill>
                   <a:srgbClr val="333333"/>
                 </a:solidFill>
@@ -9717,7 +9717,7 @@
               <a:t>Entregable de hoy:</a:t>
             </a:r>
             <a:r>
-              <a:rPr sz="1600" b="0" i="0">
+              <a:rPr sz="2000" b="0" i="0">
                 <a:solidFill>
                   <a:srgbClr val="333333"/>
                 </a:solidFill>
@@ -9733,7 +9733,7 @@
               </a:spcAft>
             </a:pPr>
             <a:r>
-              <a:rPr sz="1600" b="0" i="0">
+              <a:rPr sz="2000" b="0" i="0">
                 <a:solidFill>
                   <a:srgbClr val="333333"/>
                 </a:solidFill>
@@ -9749,7 +9749,7 @@
               </a:spcAft>
             </a:pPr>
             <a:r>
-              <a:rPr sz="1600" b="0" i="0">
+              <a:rPr sz="2000" b="0" i="0">
                 <a:solidFill>
                   <a:srgbClr val="333333"/>
                 </a:solidFill>
@@ -9765,7 +9765,7 @@
               </a:spcAft>
             </a:pPr>
             <a:r>
-              <a:rPr sz="1600" b="0" i="0">
+              <a:rPr sz="2000" b="0" i="0">
                 <a:solidFill>
                   <a:srgbClr val="333333"/>
                 </a:solidFill>
@@ -10089,7 +10089,7 @@
         <p:spPr>
           <a:xfrm>
             <a:off x="502920" y="2587752"/>
-            <a:ext cx="2164019" cy="2560320"/>
+            <a:ext cx="2164019" cy="3310128"/>
           </a:xfrm>
           <a:prstGeom prst="rect">
             <a:avLst/>
@@ -10204,7 +10204,7 @@
         <p:spPr>
           <a:xfrm>
             <a:off x="2758379" y="2587752"/>
-            <a:ext cx="2164019" cy="2560320"/>
+            <a:ext cx="2164019" cy="3310128"/>
           </a:xfrm>
           <a:prstGeom prst="rect">
             <a:avLst/>
@@ -10319,7 +10319,7 @@
         <p:spPr>
           <a:xfrm>
             <a:off x="5013838" y="2587752"/>
-            <a:ext cx="2164019" cy="2560320"/>
+            <a:ext cx="2164019" cy="3310128"/>
           </a:xfrm>
           <a:prstGeom prst="rect">
             <a:avLst/>
@@ -10434,7 +10434,7 @@
         <p:spPr>
           <a:xfrm>
             <a:off x="7269297" y="2587752"/>
-            <a:ext cx="2164019" cy="2560320"/>
+            <a:ext cx="2164019" cy="3310128"/>
           </a:xfrm>
           <a:prstGeom prst="rect">
             <a:avLst/>
@@ -10549,7 +10549,7 @@
         <p:spPr>
           <a:xfrm>
             <a:off x="9524756" y="2587752"/>
-            <a:ext cx="2164019" cy="2560320"/>
+            <a:ext cx="2164019" cy="3310128"/>
           </a:xfrm>
           <a:prstGeom prst="rect">
             <a:avLst/>
@@ -10583,8 +10583,8 @@
         </p:nvSpPr>
         <p:spPr>
           <a:xfrm>
-            <a:off x="457200" y="5943600"/>
-            <a:ext cx="11277295" cy="365760"/>
+            <a:off x="457200" y="5806440"/>
+            <a:ext cx="11277295" cy="640080"/>
           </a:xfrm>
           <a:prstGeom prst="rect">
             <a:avLst/>
@@ -10837,7 +10837,7 @@
               </a:spcAft>
             </a:pPr>
             <a:r>
-              <a:rPr sz="1500" b="0" i="0">
+              <a:rPr sz="2000" b="0" i="0">
                 <a:solidFill>
                   <a:srgbClr val="333333"/>
                 </a:solidFill>
@@ -10853,7 +10853,7 @@
               </a:spcAft>
             </a:pPr>
             <a:r>
-              <a:rPr sz="1500" b="0" i="0">
+              <a:rPr sz="2000" b="0" i="0">
                 <a:solidFill>
                   <a:srgbClr val="333333"/>
                 </a:solidFill>
@@ -10869,7 +10869,7 @@
               </a:spcAft>
             </a:pPr>
             <a:r>
-              <a:rPr sz="1500" b="0" i="0">
+              <a:rPr sz="2000" b="0" i="0">
                 <a:solidFill>
                   <a:srgbClr val="333333"/>
                 </a:solidFill>
@@ -10885,7 +10885,7 @@
               </a:spcAft>
             </a:pPr>
             <a:r>
-              <a:rPr sz="1500" b="0" i="0">
+              <a:rPr sz="2000" b="0" i="0">
                 <a:solidFill>
                   <a:srgbClr val="333333"/>
                 </a:solidFill>
@@ -10901,7 +10901,7 @@
               </a:spcAft>
             </a:pPr>
             <a:r>
-              <a:rPr sz="1500" b="0" i="0">
+              <a:rPr sz="2000" b="0" i="0">
                 <a:solidFill>
                   <a:srgbClr val="333333"/>
                 </a:solidFill>
@@ -11237,11 +11237,11 @@
           <a:p>
             <a:pPr>
               <a:spcAft>
-                <a:spcPts val="400"/>
+                <a:spcPts val="371"/>
               </a:spcAft>
             </a:pPr>
             <a:r>
-              <a:rPr sz="1400" b="0" i="0">
+              <a:rPr sz="1300" b="0" i="0">
                 <a:solidFill>
                   <a:srgbClr val="FFFFFF"/>
                 </a:solidFill>
@@ -11253,11 +11253,11 @@
           <a:p>
             <a:pPr>
               <a:spcAft>
-                <a:spcPts val="400"/>
+                <a:spcPts val="371"/>
               </a:spcAft>
             </a:pPr>
             <a:r>
-              <a:rPr sz="1400" b="0" i="0">
+              <a:rPr sz="1300" b="0" i="0">
                 <a:solidFill>
                   <a:srgbClr val="FFFFFF"/>
                 </a:solidFill>
@@ -11269,11 +11269,11 @@
           <a:p>
             <a:pPr>
               <a:spcAft>
-                <a:spcPts val="400"/>
+                <a:spcPts val="371"/>
               </a:spcAft>
             </a:pPr>
             <a:r>
-              <a:rPr sz="1400" b="0" i="0">
+              <a:rPr sz="1300" b="0" i="0">
                 <a:solidFill>
                   <a:srgbClr val="FFFFFF"/>
                 </a:solidFill>
@@ -11285,11 +11285,11 @@
           <a:p>
             <a:pPr>
               <a:spcAft>
-                <a:spcPts val="400"/>
+                <a:spcPts val="371"/>
               </a:spcAft>
             </a:pPr>
             <a:r>
-              <a:rPr sz="1400" b="0" i="0">
+              <a:rPr sz="1300" b="0" i="0">
                 <a:solidFill>
                   <a:srgbClr val="FFFFFF"/>
                 </a:solidFill>
@@ -11301,11 +11301,11 @@
           <a:p>
             <a:pPr>
               <a:spcAft>
-                <a:spcPts val="400"/>
+                <a:spcPts val="371"/>
               </a:spcAft>
             </a:pPr>
             <a:r>
-              <a:rPr sz="1400" b="0" i="0">
+              <a:rPr sz="1300" b="0" i="0">
                 <a:solidFill>
                   <a:srgbClr val="FFFFFF"/>
                 </a:solidFill>
@@ -11317,11 +11317,11 @@
           <a:p>
             <a:pPr>
               <a:spcAft>
-                <a:spcPts val="400"/>
+                <a:spcPts val="371"/>
               </a:spcAft>
             </a:pPr>
             <a:r>
-              <a:rPr sz="1400" b="0" i="0">
+              <a:rPr sz="1300" b="0" i="0">
                 <a:solidFill>
                   <a:srgbClr val="FFFFFF"/>
                 </a:solidFill>
@@ -11333,11 +11333,11 @@
           <a:p>
             <a:pPr>
               <a:spcAft>
-                <a:spcPts val="400"/>
+                <a:spcPts val="371"/>
               </a:spcAft>
             </a:pPr>
             <a:r>
-              <a:rPr sz="1400" b="0" i="0">
+              <a:rPr sz="1300" b="0" i="0">
                 <a:solidFill>
                   <a:srgbClr val="FFFFFF"/>
                 </a:solidFill>
@@ -11349,11 +11349,11 @@
           <a:p>
             <a:pPr>
               <a:spcAft>
-                <a:spcPts val="400"/>
+                <a:spcPts val="371"/>
               </a:spcAft>
             </a:pPr>
             <a:r>
-              <a:rPr sz="1400" b="0" i="0">
+              <a:rPr sz="1300" b="0" i="0">
                 <a:solidFill>
                   <a:srgbClr val="FFFFFF"/>
                 </a:solidFill>
@@ -11365,11 +11365,11 @@
           <a:p>
             <a:pPr>
               <a:spcAft>
-                <a:spcPts val="400"/>
+                <a:spcPts val="371"/>
               </a:spcAft>
             </a:pPr>
             <a:r>
-              <a:rPr sz="1400" b="0" i="0">
+              <a:rPr sz="1300" b="0" i="0">
                 <a:solidFill>
                   <a:srgbClr val="FFFFFF"/>
                 </a:solidFill>
@@ -11381,11 +11381,11 @@
           <a:p>
             <a:pPr>
               <a:spcAft>
-                <a:spcPts val="400"/>
+                <a:spcPts val="371"/>
               </a:spcAft>
             </a:pPr>
             <a:r>
-              <a:rPr sz="1400" b="0" i="0">
+              <a:rPr sz="1300" b="0" i="0">
                 <a:solidFill>
                   <a:srgbClr val="FFFFFF"/>
                 </a:solidFill>
@@ -11397,11 +11397,11 @@
           <a:p>
             <a:pPr>
               <a:spcAft>
-                <a:spcPts val="400"/>
+                <a:spcPts val="371"/>
               </a:spcAft>
             </a:pPr>
             <a:r>
-              <a:rPr sz="1400" b="0" i="0">
+              <a:rPr sz="1300" b="0" i="0">
                 <a:solidFill>
                   <a:srgbClr val="FFFFFF"/>
                 </a:solidFill>
@@ -11413,11 +11413,11 @@
           <a:p>
             <a:pPr>
               <a:spcAft>
-                <a:spcPts val="400"/>
+                <a:spcPts val="371"/>
               </a:spcAft>
             </a:pPr>
             <a:r>
-              <a:rPr sz="1400" b="0" i="0">
+              <a:rPr sz="1300" b="0" i="0">
                 <a:solidFill>
                   <a:srgbClr val="FFFFFF"/>
                 </a:solidFill>
@@ -11429,11 +11429,11 @@
           <a:p>
             <a:pPr>
               <a:spcAft>
-                <a:spcPts val="400"/>
+                <a:spcPts val="371"/>
               </a:spcAft>
             </a:pPr>
             <a:r>
-              <a:rPr sz="1400" b="0" i="0">
+              <a:rPr sz="1300" b="0" i="0">
                 <a:solidFill>
                   <a:srgbClr val="FFFFFF"/>
                 </a:solidFill>
@@ -11445,11 +11445,11 @@
           <a:p>
             <a:pPr>
               <a:spcAft>
-                <a:spcPts val="400"/>
+                <a:spcPts val="371"/>
               </a:spcAft>
             </a:pPr>
             <a:r>
-              <a:rPr sz="1400" b="0" i="0">
+              <a:rPr sz="1300" b="0" i="0">
                 <a:solidFill>
                   <a:srgbClr val="FFFFFF"/>
                 </a:solidFill>
@@ -11461,11 +11461,11 @@
           <a:p>
             <a:pPr>
               <a:spcAft>
-                <a:spcPts val="400"/>
+                <a:spcPts val="371"/>
               </a:spcAft>
             </a:pPr>
             <a:r>
-              <a:rPr sz="1400" b="0" i="0">
+              <a:rPr sz="1300" b="0" i="0">
                 <a:solidFill>
                   <a:srgbClr val="FFFFFF"/>
                 </a:solidFill>
@@ -11477,11 +11477,11 @@
           <a:p>
             <a:pPr>
               <a:spcAft>
-                <a:spcPts val="400"/>
+                <a:spcPts val="371"/>
               </a:spcAft>
             </a:pPr>
             <a:r>
-              <a:rPr sz="1400" b="0" i="0">
+              <a:rPr sz="1300" b="0" i="0">
                 <a:solidFill>
                   <a:srgbClr val="FFFFFF"/>
                 </a:solidFill>
@@ -11770,7 +11770,7 @@
               </a:spcAft>
             </a:pPr>
             <a:r>
-              <a:rPr sz="1300" b="0" i="0">
+              <a:rPr sz="1900" b="0" i="0">
                 <a:solidFill>
                   <a:srgbClr val="333333"/>
                 </a:solidFill>
@@ -11779,7 +11779,7 @@
               <a:t>–   </a:t>
             </a:r>
             <a:r>
-              <a:rPr sz="1300" b="1" i="0">
+              <a:rPr sz="1900" b="1" i="0">
                 <a:solidFill>
                   <a:srgbClr val="333333"/>
                 </a:solidFill>
@@ -11788,7 +11788,7 @@
               <a:t>La firma decide todo lo demas.</a:t>
             </a:r>
             <a:r>
-              <a:rPr sz="1300" b="0" i="0">
+              <a:rPr sz="1900" b="0" i="0">
                 <a:solidFill>
                   <a:srgbClr val="333333"/>
                 </a:solidFill>
@@ -11797,7 +11797,7 @@
               <a:t> «CREATE FUNCTION fn_precio_consulta(p_especie TEXT, p_urgencia BOOLEAN) RETURNS NUMERIC LANGUAGE plpgsql IMMUTABLE AS $fn$ ... $fn$;». Es «RETURNS NUMERIC», </a:t>
             </a:r>
             <a:r>
-              <a:rPr sz="1300" b="1" i="0">
+              <a:rPr sz="1900" b="1" i="0">
                 <a:solidFill>
                   <a:srgbClr val="333333"/>
                 </a:solidFill>
@@ -11806,7 +11806,7 @@
               <a:t>no «RETURNS TRIGGER»</a:t>
             </a:r>
             <a:r>
-              <a:rPr sz="1300" b="0" i="0">
+              <a:rPr sz="1900" b="0" i="0">
                 <a:solidFill>
                   <a:srgbClr val="333333"/>
                 </a:solidFill>
@@ -11822,7 +11822,7 @@
               </a:spcAft>
             </a:pPr>
             <a:r>
-              <a:rPr sz="1300" b="0" i="0">
+              <a:rPr sz="1900" b="0" i="0">
                 <a:solidFill>
                   <a:srgbClr val="333333"/>
                 </a:solidFill>
@@ -11831,7 +11831,7 @@
               <a:t>–   </a:t>
             </a:r>
             <a:r>
-              <a:rPr sz="1300" b="1" i="0">
+              <a:rPr sz="1900" b="1" i="0">
                 <a:solidFill>
                   <a:srgbClr val="333333"/>
                 </a:solidFill>
@@ -11840,7 +11840,7 @@
               <a:t>La tabla de tarifas es un «CASE».</a:t>
             </a:r>
             <a:r>
-              <a:rPr sz="1300" b="0" i="0">
+              <a:rPr sz="1900" b="0" i="0">
                 <a:solidFill>
                   <a:srgbClr val="333333"/>
                 </a:solidFill>
@@ -11849,7 +11849,7 @@
               <a:t> «CASE UPPER(p_especie) WHEN 'CANINO' THEN 45000 WHEN 'FELINO' THEN 40000 ELSE 35000 END». El «UPPER()» es lo que hace la comparacion </a:t>
             </a:r>
             <a:r>
-              <a:rPr sz="1300" b="1" i="0">
+              <a:rPr sz="1900" b="1" i="0">
                 <a:solidFill>
                   <a:srgbClr val="333333"/>
                 </a:solidFill>
@@ -11858,7 +11858,7 @@
               <a:t>insensible a mayusculas</a:t>
             </a:r>
             <a:r>
-              <a:rPr sz="1300" b="0" i="0">
+              <a:rPr sz="1900" b="0" i="0">
                 <a:solidFill>
                   <a:srgbClr val="333333"/>
                 </a:solidFill>
@@ -11874,7 +11874,7 @@
               </a:spcAft>
             </a:pPr>
             <a:r>
-              <a:rPr sz="1300" b="0" i="0">
+              <a:rPr sz="1900" b="0" i="0">
                 <a:solidFill>
                   <a:srgbClr val="333333"/>
                 </a:solidFill>
@@ -11883,7 +11883,7 @@
               <a:t>–   </a:t>
             </a:r>
             <a:r>
-              <a:rPr sz="1300" b="1" i="0">
+              <a:rPr sz="1900" b="1" i="0">
                 <a:solidFill>
                   <a:srgbClr val="333333"/>
                 </a:solidFill>
@@ -11892,7 +11892,7 @@
               <a:t>El «NULL» de la urgencia: hazlo explicito con «COALESCE».</a:t>
             </a:r>
             <a:r>
-              <a:rPr sz="1300" b="0" i="0">
+              <a:rPr sz="1900" b="0" i="0">
                 <a:solidFill>
                   <a:srgbClr val="333333"/>
                 </a:solidFill>
@@ -11901,7 +11901,7 @@
               <a:t> «IF COALESCE(p_urgencia, FALSE) THEN v_base := v_base * 1.35; END IF;». Un «IF» a secas ya trata «NULL» como falso, pero en cuanto el booleano entra en una </a:t>
             </a:r>
             <a:r>
-              <a:rPr sz="1300" b="1" i="0">
+              <a:rPr sz="1900" b="1" i="0">
                 <a:solidFill>
                   <a:srgbClr val="333333"/>
                 </a:solidFill>
@@ -11910,7 +11910,7 @@
               <a:t>cuenta</a:t>
             </a:r>
             <a:r>
-              <a:rPr sz="1300" b="0" i="0">
+              <a:rPr sz="1900" b="0" i="0">
                 <a:solidFill>
                   <a:srgbClr val="333333"/>
                 </a:solidFill>
@@ -11926,7 +11926,7 @@
               </a:spcAft>
             </a:pPr>
             <a:r>
-              <a:rPr sz="1300" b="0" i="0">
+              <a:rPr sz="1900" b="0" i="0">
                 <a:solidFill>
                   <a:srgbClr val="333333"/>
                 </a:solidFill>
@@ -11935,7 +11935,7 @@
               <a:t>–   </a:t>
             </a:r>
             <a:r>
-              <a:rPr sz="1300" b="1" i="0">
+              <a:rPr sz="1900" b="1" i="0">
                 <a:solidFill>
                   <a:srgbClr val="333333"/>
                 </a:solidFill>
@@ -11944,7 +11944,7 @@
               <a:t>«IMMUTABLE» es una promesa que el motor cobra:</a:t>
             </a:r>
             <a:r>
-              <a:rPr sz="1300" b="0" i="0">
+              <a:rPr sz="1900" b="0" i="0">
                 <a:solidFill>
                   <a:srgbClr val="333333"/>
                 </a:solidFill>
@@ -11953,7 +11953,7 @@
               <a:t> </a:t>
             </a:r>
             <a:r>
-              <a:rPr sz="1300" b="1" i="0">
+              <a:rPr sz="1900" b="1" i="0">
                 <a:solidFill>
                   <a:srgbClr val="333333"/>
                 </a:solidFill>
@@ -11962,7 +11962,7 @@
               <a:t>misma entrada, misma salida, sin leer tablas</a:t>
             </a:r>
             <a:r>
-              <a:rPr sz="1300" b="0" i="0">
+              <a:rPr sz="1900" b="0" i="0">
                 <a:solidFill>
                   <a:srgbClr val="333333"/>
                 </a:solidFill>
@@ -11971,7 +11971,7 @@
               <a:t>. Por eso el filtro «WHERE m.activa = 'S'» va en la consulta y </a:t>
             </a:r>
             <a:r>
-              <a:rPr sz="1300" b="1" i="0">
+              <a:rPr sz="1900" b="1" i="0">
                 <a:solidFill>
                   <a:srgbClr val="333333"/>
                 </a:solidFill>
@@ -11980,7 +11980,7 @@
               <a:t>no</a:t>
             </a:r>
             <a:r>
-              <a:rPr sz="1300" b="0" i="0">
+              <a:rPr sz="1900" b="0" i="0">
                 <a:solidFill>
                   <a:srgbClr val="333333"/>
                 </a:solidFill>
@@ -11996,7 +11996,7 @@
               </a:spcAft>
             </a:pPr>
             <a:r>
-              <a:rPr sz="1300" b="0" i="0">
+              <a:rPr sz="1900" b="0" i="0">
                 <a:solidFill>
                   <a:srgbClr val="333333"/>
                 </a:solidFill>
@@ -12005,7 +12005,7 @@
               <a:t>–   </a:t>
             </a:r>
             <a:r>
-              <a:rPr sz="1300" b="1" i="0">
+              <a:rPr sz="1900" b="1" i="0">
                 <a:solidFill>
                   <a:srgbClr val="333333"/>
                 </a:solidFill>
@@ -12014,7 +12014,7 @@
               <a:t>Y se usa dentro del «SELECT», que es lo que la hace funcion</a:t>
             </a:r>
             <a:r>
-              <a:rPr sz="1300" b="0" i="0">
+              <a:rPr sz="1900" b="0" i="0">
                 <a:solidFill>
                   <a:srgbClr val="333333"/>
                 </a:solidFill>
@@ -12023,7 +12023,7 @@
               <a:t> (el contraste de la Clase 3): «SELECT nombre, especie, fn_precio_consulta(especie, FALSE) AS tarifa_normal, fn_precio_consulta(especie, TRUE) AS tarifa_urgencia FROM mascota ORDER BY id_mascota;» — un canino en urgencia da </a:t>
             </a:r>
             <a:r>
-              <a:rPr sz="1300" b="1" i="0">
+              <a:rPr sz="1900" b="1" i="0">
                 <a:solidFill>
                   <a:srgbClr val="333333"/>
                 </a:solidFill>
@@ -12032,7 +12032,7 @@
               <a:t>60750</a:t>
             </a:r>
             <a:r>
-              <a:rPr sz="1300" b="0" i="0">
+              <a:rPr sz="1900" b="0" i="0">
                 <a:solidFill>
                   <a:srgbClr val="333333"/>
                 </a:solidFill>
@@ -12286,7 +12286,7 @@
               </a:spcAft>
             </a:pPr>
             <a:r>
-              <a:rPr sz="1300" b="0" i="0">
+              <a:rPr sz="2000" b="0" i="0">
                 <a:solidFill>
                   <a:srgbClr val="333333"/>
                 </a:solidFill>
@@ -12295,7 +12295,7 @@
               <a:t>–   </a:t>
             </a:r>
             <a:r>
-              <a:rPr sz="1300" b="1" i="0">
+              <a:rPr sz="2000" b="1" i="0">
                 <a:solidFill>
                   <a:srgbClr val="333333"/>
                 </a:solidFill>
@@ -12304,7 +12304,7 @@
               <a:t>«CHECK»: una sola fila, una sola columna.</a:t>
             </a:r>
             <a:r>
-              <a:rPr sz="1300" b="0" i="0">
+              <a:rPr sz="2000" b="0" i="0">
                 <a:solidFill>
                   <a:srgbClr val="333333"/>
                 </a:solidFill>
@@ -12313,7 +12313,7 @@
               <a:t> «stock &gt;= 0», «precio &gt; 0», «estado IN (...)». Es lo mas barato y lo mas dificil de saltarse, porque lo aplica el motor sin una linea de codigo. </a:t>
             </a:r>
             <a:r>
-              <a:rPr sz="1300" b="1" i="0">
+              <a:rPr sz="2000" b="1" i="0">
                 <a:solidFill>
                   <a:srgbClr val="333333"/>
                 </a:solidFill>
@@ -12329,7 +12329,7 @@
               </a:spcAft>
             </a:pPr>
             <a:r>
-              <a:rPr sz="1300" b="0" i="0">
+              <a:rPr sz="2000" b="0" i="0">
                 <a:solidFill>
                   <a:srgbClr val="333333"/>
                 </a:solidFill>
@@ -12338,7 +12338,7 @@
               <a:t>–   </a:t>
             </a:r>
             <a:r>
-              <a:rPr sz="1300" b="1" i="0">
+              <a:rPr sz="2000" b="1" i="0">
                 <a:solidFill>
                   <a:srgbClr val="333333"/>
                 </a:solidFill>
@@ -12347,7 +12347,7 @@
               <a:t>«UNIQUE» y «FK»: la relacion entre filas o entre tablas.</a:t>
             </a:r>
             <a:r>
-              <a:rPr sz="1300" b="0" i="0">
+              <a:rPr sz="2000" b="0" i="0">
                 <a:solidFill>
                   <a:srgbClr val="333333"/>
                 </a:solidFill>
@@ -12363,7 +12363,7 @@
               </a:spcAft>
             </a:pPr>
             <a:r>
-              <a:rPr sz="1300" b="0" i="0">
+              <a:rPr sz="2000" b="0" i="0">
                 <a:solidFill>
                   <a:srgbClr val="333333"/>
                 </a:solidFill>
@@ -12372,7 +12372,7 @@
               <a:t>–   </a:t>
             </a:r>
             <a:r>
-              <a:rPr sz="1300" b="1" i="0">
+              <a:rPr sz="2000" b="1" i="0">
                 <a:solidFill>
                   <a:srgbClr val="333333"/>
                 </a:solidFill>
@@ -12381,7 +12381,7 @@
               <a:t>Trigger: cuando la regla necesita OTRA fila u OTRA tabla.</a:t>
             </a:r>
             <a:r>
-              <a:rPr sz="1300" b="0" i="0">
+              <a:rPr sz="2000" b="0" i="0">
                 <a:solidFill>
                   <a:srgbClr val="333333"/>
                 </a:solidFill>
@@ -12390,7 +12390,7 @@
               <a:t> Comparar «OLD» con «NEW», mirar el stock de «insumo» mientras se actualiza otra tabla, o </a:t>
             </a:r>
             <a:r>
-              <a:rPr sz="1300" b="1" i="0">
+              <a:rPr sz="2000" b="1" i="0">
                 <a:solidFill>
                   <a:srgbClr val="333333"/>
                 </a:solidFill>
@@ -12399,7 +12399,7 @@
               <a:t>escribir en una segunda tabla</a:t>
             </a:r>
             <a:r>
-              <a:rPr sz="1300" b="0" i="0">
+              <a:rPr sz="2000" b="0" i="0">
                 <a:solidFill>
                   <a:srgbClr val="333333"/>
                 </a:solidFill>
@@ -12415,7 +12415,7 @@
               </a:spcAft>
             </a:pPr>
             <a:r>
-              <a:rPr sz="1300" b="0" i="0">
+              <a:rPr sz="2000" b="0" i="0">
                 <a:solidFill>
                   <a:srgbClr val="333333"/>
                 </a:solidFill>
@@ -12424,7 +12424,7 @@
               <a:t>–   </a:t>
             </a:r>
             <a:r>
-              <a:rPr sz="1300" b="1" i="0">
+              <a:rPr sz="2000" b="1" i="0">
                 <a:solidFill>
                   <a:srgbClr val="333333"/>
                 </a:solidFill>
@@ -12433,7 +12433,7 @@
               <a:t>Aplicacion: solo lo que la base no puede saber.</a:t>
             </a:r>
             <a:r>
-              <a:rPr sz="1300" b="0" i="0">
+              <a:rPr sz="2000" b="0" i="0">
                 <a:solidFill>
                   <a:srgbClr val="333333"/>
                 </a:solidFill>
@@ -12442,7 +12442,7 @@
               <a:t> El formato del correo, el permiso de la pantalla, la traduccion del mensaje. Y el criterio para decidir: </a:t>
             </a:r>
             <a:r>
-              <a:rPr sz="1300" b="1" i="0">
+              <a:rPr sz="2000" b="1" i="0">
                 <a:solidFill>
                   <a:srgbClr val="333333"/>
                 </a:solidFill>
@@ -12451,7 +12451,7 @@
               <a:t>una validacion que solo vive en la app se salta conectandose por «psql»</a:t>
             </a:r>
             <a:r>
-              <a:rPr sz="1300" b="0" i="0">
+              <a:rPr sz="2000" b="0" i="0">
                 <a:solidFill>
                   <a:srgbClr val="333333"/>
                 </a:solidFill>
@@ -12467,7 +12467,7 @@
               </a:spcAft>
             </a:pPr>
             <a:r>
-              <a:rPr sz="1300" b="0" i="0">
+              <a:rPr sz="2000" b="0" i="0">
                 <a:solidFill>
                   <a:srgbClr val="333333"/>
                 </a:solidFill>
@@ -12476,7 +12476,7 @@
               <a:t>–   </a:t>
             </a:r>
             <a:r>
-              <a:rPr sz="1300" b="1" i="0">
+              <a:rPr sz="2000" b="1" i="0">
                 <a:solidFill>
                   <a:srgbClr val="333333"/>
                 </a:solidFill>
@@ -12485,7 +12485,7 @@
               <a:t>BEFORE valida, AFTER audita.</a:t>
             </a:r>
             <a:r>
-              <a:rPr sz="1300" b="0" i="0">
+              <a:rPr sz="2000" b="0" i="0">
                 <a:solidFill>
                   <a:srgbClr val="333333"/>
                 </a:solidFill>
@@ -12739,7 +12739,7 @@
               </a:spcAft>
             </a:pPr>
             <a:r>
-              <a:rPr sz="1300" b="0" i="0">
+              <a:rPr sz="1900" b="0" i="0">
                 <a:solidFill>
                   <a:srgbClr val="333333"/>
                 </a:solidFill>
@@ -12748,7 +12748,7 @@
               <a:t>–   </a:t>
             </a:r>
             <a:r>
-              <a:rPr sz="1300" b="1" i="0">
+              <a:rPr sz="1900" b="1" i="0">
                 <a:solidFill>
                   <a:srgbClr val="333333"/>
                 </a:solidFill>
@@ -12757,7 +12757,7 @@
               <a:t>1. Que se respalda y con que.</a:t>
             </a:r>
             <a:r>
-              <a:rPr sz="1300" b="0" i="0">
+              <a:rPr sz="1900" b="0" i="0">
                 <a:solidFill>
                   <a:srgbClr val="333333"/>
                 </a:solidFill>
@@ -12766,7 +12766,7 @@
               <a:t> «pg_dump -Fc -d vetcare -f vetcare_AAAAMMDD.dump» para los datos, y «pg_dumpall --globals-only» para los </a:t>
             </a:r>
             <a:r>
-              <a:rPr sz="1300" b="1" i="0">
+              <a:rPr sz="1900" b="1" i="0">
                 <a:solidFill>
                   <a:srgbClr val="333333"/>
                 </a:solidFill>
@@ -12775,7 +12775,7 @@
               <a:t>roles de la Clase 2</a:t>
             </a:r>
             <a:r>
-              <a:rPr sz="1300" b="0" i="0">
+              <a:rPr sz="1900" b="0" i="0">
                 <a:solidFill>
                   <a:srgbClr val="333333"/>
                 </a:solidFill>
@@ -12791,7 +12791,7 @@
               </a:spcAft>
             </a:pPr>
             <a:r>
-              <a:rPr sz="1300" b="0" i="0">
+              <a:rPr sz="1900" b="0" i="0">
                 <a:solidFill>
                   <a:srgbClr val="333333"/>
                 </a:solidFill>
@@ -12800,7 +12800,7 @@
               <a:t>–   </a:t>
             </a:r>
             <a:r>
-              <a:rPr sz="1300" b="1" i="0">
+              <a:rPr sz="1900" b="1" i="0">
                 <a:solidFill>
                   <a:srgbClr val="333333"/>
                 </a:solidFill>
@@ -12809,7 +12809,7 @@
               <a:t>2. Frecuencia, con su razon.</a:t>
             </a:r>
             <a:r>
-              <a:rPr sz="1300" b="0" i="0">
+              <a:rPr sz="1900" b="0" i="0">
                 <a:solidFill>
                   <a:srgbClr val="333333"/>
                 </a:solidFill>
@@ -12818,7 +12818,7 @@
               <a:t> No «diario»: ««pg_dump -Fc» a las 20:30 </a:t>
             </a:r>
             <a:r>
-              <a:rPr sz="1300" b="1" i="0">
+              <a:rPr sz="1900" b="1" i="0">
                 <a:solidFill>
                   <a:srgbClr val="333333"/>
                 </a:solidFill>
@@ -12827,7 +12827,7 @@
               <a:t>porque</a:t>
             </a:r>
             <a:r>
-              <a:rPr sz="1300" b="0" i="0">
+              <a:rPr sz="1900" b="0" i="0">
                 <a:solidFill>
                   <a:srgbClr val="333333"/>
                 </a:solidFill>
@@ -12843,7 +12843,7 @@
               </a:spcAft>
             </a:pPr>
             <a:r>
-              <a:rPr sz="1300" b="0" i="0">
+              <a:rPr sz="1900" b="0" i="0">
                 <a:solidFill>
                   <a:srgbClr val="333333"/>
                 </a:solidFill>
@@ -12852,7 +12852,7 @@
               <a:t>–   </a:t>
             </a:r>
             <a:r>
-              <a:rPr sz="1300" b="1" i="0">
+              <a:rPr sz="1900" b="1" i="0">
                 <a:solidFill>
                   <a:srgbClr val="333333"/>
                 </a:solidFill>
@@ -12861,7 +12861,7 @@
               <a:t>3. Retencion</a:t>
             </a:r>
             <a:r>
-              <a:rPr sz="1300" b="0" i="0">
+              <a:rPr sz="1900" b="0" i="0">
                 <a:solidFill>
                   <a:srgbClr val="333333"/>
                 </a:solidFill>
@@ -12870,7 +12870,7 @@
               <a:t> —cuantas copias y donde: 7 diarias, 4 semanales, 12 mensuales, y </a:t>
             </a:r>
             <a:r>
-              <a:rPr sz="1300" b="1" i="0">
+              <a:rPr sz="1900" b="1" i="0">
                 <a:solidFill>
                   <a:srgbClr val="333333"/>
                 </a:solidFill>
@@ -12879,7 +12879,7 @@
               <a:t>al menos una fuera del mismo servidor</a:t>
             </a:r>
             <a:r>
-              <a:rPr sz="1300" b="0" i="0">
+              <a:rPr sz="1900" b="0" i="0">
                 <a:solidFill>
                   <a:srgbClr val="333333"/>
                 </a:solidFill>
@@ -12888,7 +12888,7 @@
               <a:t>— y </a:t>
             </a:r>
             <a:r>
-              <a:rPr sz="1300" b="1" i="0">
+              <a:rPr sz="1900" b="1" i="0">
                 <a:solidFill>
                   <a:srgbClr val="333333"/>
                 </a:solidFill>
@@ -12897,7 +12897,7 @@
               <a:t>4. RPO y RTO en numeros</a:t>
             </a:r>
             <a:r>
-              <a:rPr sz="1300" b="0" i="0">
+              <a:rPr sz="1900" b="0" i="0">
                 <a:solidFill>
                   <a:srgbClr val="333333"/>
                 </a:solidFill>
@@ -12906,7 +12906,7 @@
               <a:t>: cuantos datos se acepta perder («maximo 1 hora de citas») y cuanto puede estar caida la base. Un dump diario implica un RPO de 24 h: si no alcanza, hace falta </a:t>
             </a:r>
             <a:r>
-              <a:rPr sz="1300" b="1" i="0">
+              <a:rPr sz="1900" b="1" i="0">
                 <a:solidFill>
                   <a:srgbClr val="333333"/>
                 </a:solidFill>
@@ -12915,7 +12915,7 @@
               <a:t>archivado de WAL</a:t>
             </a:r>
             <a:r>
-              <a:rPr sz="1300" b="0" i="0">
+              <a:rPr sz="1900" b="0" i="0">
                 <a:solidFill>
                   <a:srgbClr val="333333"/>
                 </a:solidFill>
@@ -12931,7 +12931,7 @@
               </a:spcAft>
             </a:pPr>
             <a:r>
-              <a:rPr sz="1300" b="0" i="0">
+              <a:rPr sz="1900" b="0" i="0">
                 <a:solidFill>
                   <a:srgbClr val="333333"/>
                 </a:solidFill>
@@ -12940,7 +12940,7 @@
               <a:t>–   </a:t>
             </a:r>
             <a:r>
-              <a:rPr sz="1300" b="1" i="0">
+              <a:rPr sz="1900" b="1" i="0">
                 <a:solidFill>
                   <a:srgbClr val="333333"/>
                 </a:solidFill>
@@ -12949,7 +12949,7 @@
               <a:t>5. Restore de prueba</a:t>
             </a:r>
             <a:r>
-              <a:rPr sz="1300" b="0" i="0">
+              <a:rPr sz="1900" b="0" i="0">
                 <a:solidFill>
                   <a:srgbClr val="333333"/>
                 </a:solidFill>
@@ -12958,7 +12958,7 @@
               <a:t> con «pg_restore» sobre una base vacia: fecha, duracion medida, la consulta que confirma el conteo, cada cuanto se ensaya y quien firma. </a:t>
             </a:r>
             <a:r>
-              <a:rPr sz="1300" b="1" i="0">
+              <a:rPr sz="1900" b="1" i="0">
                 <a:solidFill>
                   <a:srgbClr val="333333"/>
                 </a:solidFill>
@@ -12967,7 +12967,7 @@
               <a:t>Un respaldo que nunca se restauro no es un respaldo:</a:t>
             </a:r>
             <a:r>
-              <a:rPr sz="1300" b="0" i="0">
+              <a:rPr sz="1900" b="0" i="0">
                 <a:solidFill>
                   <a:srgbClr val="333333"/>
                 </a:solidFill>
@@ -12983,7 +12983,7 @@
               </a:spcAft>
             </a:pPr>
             <a:r>
-              <a:rPr sz="1300" b="0" i="0">
+              <a:rPr sz="1900" b="0" i="0">
                 <a:solidFill>
                   <a:srgbClr val="333333"/>
                 </a:solidFill>
@@ -12992,7 +12992,7 @@
               <a:t>–   </a:t>
             </a:r>
             <a:r>
-              <a:rPr sz="1300" b="1" i="0">
+              <a:rPr sz="1900" b="1" i="0">
                 <a:solidFill>
                   <a:srgbClr val="333333"/>
                 </a:solidFill>
@@ -13001,7 +13001,7 @@
               <a:t>6. Que NO cubre el plan</a:t>
             </a:r>
             <a:r>
-              <a:rPr sz="1300" b="0" i="0">
+              <a:rPr sz="1900" b="0" i="0">
                 <a:solidFill>
                   <a:srgbClr val="333333"/>
                 </a:solidFill>
@@ -13010,7 +13010,7 @@
               <a:t> y cual es el riesgo residual que se asume: el borrado por error que se descubre tres dias despues, la hora de citas que cabe en el RPO. </a:t>
             </a:r>
             <a:r>
-              <a:rPr sz="1300" b="1" i="0">
+              <a:rPr sz="1900" b="1" i="0">
                 <a:solidFill>
                   <a:srgbClr val="333333"/>
                 </a:solidFill>
@@ -13019,7 +13019,7 @@
               <a:t>Es la seccion que separa un plan de una lista de comandos</a:t>
             </a:r>
             <a:r>
-              <a:rPr sz="1300" b="0" i="0">
+              <a:rPr sz="1900" b="0" i="0">
                 <a:solidFill>
                   <a:srgbClr val="333333"/>
                 </a:solidFill>
@@ -13239,7 +13239,7 @@
               </a:spcAft>
             </a:pPr>
             <a:r>
-              <a:rPr sz="1600" b="0" i="0">
+              <a:rPr sz="2000" b="0" i="0">
                 <a:solidFill>
                   <a:srgbClr val="333333"/>
                 </a:solidFill>
@@ -13248,7 +13248,7 @@
               <a:t>–   </a:t>
             </a:r>
             <a:r>
-              <a:rPr sz="1600" b="1" i="0">
+              <a:rPr sz="2000" b="1" i="0">
                 <a:solidFill>
                   <a:srgbClr val="333333"/>
                 </a:solidFill>
@@ -13257,7 +13257,7 @@
               <a:t>Herramienta:</a:t>
             </a:r>
             <a:r>
-              <a:rPr sz="1600" b="0" i="0">
+              <a:rPr sz="2000" b="0" i="0">
                 <a:solidFill>
                   <a:srgbClr val="333333"/>
                 </a:solidFill>
@@ -13273,7 +13273,7 @@
               </a:spcAft>
             </a:pPr>
             <a:r>
-              <a:rPr sz="1600" b="0" i="0">
+              <a:rPr sz="2000" b="0" i="0">
                 <a:solidFill>
                   <a:srgbClr val="333333"/>
                 </a:solidFill>
@@ -13282,7 +13282,7 @@
               <a:t>–   </a:t>
             </a:r>
             <a:r>
-              <a:rPr sz="1600" b="1" i="0">
+              <a:rPr sz="2000" b="1" i="0">
                 <a:solidFill>
                   <a:srgbClr val="333333"/>
                 </a:solidFill>
@@ -13291,7 +13291,7 @@
               <a:t>Demo:</a:t>
             </a:r>
             <a:r>
-              <a:rPr sz="1600" b="0" i="0">
+              <a:rPr sz="2000" b="0" i="0">
                 <a:solidFill>
                   <a:srgbClr val="333333"/>
                 </a:solidFill>
@@ -13307,7 +13307,7 @@
               </a:spcAft>
             </a:pPr>
             <a:r>
-              <a:rPr sz="1600" b="0" i="0">
+              <a:rPr sz="2000" b="0" i="0">
                 <a:solidFill>
                   <a:srgbClr val="333333"/>
                 </a:solidFill>
@@ -13323,7 +13323,7 @@
               </a:spcAft>
             </a:pPr>
             <a:r>
-              <a:rPr sz="1600" b="0" i="0">
+              <a:rPr sz="2000" b="0" i="0">
                 <a:solidFill>
                   <a:srgbClr val="333333"/>
                 </a:solidFill>

--- a/Bases de Datos II/Clases/Clase 4 - Funciones disparadores seguridad respaldo/Presentacion.pptx
+++ b/Bases de Datos II/Clases/Clase 4 - Funciones disparadores seguridad respaldo/Presentacion.pptx
@@ -3845,7 +3845,7 @@
                 </a:solidFill>
                 <a:latin typeface="Calibri"/>
               </a:rPr>
-              <a:t>ExamLab</a:t>
+              <a:t>la plataforma del curso</a:t>
             </a:r>
           </a:p>
           <a:p>
@@ -5017,7 +5017,7 @@
                 </a:solidFill>
                 <a:latin typeface="Calibri"/>
               </a:rPr>
-              <a:t> Una función de tarifas y dos triggers —auditoría y stock— corriendo en ExamLab, más el Plan_Backup_VetCare con sus 6 secciones.</a:t>
+              <a:t> Una función de tarifas y dos triggers —auditoría y stock— corriendo en la plataforma del curso, más el Plan_Backup_VetCare con sus 6 secciones.</a:t>
             </a:r>
           </a:p>
           <a:p>
@@ -5311,7 +5311,7 @@
                 </a:solidFill>
                 <a:latin typeface="Calibri"/>
               </a:rPr>
-              <a:t> Entrega domingo 23:59.</a:t>
+              <a:t> Entrega en la fecha que indique el docente.</a:t>
             </a:r>
           </a:p>
         </p:txBody>
@@ -5617,7 +5617,7 @@
                 </a:solidFill>
                 <a:latin typeface="Calibri"/>
               </a:rPr>
-              <a:t> PostgreSQL dentro de ExamLab. La función, los dos triggers y sus pruebas con bloques «DO» corren de verdad y ahí se califican.</a:t>
+              <a:t> PostgreSQL dentro de la plataforma del curso. La función, los dos triggers y sus pruebas con bloques «DO» corren de verdad y ahí se califican.</a:t>
             </a:r>
           </a:p>
           <a:p>
@@ -5651,7 +5651,7 @@
                 </a:solidFill>
                 <a:latin typeface="Calibri"/>
               </a:rPr>
-              <a:t> «pg_dump», «pg_dumpall», «pg_basebackup» ni «pg_restore» —son programas que escriben archivos y ExamLab corre en el navegador—. La pregunta 5 es un documento: se califica que nombre la herramienta correcta.</a:t>
+              <a:t> «pg_dump», «pg_dumpall», «pg_basebackup» ni «pg_restore» —son programas que escriben archivos y la plataforma del curso corre en el navegador—. La pregunta 5 es un documento: se califica que nombre la herramienta correcta.</a:t>
             </a:r>
           </a:p>
         </p:txBody>
@@ -8490,7 +8490,7 @@
                 </a:solidFill>
                 <a:latin typeface="Calibri"/>
               </a:rPr>
-              <a:t> fn_precio_consulta + 2 triggers corriendo en ExamLab + Plan_Backup_VetCare con sus 6 secciones (1 pag.)</a:t>
+              <a:t> fn_precio_consulta + 2 triggers corriendo en la plataforma del curso + Plan_Backup_VetCare con sus 6 secciones (1 pag.)</a:t>
             </a:r>
           </a:p>
           <a:p>
@@ -8506,7 +8506,7 @@
                 </a:solidFill>
                 <a:latin typeface="Calibri"/>
               </a:rPr>
-              <a:t>–   Evidencia: el SQL y su salida quedan guardados en cada pregunta de ExamLab.</a:t>
+              <a:t>–   Evidencia: el SQL y su salida quedan guardados en cada pregunta de la plataforma del curso.</a:t>
             </a:r>
           </a:p>
           <a:p>
@@ -8563,7 +8563,7 @@
                 </a:solidFill>
                 <a:latin typeface="Calibri"/>
               </a:rPr>
-              <a:t>Entrega en ExamLab</a:t>
+              <a:t>Entrega en la plataforma del curso</a:t>
             </a:r>
             <a:r>
               <a:rPr sz="2000" b="0" i="0">
@@ -8572,7 +8572,7 @@
                 </a:solidFill>
                 <a:latin typeface="Calibri"/>
               </a:rPr>
-              <a:t> (https://uniaj.examlab.workers.dev/) — domingo 23:59 cuando aplique taller.</a:t>
+              <a:t> — en la fecha que indique el docente.</a:t>
             </a:r>
           </a:p>
         </p:txBody>
@@ -9167,7 +9167,7 @@
                 </a:solidFill>
                 <a:latin typeface="Calibri"/>
               </a:rPr>
-              <a:t>Taller de la semana en ExamLab (https://uniaj.examlab.workers.dev/): domingo 23:59 (regla del Acuerdo) cuando aplique.</a:t>
+              <a:t>Si el docente asigna taller esta semana, él indica el canal y la fecha.</a:t>
             </a:r>
           </a:p>
         </p:txBody>
@@ -9383,7 +9383,7 @@
                 </a:solidFill>
                 <a:latin typeface="Calibri"/>
               </a:rPr>
-              <a:t>Entregable: fn_precio_consulta + 2 triggers corriendo en ExamLab + Plan_Backup_VetCare con sus 6 secciones (1 pag.)</a:t>
+              <a:t>Entregable: fn_precio_consulta + 2 triggers corriendo en la plataforma del curso + Plan_Backup_VetCare con sus 6 secciones (1 pag.)</a:t>
             </a:r>
           </a:p>
           <a:p>
@@ -9662,7 +9662,7 @@
                 </a:solidFill>
                 <a:latin typeface="Calibri"/>
               </a:rPr>
-              <a:t>ExamLab (PostgreSQL) + Google Docs</a:t>
+              <a:t>PostgreSQL en el navegador + Google Docs</a:t>
             </a:r>
             <a:r>
               <a:rPr sz="2000" b="0" i="0">
@@ -9723,7 +9723,7 @@
                 </a:solidFill>
                 <a:latin typeface="Calibri"/>
               </a:rPr>
-              <a:t> fn_precio_consulta + 2 triggers corriendo en ExamLab + Plan_Backup_VetCare con sus 6 secciones (1 pag.)</a:t>
+              <a:t> fn_precio_consulta + 2 triggers corriendo en la plataforma del curso + Plan_Backup_VetCare con sus 6 secciones (1 pag.)</a:t>
             </a:r>
           </a:p>
           <a:p>
@@ -13263,7 +13263,7 @@
                 </a:solidFill>
                 <a:latin typeface="Calibri"/>
               </a:rPr>
-              <a:t> ExamLab (PostgreSQL) + Google Docs</a:t>
+              <a:t> PostgreSQL en el navegador + Google Docs</a:t>
             </a:r>
           </a:p>
           <a:p>
@@ -13297,7 +13297,7 @@
                 </a:solidFill>
                 <a:latin typeface="Calibri"/>
               </a:rPr>
-              <a:t> fn_precio_consulta + fn_trg_audit_cita con su CREATE TRIGGER ... EXECUTE FUNCTION, en ExamLab, y el esqueleto del plan de respaldo.</a:t>
+              <a:t> fn_precio_consulta + fn_trg_audit_cita con su CREATE TRIGGER ... EXECUTE FUNCTION, en la plataforma del curso, y el esqueleto del plan de respaldo.</a:t>
             </a:r>
           </a:p>
           <a:p>
